--- a/docs/requirements/option-3-ai-site-crm/1Cati-Anforderungsdokument-Praesentation ru.pptx
+++ b/docs/requirements/option-3-ai-site-crm/1Cati-Anforderungsdokument-Praesentation ru.pptx
@@ -334,7 +334,7 @@
           <a:p>
             <a:fld id="{5BCAD085-E8A6-8845-BD4E-CB4CCA059FC4}" type="datetimeFigureOut">
               <a:rPr lang="en-US" smtClean="0"/>
-              <a:t>7/7/2026</a:t>
+              <a:t>7/14/2026</a:t>
             </a:fld>
             <a:endParaRPr lang="en-US"/>
           </a:p>
@@ -502,7 +502,7 @@
           <a:p>
             <a:fld id="{5BCAD085-E8A6-8845-BD4E-CB4CCA059FC4}" type="datetimeFigureOut">
               <a:rPr lang="en-US" smtClean="0"/>
-              <a:t>7/7/2026</a:t>
+              <a:t>7/14/2026</a:t>
             </a:fld>
             <a:endParaRPr lang="en-US"/>
           </a:p>
@@ -680,7 +680,7 @@
           <a:p>
             <a:fld id="{5BCAD085-E8A6-8845-BD4E-CB4CCA059FC4}" type="datetimeFigureOut">
               <a:rPr lang="en-US" smtClean="0"/>
-              <a:t>7/7/2026</a:t>
+              <a:t>7/14/2026</a:t>
             </a:fld>
             <a:endParaRPr lang="en-US"/>
           </a:p>
@@ -848,7 +848,7 @@
           <a:p>
             <a:fld id="{5BCAD085-E8A6-8845-BD4E-CB4CCA059FC4}" type="datetimeFigureOut">
               <a:rPr lang="en-US" smtClean="0"/>
-              <a:t>7/7/2026</a:t>
+              <a:t>7/14/2026</a:t>
             </a:fld>
             <a:endParaRPr lang="en-US"/>
           </a:p>
@@ -1093,7 +1093,7 @@
           <a:p>
             <a:fld id="{5BCAD085-E8A6-8845-BD4E-CB4CCA059FC4}" type="datetimeFigureOut">
               <a:rPr lang="en-US" smtClean="0"/>
-              <a:t>7/7/2026</a:t>
+              <a:t>7/14/2026</a:t>
             </a:fld>
             <a:endParaRPr lang="en-US"/>
           </a:p>
@@ -1378,7 +1378,7 @@
           <a:p>
             <a:fld id="{5BCAD085-E8A6-8845-BD4E-CB4CCA059FC4}" type="datetimeFigureOut">
               <a:rPr lang="en-US" smtClean="0"/>
-              <a:t>7/7/2026</a:t>
+              <a:t>7/14/2026</a:t>
             </a:fld>
             <a:endParaRPr lang="en-US"/>
           </a:p>
@@ -1797,7 +1797,7 @@
           <a:p>
             <a:fld id="{5BCAD085-E8A6-8845-BD4E-CB4CCA059FC4}" type="datetimeFigureOut">
               <a:rPr lang="en-US" smtClean="0"/>
-              <a:t>7/7/2026</a:t>
+              <a:t>7/14/2026</a:t>
             </a:fld>
             <a:endParaRPr lang="en-US"/>
           </a:p>
@@ -1914,7 +1914,7 @@
           <a:p>
             <a:fld id="{5BCAD085-E8A6-8845-BD4E-CB4CCA059FC4}" type="datetimeFigureOut">
               <a:rPr lang="en-US" smtClean="0"/>
-              <a:t>7/7/2026</a:t>
+              <a:t>7/14/2026</a:t>
             </a:fld>
             <a:endParaRPr lang="en-US"/>
           </a:p>
@@ -2009,7 +2009,7 @@
           <a:p>
             <a:fld id="{5BCAD085-E8A6-8845-BD4E-CB4CCA059FC4}" type="datetimeFigureOut">
               <a:rPr lang="en-US" smtClean="0"/>
-              <a:t>7/7/2026</a:t>
+              <a:t>7/14/2026</a:t>
             </a:fld>
             <a:endParaRPr lang="en-US"/>
           </a:p>
@@ -2284,7 +2284,7 @@
           <a:p>
             <a:fld id="{5BCAD085-E8A6-8845-BD4E-CB4CCA059FC4}" type="datetimeFigureOut">
               <a:rPr lang="en-US" smtClean="0"/>
-              <a:t>7/7/2026</a:t>
+              <a:t>7/14/2026</a:t>
             </a:fld>
             <a:endParaRPr lang="en-US"/>
           </a:p>
@@ -2536,7 +2536,7 @@
           <a:p>
             <a:fld id="{5BCAD085-E8A6-8845-BD4E-CB4CCA059FC4}" type="datetimeFigureOut">
               <a:rPr lang="en-US" smtClean="0"/>
-              <a:t>7/7/2026</a:t>
+              <a:t>7/14/2026</a:t>
             </a:fld>
             <a:endParaRPr lang="en-US"/>
           </a:p>
@@ -2747,7 +2747,7 @@
           <a:p>
             <a:fld id="{5BCAD085-E8A6-8845-BD4E-CB4CCA059FC4}" type="datetimeFigureOut">
               <a:rPr lang="en-US" smtClean="0"/>
-              <a:t>7/7/2026</a:t>
+              <a:t>7/14/2026</a:t>
             </a:fld>
             <a:endParaRPr lang="en-US"/>
           </a:p>
@@ -3426,7 +3426,7 @@
         <p:spPr>
           <a:xfrm>
             <a:off x="777240" y="2697480"/>
-            <a:ext cx="8778240" cy="1828800"/>
+            <a:ext cx="10689830" cy="1231106"/>
           </a:xfrm>
           <a:prstGeom prst="rect">
             <a:avLst/>
@@ -3440,15 +3440,147 @@
           <a:lstStyle/>
           <a:p>
             <a:r>
-              <a:rPr sz="4000" b="1" i="0">
+              <a:rPr sz="4000" b="1" i="0" dirty="0" err="1">
                 <a:solidFill>
                   <a:srgbClr val="FFFFFF"/>
                 </a:solidFill>
                 <a:latin typeface="Aptos"/>
               </a:rPr>
-              <a:t>Единая платформа для управления
-всем вашим недвижимым имуществом</a:t>
-            </a:r>
+              <a:t>Единая</a:t>
+            </a:r>
+            <a:r>
+              <a:rPr sz="4000" b="1" i="0" dirty="0">
+                <a:solidFill>
+                  <a:srgbClr val="FFFFFF"/>
+                </a:solidFill>
+                <a:latin typeface="Aptos"/>
+              </a:rPr>
+              <a:t> </a:t>
+            </a:r>
+            <a:r>
+              <a:rPr sz="4000" b="1" i="0" dirty="0" err="1">
+                <a:solidFill>
+                  <a:srgbClr val="FFFFFF"/>
+                </a:solidFill>
+                <a:latin typeface="Aptos"/>
+              </a:rPr>
+              <a:t>платформа</a:t>
+            </a:r>
+            <a:r>
+              <a:rPr sz="4000" b="1" i="0" dirty="0">
+                <a:solidFill>
+                  <a:srgbClr val="FFFFFF"/>
+                </a:solidFill>
+                <a:latin typeface="Aptos"/>
+              </a:rPr>
+              <a:t> </a:t>
+            </a:r>
+            <a:r>
+              <a:rPr sz="4000" b="1" i="0" dirty="0" err="1">
+                <a:solidFill>
+                  <a:srgbClr val="FFFFFF"/>
+                </a:solidFill>
+                <a:latin typeface="Aptos"/>
+              </a:rPr>
+              <a:t>для</a:t>
+            </a:r>
+            <a:r>
+              <a:rPr sz="4000" b="1" i="0" dirty="0">
+                <a:solidFill>
+                  <a:srgbClr val="FFFFFF"/>
+                </a:solidFill>
+                <a:latin typeface="Aptos"/>
+              </a:rPr>
+              <a:t> </a:t>
+            </a:r>
+            <a:r>
+              <a:rPr sz="4000" b="1" i="0" dirty="0" err="1">
+                <a:solidFill>
+                  <a:srgbClr val="FFFFFF"/>
+                </a:solidFill>
+                <a:latin typeface="Aptos"/>
+              </a:rPr>
+              <a:t>управления</a:t>
+            </a:r>
+            <a:r>
+              <a:rPr sz="4000" b="1" i="0" dirty="0">
+                <a:solidFill>
+                  <a:srgbClr val="FFFFFF"/>
+                </a:solidFill>
+                <a:latin typeface="Aptos"/>
+              </a:rPr>
+              <a:t>
+</a:t>
+            </a:r>
+            <a:r>
+              <a:rPr sz="4000" b="1" i="0" dirty="0" err="1">
+                <a:solidFill>
+                  <a:srgbClr val="FFFFFF"/>
+                </a:solidFill>
+                <a:latin typeface="Aptos"/>
+              </a:rPr>
+              <a:t>всем</a:t>
+            </a:r>
+            <a:r>
+              <a:rPr sz="4000" b="1" i="0" dirty="0">
+                <a:solidFill>
+                  <a:srgbClr val="FFFFFF"/>
+                </a:solidFill>
+                <a:latin typeface="Aptos"/>
+              </a:rPr>
+              <a:t> </a:t>
+            </a:r>
+            <a:r>
+              <a:rPr sz="4000" b="1" i="0" dirty="0" err="1">
+                <a:solidFill>
+                  <a:srgbClr val="FFFFFF"/>
+                </a:solidFill>
+                <a:latin typeface="Aptos"/>
+              </a:rPr>
+              <a:t>вашим</a:t>
+            </a:r>
+            <a:r>
+              <a:rPr sz="4000" b="1" i="0" dirty="0">
+                <a:solidFill>
+                  <a:srgbClr val="FFFFFF"/>
+                </a:solidFill>
+                <a:latin typeface="Aptos"/>
+              </a:rPr>
+              <a:t> </a:t>
+            </a:r>
+            <a:r>
+              <a:rPr sz="4000" b="1" i="0" dirty="0" err="1">
+                <a:solidFill>
+                  <a:srgbClr val="FFFFFF"/>
+                </a:solidFill>
+                <a:latin typeface="Aptos"/>
+              </a:rPr>
+              <a:t>недвижимым</a:t>
+            </a:r>
+            <a:r>
+              <a:rPr sz="4000" b="1" i="0" dirty="0">
+                <a:solidFill>
+                  <a:srgbClr val="FFFFFF"/>
+                </a:solidFill>
+                <a:latin typeface="Aptos"/>
+              </a:rPr>
+              <a:t> </a:t>
+            </a:r>
+            <a:r>
+              <a:rPr sz="4000" b="1" i="0" dirty="0" err="1">
+                <a:solidFill>
+                  <a:srgbClr val="FFFFFF"/>
+                </a:solidFill>
+                <a:latin typeface="Aptos"/>
+              </a:rPr>
+              <a:t>имуществом</a:t>
+            </a:r>
+            <a:endParaRPr sz="4000" b="1" i="0" dirty="0">
+              <a:solidFill>
+                <a:srgbClr val="FFFFFF"/>
+              </a:solidFill>
+              <a:latin typeface="Aptos"/>
+            </a:endParaRPr>
           </a:p>
         </p:txBody>
       </p:sp>
@@ -3461,7 +3593,7 @@
         <p:spPr>
           <a:xfrm>
             <a:off x="777240" y="4343400"/>
-            <a:ext cx="7680960" cy="400110"/>
+            <a:ext cx="7680960" cy="600164"/>
           </a:xfrm>
           <a:prstGeom prst="rect">
             <a:avLst/>
@@ -3481,7 +3613,7 @@
                 </a:solidFill>
                 <a:latin typeface="Aptos"/>
               </a:rPr>
-              <a:t>Централизованная многоязычная платформа </a:t>
+              <a:t>Централизованная</a:t>
             </a:r>
             <a:r>
               <a:rPr sz="1300" b="0" i="0" dirty="0">
@@ -3490,7 +3622,43 @@
                 </a:solidFill>
                 <a:latin typeface="Aptos"/>
               </a:rPr>
-              <a:t>New Level Premium </a:t>
+              <a:t> </a:t>
+            </a:r>
+            <a:r>
+              <a:rPr sz="1300" b="0" i="0" dirty="0" err="1">
+                <a:solidFill>
+                  <a:srgbClr val="CDE7E1"/>
+                </a:solidFill>
+                <a:latin typeface="Aptos"/>
+              </a:rPr>
+              <a:t>многоязычная</a:t>
+            </a:r>
+            <a:r>
+              <a:rPr sz="1300" b="0" i="0" dirty="0">
+                <a:solidFill>
+                  <a:srgbClr val="CDE7E1"/>
+                </a:solidFill>
+                <a:latin typeface="Aptos"/>
+              </a:rPr>
+              <a:t> </a:t>
+            </a:r>
+            <a:r>
+              <a:rPr sz="1300" b="0" i="0" dirty="0" err="1">
+                <a:solidFill>
+                  <a:srgbClr val="CDE7E1"/>
+                </a:solidFill>
+                <a:latin typeface="Aptos"/>
+              </a:rPr>
+              <a:t>платформа</a:t>
+            </a:r>
+            <a:r>
+              <a:rPr sz="1300" b="0" i="0" dirty="0">
+                <a:solidFill>
+                  <a:srgbClr val="CDE7E1"/>
+                </a:solidFill>
+                <a:latin typeface="Aptos"/>
+              </a:rPr>
+              <a:t> New Level Premium </a:t>
             </a:r>
             <a:r>
               <a:rPr lang="de-DE" sz="1300" b="0" i="0" dirty="0">
@@ -3499,7 +3667,7 @@
                 </a:solidFill>
                 <a:latin typeface="Aptos"/>
               </a:rPr>
-              <a:t>— </a:t>
+              <a:t>- </a:t>
             </a:r>
             <a:r>
               <a:rPr sz="1300" b="0" i="0" dirty="0">
@@ -4220,7 +4388,16 @@
                 </a:solidFill>
                 <a:latin typeface="Aptos"/>
               </a:rPr>
-              <a:t>Конфиденциально </a:t>
+              <a:t>Конфиденциально</a:t>
+            </a:r>
+            <a:r>
+              <a:rPr sz="850" b="0" i="0" dirty="0">
+                <a:solidFill>
+                  <a:srgbClr val="A9D2CB"/>
+                </a:solidFill>
+                <a:latin typeface="Aptos"/>
+              </a:rPr>
+              <a:t> </a:t>
             </a:r>
             <a:r>
               <a:rPr lang="de-DE" sz="850" b="0" i="0" dirty="0">
@@ -4229,7 +4406,7 @@
                 </a:solidFill>
                 <a:latin typeface="Aptos"/>
               </a:rPr>
-              <a:t>— </a:t>
+              <a:t>- </a:t>
             </a:r>
             <a:r>
               <a:rPr sz="850" b="0" i="0" dirty="0" err="1">
@@ -4728,7 +4905,7 @@
         <p:spPr>
           <a:xfrm>
             <a:off x="6423660" y="1792224"/>
-            <a:ext cx="4869180" cy="574516"/>
+            <a:ext cx="4869180" cy="736099"/>
           </a:xfrm>
           <a:prstGeom prst="rect">
             <a:avLst/>
@@ -4779,7 +4956,7 @@
                 </a:solidFill>
                 <a:latin typeface="Aptos"/>
               </a:rPr>
-              <a:t>Получают через спонсируемую собственником модель доступа по времени ограниченный по сроку доступ </a:t>
+              <a:t>Получают</a:t>
             </a:r>
             <a:r>
               <a:rPr sz="1050" b="0" i="0" dirty="0">
@@ -4788,7 +4965,7 @@
                 </a:solidFill>
                 <a:latin typeface="Aptos"/>
               </a:rPr>
-              <a:t>к </a:t>
+              <a:t> </a:t>
             </a:r>
             <a:r>
               <a:rPr sz="1050" b="0" i="0" dirty="0" err="1">
@@ -4797,7 +4974,7 @@
                 </a:solidFill>
                 <a:latin typeface="Aptos"/>
               </a:rPr>
-              <a:t>своей </a:t>
+              <a:t>через</a:t>
             </a:r>
             <a:r>
               <a:rPr sz="1050" b="0" i="0" dirty="0">
@@ -4806,7 +4983,223 @@
                 </a:solidFill>
                 <a:latin typeface="Aptos"/>
               </a:rPr>
-              <a:t>квартире </a:t>
+              <a:t> </a:t>
+            </a:r>
+            <a:r>
+              <a:rPr sz="1050" b="0" i="0" dirty="0" err="1">
+                <a:solidFill>
+                  <a:srgbClr val="64716D"/>
+                </a:solidFill>
+                <a:latin typeface="Aptos"/>
+              </a:rPr>
+              <a:t>спонсируемую</a:t>
+            </a:r>
+            <a:r>
+              <a:rPr sz="1050" b="0" i="0" dirty="0">
+                <a:solidFill>
+                  <a:srgbClr val="64716D"/>
+                </a:solidFill>
+                <a:latin typeface="Aptos"/>
+              </a:rPr>
+              <a:t> </a:t>
+            </a:r>
+            <a:r>
+              <a:rPr sz="1050" b="0" i="0" dirty="0" err="1">
+                <a:solidFill>
+                  <a:srgbClr val="64716D"/>
+                </a:solidFill>
+                <a:latin typeface="Aptos"/>
+              </a:rPr>
+              <a:t>собственником</a:t>
+            </a:r>
+            <a:r>
+              <a:rPr sz="1050" b="0" i="0" dirty="0">
+                <a:solidFill>
+                  <a:srgbClr val="64716D"/>
+                </a:solidFill>
+                <a:latin typeface="Aptos"/>
+              </a:rPr>
+              <a:t> </a:t>
+            </a:r>
+            <a:r>
+              <a:rPr sz="1050" b="0" i="0" dirty="0" err="1">
+                <a:solidFill>
+                  <a:srgbClr val="64716D"/>
+                </a:solidFill>
+                <a:latin typeface="Aptos"/>
+              </a:rPr>
+              <a:t>модель</a:t>
+            </a:r>
+            <a:r>
+              <a:rPr sz="1050" b="0" i="0" dirty="0">
+                <a:solidFill>
+                  <a:srgbClr val="64716D"/>
+                </a:solidFill>
+                <a:latin typeface="Aptos"/>
+              </a:rPr>
+              <a:t> </a:t>
+            </a:r>
+            <a:r>
+              <a:rPr sz="1050" b="0" i="0" dirty="0" err="1">
+                <a:solidFill>
+                  <a:srgbClr val="64716D"/>
+                </a:solidFill>
+                <a:latin typeface="Aptos"/>
+              </a:rPr>
+              <a:t>доступа</a:t>
+            </a:r>
+            <a:r>
+              <a:rPr sz="1050" b="0" i="0" dirty="0">
+                <a:solidFill>
+                  <a:srgbClr val="64716D"/>
+                </a:solidFill>
+                <a:latin typeface="Aptos"/>
+              </a:rPr>
+              <a:t> </a:t>
+            </a:r>
+            <a:r>
+              <a:rPr sz="1050" b="0" i="0" dirty="0" err="1">
+                <a:solidFill>
+                  <a:srgbClr val="64716D"/>
+                </a:solidFill>
+                <a:latin typeface="Aptos"/>
+              </a:rPr>
+              <a:t>по</a:t>
+            </a:r>
+            <a:r>
+              <a:rPr sz="1050" b="0" i="0" dirty="0">
+                <a:solidFill>
+                  <a:srgbClr val="64716D"/>
+                </a:solidFill>
+                <a:latin typeface="Aptos"/>
+              </a:rPr>
+              <a:t> </a:t>
+            </a:r>
+            <a:r>
+              <a:rPr sz="1050" b="0" i="0" dirty="0" err="1">
+                <a:solidFill>
+                  <a:srgbClr val="64716D"/>
+                </a:solidFill>
+                <a:latin typeface="Aptos"/>
+              </a:rPr>
+              <a:t>времени</a:t>
+            </a:r>
+            <a:r>
+              <a:rPr sz="1050" b="0" i="0" dirty="0">
+                <a:solidFill>
+                  <a:srgbClr val="64716D"/>
+                </a:solidFill>
+                <a:latin typeface="Aptos"/>
+              </a:rPr>
+              <a:t> </a:t>
+            </a:r>
+            <a:r>
+              <a:rPr sz="1050" b="0" i="0" dirty="0" err="1">
+                <a:solidFill>
+                  <a:srgbClr val="64716D"/>
+                </a:solidFill>
+                <a:latin typeface="Aptos"/>
+              </a:rPr>
+              <a:t>ограниченный</a:t>
+            </a:r>
+            <a:r>
+              <a:rPr sz="1050" b="0" i="0" dirty="0">
+                <a:solidFill>
+                  <a:srgbClr val="64716D"/>
+                </a:solidFill>
+                <a:latin typeface="Aptos"/>
+              </a:rPr>
+              <a:t> </a:t>
+            </a:r>
+            <a:r>
+              <a:rPr sz="1050" b="0" i="0" dirty="0" err="1">
+                <a:solidFill>
+                  <a:srgbClr val="64716D"/>
+                </a:solidFill>
+                <a:latin typeface="Aptos"/>
+              </a:rPr>
+              <a:t>по</a:t>
+            </a:r>
+            <a:r>
+              <a:rPr sz="1050" b="0" i="0" dirty="0">
+                <a:solidFill>
+                  <a:srgbClr val="64716D"/>
+                </a:solidFill>
+                <a:latin typeface="Aptos"/>
+              </a:rPr>
+              <a:t> </a:t>
+            </a:r>
+            <a:r>
+              <a:rPr sz="1050" b="0" i="0" dirty="0" err="1">
+                <a:solidFill>
+                  <a:srgbClr val="64716D"/>
+                </a:solidFill>
+                <a:latin typeface="Aptos"/>
+              </a:rPr>
+              <a:t>сроку</a:t>
+            </a:r>
+            <a:r>
+              <a:rPr sz="1050" b="0" i="0" dirty="0">
+                <a:solidFill>
+                  <a:srgbClr val="64716D"/>
+                </a:solidFill>
+                <a:latin typeface="Aptos"/>
+              </a:rPr>
+              <a:t> </a:t>
+            </a:r>
+            <a:r>
+              <a:rPr sz="1050" b="0" i="0" dirty="0" err="1">
+                <a:solidFill>
+                  <a:srgbClr val="64716D"/>
+                </a:solidFill>
+                <a:latin typeface="Aptos"/>
+              </a:rPr>
+              <a:t>доступ</a:t>
+            </a:r>
+            <a:r>
+              <a:rPr sz="1050" b="0" i="0" dirty="0">
+                <a:solidFill>
+                  <a:srgbClr val="64716D"/>
+                </a:solidFill>
+                <a:latin typeface="Aptos"/>
+              </a:rPr>
+              <a:t> к </a:t>
+            </a:r>
+            <a:r>
+              <a:rPr sz="1050" b="0" i="0" dirty="0" err="1">
+                <a:solidFill>
+                  <a:srgbClr val="64716D"/>
+                </a:solidFill>
+                <a:latin typeface="Aptos"/>
+              </a:rPr>
+              <a:t>своей</a:t>
+            </a:r>
+            <a:r>
+              <a:rPr sz="1050" b="0" i="0" dirty="0">
+                <a:solidFill>
+                  <a:srgbClr val="64716D"/>
+                </a:solidFill>
+                <a:latin typeface="Aptos"/>
+              </a:rPr>
+              <a:t> </a:t>
+            </a:r>
+            <a:r>
+              <a:rPr sz="1050" b="0" i="0" dirty="0" err="1">
+                <a:solidFill>
+                  <a:srgbClr val="64716D"/>
+                </a:solidFill>
+                <a:latin typeface="Aptos"/>
+              </a:rPr>
+              <a:t>квартире</a:t>
+            </a:r>
+            <a:r>
+              <a:rPr sz="1050" b="0" i="0" dirty="0">
+                <a:solidFill>
+                  <a:srgbClr val="64716D"/>
+                </a:solidFill>
+                <a:latin typeface="Aptos"/>
+              </a:rPr>
+              <a:t> </a:t>
             </a:r>
             <a:r>
               <a:rPr lang="de-DE" sz="1050" b="0" i="0" dirty="0">
@@ -4815,7 +5208,7 @@
                 </a:solidFill>
                 <a:latin typeface="Aptos"/>
               </a:rPr>
-              <a:t>— </a:t>
+              <a:t>- </a:t>
             </a:r>
             <a:r>
               <a:rPr sz="1050" b="0" i="0" dirty="0" err="1">
@@ -4896,7 +5289,7 @@
         <p:spPr>
           <a:xfrm>
             <a:off x="868680" y="3712464"/>
-            <a:ext cx="4869180" cy="736099"/>
+            <a:ext cx="4869180" cy="897682"/>
           </a:xfrm>
           <a:prstGeom prst="rect">
             <a:avLst/>
@@ -4947,7 +5340,7 @@
                 </a:solidFill>
                 <a:latin typeface="Aptos"/>
               </a:rPr>
-              <a:t>Шесть ролей </a:t>
+              <a:t>Шесть ролей в </a:t>
             </a:r>
             <a:r>
               <a:rPr sz="1050" b="0" i="0" dirty="0" err="1">
@@ -4956,7 +5349,7 @@
                 </a:solidFill>
                 <a:latin typeface="Aptos"/>
               </a:rPr>
-              <a:t>в Ataberk </a:t>
+              <a:t>Ataberk</a:t>
             </a:r>
             <a:r>
               <a:rPr sz="1050" b="0" i="0" dirty="0">
@@ -4965,7 +5358,7 @@
                 </a:solidFill>
                 <a:latin typeface="Aptos"/>
               </a:rPr>
-              <a:t>Estate: администрация, </a:t>
+              <a:t> Estate: администрация, </a:t>
             </a:r>
             <a:r>
               <a:rPr sz="1050" b="0" i="0" dirty="0" err="1">
@@ -4974,7 +5367,7 @@
                 </a:solidFill>
                 <a:latin typeface="Aptos"/>
               </a:rPr>
-              <a:t>менеджеры объектов</a:t>
+              <a:t>менеджеры</a:t>
             </a:r>
             <a:r>
               <a:rPr sz="1050" b="0" i="0" dirty="0">
@@ -4983,6 +5376,24 @@
                 </a:solidFill>
                 <a:latin typeface="Aptos"/>
               </a:rPr>
+              <a:t> </a:t>
+            </a:r>
+            <a:r>
+              <a:rPr sz="1050" b="0" i="0" dirty="0" err="1">
+                <a:solidFill>
+                  <a:srgbClr val="64716D"/>
+                </a:solidFill>
+                <a:latin typeface="Aptos"/>
+              </a:rPr>
+              <a:t>объектов</a:t>
+            </a:r>
+            <a:r>
+              <a:rPr sz="1050" b="0" i="0" dirty="0">
+                <a:solidFill>
+                  <a:srgbClr val="64716D"/>
+                </a:solidFill>
+                <a:latin typeface="Aptos"/>
+              </a:rPr>
               <a:t>, </a:t>
             </a:r>
             <a:r>
@@ -5001,7 +5412,7 @@
                 </a:solidFill>
                 <a:latin typeface="Aptos"/>
               </a:rPr>
-              <a:t>, выездная служба/технический персонал, служба безопасности</a:t>
+              <a:t>, выездная служба/технический персонал, служба безопасности, а </a:t>
             </a:r>
             <a:r>
               <a:rPr sz="1050" b="0" i="0" dirty="0" err="1">
@@ -5010,7 +5421,70 @@
                 </a:solidFill>
                 <a:latin typeface="Aptos"/>
               </a:rPr>
-              <a:t>, а также служба поддержки/внедрения </a:t>
+              <a:t>также</a:t>
+            </a:r>
+            <a:r>
+              <a:rPr sz="1050" b="0" i="0" dirty="0">
+                <a:solidFill>
+                  <a:srgbClr val="64716D"/>
+                </a:solidFill>
+                <a:latin typeface="Aptos"/>
+              </a:rPr>
+              <a:t> </a:t>
+            </a:r>
+            <a:r>
+              <a:rPr sz="1050" b="0" i="0" dirty="0" err="1">
+                <a:solidFill>
+                  <a:srgbClr val="64716D"/>
+                </a:solidFill>
+                <a:latin typeface="Aptos"/>
+              </a:rPr>
+              <a:t>служба</a:t>
+            </a:r>
+            <a:r>
+              <a:rPr sz="1050" b="0" i="0" dirty="0">
+                <a:solidFill>
+                  <a:srgbClr val="64716D"/>
+                </a:solidFill>
+                <a:latin typeface="Aptos"/>
+              </a:rPr>
+              <a:t> </a:t>
+            </a:r>
+            <a:r>
+              <a:rPr sz="1050" b="0" i="0" dirty="0" err="1">
+                <a:solidFill>
+                  <a:srgbClr val="64716D"/>
+                </a:solidFill>
+                <a:latin typeface="Aptos"/>
+              </a:rPr>
+              <a:t>поддержки</a:t>
+            </a:r>
+            <a:r>
+              <a:rPr sz="1050" b="0" i="0" dirty="0">
+                <a:solidFill>
+                  <a:srgbClr val="64716D"/>
+                </a:solidFill>
+                <a:latin typeface="Aptos"/>
+              </a:rPr>
+              <a:t>/</a:t>
+            </a:r>
+            <a:r>
+              <a:rPr sz="1050" b="0" i="0" dirty="0" err="1">
+                <a:solidFill>
+                  <a:srgbClr val="64716D"/>
+                </a:solidFill>
+                <a:latin typeface="Aptos"/>
+              </a:rPr>
+              <a:t>внедрения</a:t>
+            </a:r>
+            <a:r>
+              <a:rPr sz="1050" b="0" i="0" dirty="0">
+                <a:solidFill>
+                  <a:srgbClr val="64716D"/>
+                </a:solidFill>
+                <a:latin typeface="Aptos"/>
+              </a:rPr>
+              <a:t> </a:t>
             </a:r>
             <a:r>
               <a:rPr lang="de-DE" sz="1050" b="0" i="0" dirty="0">
@@ -5019,7 +5493,7 @@
                 </a:solidFill>
                 <a:latin typeface="Aptos"/>
               </a:rPr>
-              <a:t>— </a:t>
+              <a:t>- </a:t>
             </a:r>
             <a:r>
               <a:rPr sz="1050" b="0" i="0" dirty="0" err="1">
@@ -5334,7 +5808,7 @@
                 </a:solidFill>
                 <a:latin typeface="Aptos"/>
               </a:rPr>
-              <a:t>— </a:t>
+              <a:t>- </a:t>
             </a:r>
             <a:r>
               <a:rPr sz="750" b="0" i="0" dirty="0">
@@ -5898,7 +6372,7 @@
         <p:spPr>
           <a:xfrm>
             <a:off x="6423660" y="1792224"/>
-            <a:ext cx="4869180" cy="574516"/>
+            <a:ext cx="4869180" cy="736099"/>
           </a:xfrm>
           <a:prstGeom prst="rect">
             <a:avLst/>
@@ -5940,7 +6414,7 @@
                 </a:solidFill>
                 <a:latin typeface="Aptos"/>
               </a:rPr>
-              <a:t>Каждая </a:t>
+              <a:t>Каждая</a:t>
             </a:r>
             <a:r>
               <a:rPr sz="1050" b="0" i="0" dirty="0">
@@ -5949,7 +6423,7 @@
                 </a:solidFill>
                 <a:latin typeface="Aptos"/>
               </a:rPr>
-              <a:t>важная </a:t>
+              <a:t> важная </a:t>
             </a:r>
             <a:r>
               <a:rPr sz="1050" b="0" i="0" dirty="0" err="1">
@@ -5958,7 +6432,7 @@
                 </a:solidFill>
                 <a:latin typeface="Aptos"/>
               </a:rPr>
-              <a:t>операция регистрируется с указанием пользователя</a:t>
+              <a:t>операция</a:t>
             </a:r>
             <a:r>
               <a:rPr sz="1050" b="0" i="0" dirty="0">
@@ -5967,6 +6441,60 @@
                 </a:solidFill>
                 <a:latin typeface="Aptos"/>
               </a:rPr>
+              <a:t> </a:t>
+            </a:r>
+            <a:r>
+              <a:rPr sz="1050" b="0" i="0" dirty="0" err="1">
+                <a:solidFill>
+                  <a:srgbClr val="64716D"/>
+                </a:solidFill>
+                <a:latin typeface="Aptos"/>
+              </a:rPr>
+              <a:t>регистрируется</a:t>
+            </a:r>
+            <a:r>
+              <a:rPr sz="1050" b="0" i="0" dirty="0">
+                <a:solidFill>
+                  <a:srgbClr val="64716D"/>
+                </a:solidFill>
+                <a:latin typeface="Aptos"/>
+              </a:rPr>
+              <a:t> с </a:t>
+            </a:r>
+            <a:r>
+              <a:rPr sz="1050" b="0" i="0" dirty="0" err="1">
+                <a:solidFill>
+                  <a:srgbClr val="64716D"/>
+                </a:solidFill>
+                <a:latin typeface="Aptos"/>
+              </a:rPr>
+              <a:t>указанием</a:t>
+            </a:r>
+            <a:r>
+              <a:rPr sz="1050" b="0" i="0" dirty="0">
+                <a:solidFill>
+                  <a:srgbClr val="64716D"/>
+                </a:solidFill>
+                <a:latin typeface="Aptos"/>
+              </a:rPr>
+              <a:t> </a:t>
+            </a:r>
+            <a:r>
+              <a:rPr sz="1050" b="0" i="0" dirty="0" err="1">
+                <a:solidFill>
+                  <a:srgbClr val="64716D"/>
+                </a:solidFill>
+                <a:latin typeface="Aptos"/>
+              </a:rPr>
+              <a:t>пользователя</a:t>
+            </a:r>
+            <a:r>
+              <a:rPr sz="1050" b="0" i="0" dirty="0">
+                <a:solidFill>
+                  <a:srgbClr val="64716D"/>
+                </a:solidFill>
+                <a:latin typeface="Aptos"/>
+              </a:rPr>
               <a:t>, роли, </a:t>
             </a:r>
             <a:r>
@@ -5976,7 +6504,7 @@
                 </a:solidFill>
                 <a:latin typeface="Aptos"/>
               </a:rPr>
-              <a:t>времени </a:t>
+              <a:t>времени</a:t>
             </a:r>
             <a:r>
               <a:rPr sz="1050" b="0" i="0" dirty="0">
@@ -5985,7 +6513,25 @@
                 </a:solidFill>
                 <a:latin typeface="Aptos"/>
               </a:rPr>
-              <a:t>и причины </a:t>
+              <a:t> и </a:t>
+            </a:r>
+            <a:r>
+              <a:rPr sz="1050" b="0" i="0" dirty="0" err="1">
+                <a:solidFill>
+                  <a:srgbClr val="64716D"/>
+                </a:solidFill>
+                <a:latin typeface="Aptos"/>
+              </a:rPr>
+              <a:t>причины</a:t>
+            </a:r>
+            <a:r>
+              <a:rPr sz="1050" b="0" i="0" dirty="0">
+                <a:solidFill>
+                  <a:srgbClr val="64716D"/>
+                </a:solidFill>
+                <a:latin typeface="Aptos"/>
+              </a:rPr>
+              <a:t> </a:t>
             </a:r>
             <a:r>
               <a:rPr lang="de-DE" sz="1050" b="0" i="0" dirty="0">
@@ -5994,7 +6540,7 @@
                 </a:solidFill>
                 <a:latin typeface="Aptos"/>
               </a:rPr>
-              <a:t>— </a:t>
+              <a:t>- </a:t>
             </a:r>
             <a:r>
               <a:rPr sz="1050" b="0" i="0" dirty="0">
@@ -6162,7 +6708,7 @@
                 </a:solidFill>
                 <a:latin typeface="Aptos"/>
               </a:rPr>
-              <a:t>раздел снижает барьер </a:t>
+              <a:t>раздел</a:t>
             </a:r>
             <a:r>
               <a:rPr sz="1050" b="0" i="0" dirty="0">
@@ -6171,7 +6717,7 @@
                 </a:solidFill>
                 <a:latin typeface="Aptos"/>
               </a:rPr>
-              <a:t>для </a:t>
+              <a:t> </a:t>
             </a:r>
             <a:r>
               <a:rPr sz="1050" b="0" i="0" dirty="0" err="1">
@@ -6180,7 +6726,7 @@
                 </a:solidFill>
                 <a:latin typeface="Aptos"/>
               </a:rPr>
-              <a:t>международных собственников </a:t>
+              <a:t>снижает</a:t>
             </a:r>
             <a:r>
               <a:rPr sz="1050" b="0" i="0" dirty="0">
@@ -6189,7 +6735,7 @@
                 </a:solidFill>
                 <a:latin typeface="Aptos"/>
               </a:rPr>
-              <a:t>и </a:t>
+              <a:t> </a:t>
             </a:r>
             <a:r>
               <a:rPr sz="1050" b="0" i="0" dirty="0" err="1">
@@ -6198,7 +6744,160 @@
                 </a:solidFill>
                 <a:latin typeface="Aptos"/>
               </a:rPr>
-              <a:t>арендаторов благодаря проверенному многоязычному доступу к регистрации </a:t>
+              <a:t>барьер</a:t>
+            </a:r>
+            <a:r>
+              <a:rPr sz="1050" b="0" i="0" dirty="0">
+                <a:solidFill>
+                  <a:srgbClr val="64716D"/>
+                </a:solidFill>
+                <a:latin typeface="Aptos"/>
+              </a:rPr>
+              <a:t> для </a:t>
+            </a:r>
+            <a:r>
+              <a:rPr sz="1050" b="0" i="0" dirty="0" err="1">
+                <a:solidFill>
+                  <a:srgbClr val="64716D"/>
+                </a:solidFill>
+                <a:latin typeface="Aptos"/>
+              </a:rPr>
+              <a:t>международных</a:t>
+            </a:r>
+            <a:r>
+              <a:rPr sz="1050" b="0" i="0" dirty="0">
+                <a:solidFill>
+                  <a:srgbClr val="64716D"/>
+                </a:solidFill>
+                <a:latin typeface="Aptos"/>
+              </a:rPr>
+              <a:t> </a:t>
+            </a:r>
+            <a:r>
+              <a:rPr sz="1050" b="0" i="0" dirty="0" err="1">
+                <a:solidFill>
+                  <a:srgbClr val="64716D"/>
+                </a:solidFill>
+                <a:latin typeface="Aptos"/>
+              </a:rPr>
+              <a:t>собственников</a:t>
+            </a:r>
+            <a:r>
+              <a:rPr sz="1050" b="0" i="0" dirty="0">
+                <a:solidFill>
+                  <a:srgbClr val="64716D"/>
+                </a:solidFill>
+                <a:latin typeface="Aptos"/>
+              </a:rPr>
+              <a:t> и </a:t>
+            </a:r>
+            <a:r>
+              <a:rPr sz="1050" b="0" i="0" dirty="0" err="1">
+                <a:solidFill>
+                  <a:srgbClr val="64716D"/>
+                </a:solidFill>
+                <a:latin typeface="Aptos"/>
+              </a:rPr>
+              <a:t>арендаторов</a:t>
+            </a:r>
+            <a:r>
+              <a:rPr sz="1050" b="0" i="0" dirty="0">
+                <a:solidFill>
+                  <a:srgbClr val="64716D"/>
+                </a:solidFill>
+                <a:latin typeface="Aptos"/>
+              </a:rPr>
+              <a:t> </a:t>
+            </a:r>
+            <a:r>
+              <a:rPr sz="1050" b="0" i="0" dirty="0" err="1">
+                <a:solidFill>
+                  <a:srgbClr val="64716D"/>
+                </a:solidFill>
+                <a:latin typeface="Aptos"/>
+              </a:rPr>
+              <a:t>благодаря</a:t>
+            </a:r>
+            <a:r>
+              <a:rPr sz="1050" b="0" i="0" dirty="0">
+                <a:solidFill>
+                  <a:srgbClr val="64716D"/>
+                </a:solidFill>
+                <a:latin typeface="Aptos"/>
+              </a:rPr>
+              <a:t> </a:t>
+            </a:r>
+            <a:r>
+              <a:rPr sz="1050" b="0" i="0" dirty="0" err="1">
+                <a:solidFill>
+                  <a:srgbClr val="64716D"/>
+                </a:solidFill>
+                <a:latin typeface="Aptos"/>
+              </a:rPr>
+              <a:t>проверенному</a:t>
+            </a:r>
+            <a:r>
+              <a:rPr sz="1050" b="0" i="0" dirty="0">
+                <a:solidFill>
+                  <a:srgbClr val="64716D"/>
+                </a:solidFill>
+                <a:latin typeface="Aptos"/>
+              </a:rPr>
+              <a:t> </a:t>
+            </a:r>
+            <a:r>
+              <a:rPr sz="1050" b="0" i="0" dirty="0" err="1">
+                <a:solidFill>
+                  <a:srgbClr val="64716D"/>
+                </a:solidFill>
+                <a:latin typeface="Aptos"/>
+              </a:rPr>
+              <a:t>многоязычному</a:t>
+            </a:r>
+            <a:r>
+              <a:rPr sz="1050" b="0" i="0" dirty="0">
+                <a:solidFill>
+                  <a:srgbClr val="64716D"/>
+                </a:solidFill>
+                <a:latin typeface="Aptos"/>
+              </a:rPr>
+              <a:t> </a:t>
+            </a:r>
+            <a:r>
+              <a:rPr sz="1050" b="0" i="0" dirty="0" err="1">
+                <a:solidFill>
+                  <a:srgbClr val="64716D"/>
+                </a:solidFill>
+                <a:latin typeface="Aptos"/>
+              </a:rPr>
+              <a:t>доступу</a:t>
+            </a:r>
+            <a:r>
+              <a:rPr sz="1050" b="0" i="0" dirty="0">
+                <a:solidFill>
+                  <a:srgbClr val="64716D"/>
+                </a:solidFill>
+                <a:latin typeface="Aptos"/>
+              </a:rPr>
+              <a:t> к </a:t>
+            </a:r>
+            <a:r>
+              <a:rPr sz="1050" b="0" i="0" dirty="0" err="1">
+                <a:solidFill>
+                  <a:srgbClr val="64716D"/>
+                </a:solidFill>
+                <a:latin typeface="Aptos"/>
+              </a:rPr>
+              <a:t>регистрации</a:t>
+            </a:r>
+            <a:r>
+              <a:rPr sz="1050" b="0" i="0" dirty="0">
+                <a:solidFill>
+                  <a:srgbClr val="64716D"/>
+                </a:solidFill>
+                <a:latin typeface="Aptos"/>
+              </a:rPr>
+              <a:t> </a:t>
             </a:r>
             <a:r>
               <a:rPr lang="de-DE" sz="1050" b="0" i="0" dirty="0">
@@ -6207,7 +6906,7 @@
                 </a:solidFill>
                 <a:latin typeface="Aptos"/>
               </a:rPr>
-              <a:t>— </a:t>
+              <a:t>- </a:t>
             </a:r>
             <a:r>
               <a:rPr sz="1050" b="0" i="0" dirty="0" err="1">
@@ -6288,7 +6987,7 @@
         <p:spPr>
           <a:xfrm>
             <a:off x="6423660" y="3575304"/>
-            <a:ext cx="4869180" cy="736099"/>
+            <a:ext cx="4869180" cy="897682"/>
           </a:xfrm>
           <a:prstGeom prst="rect">
             <a:avLst/>
@@ -6333,7 +7032,7 @@
                 </a:solidFill>
                 <a:latin typeface="Aptos"/>
               </a:rPr>
-              <a:t>Уровень искусственного интеллекта снимает нагрузку с </a:t>
+              <a:t>Уровень</a:t>
             </a:r>
             <a:r>
               <a:rPr sz="1050" b="0" i="0" dirty="0">
@@ -6342,7 +7041,7 @@
                 </a:solidFill>
                 <a:latin typeface="Aptos"/>
               </a:rPr>
-              <a:t>руководства и </a:t>
+              <a:t> </a:t>
             </a:r>
             <a:r>
               <a:rPr sz="1050" b="0" i="0" dirty="0" err="1">
@@ -6351,7 +7050,7 @@
                 </a:solidFill>
                 <a:latin typeface="Aptos"/>
               </a:rPr>
-              <a:t>бухгалтерии в части рутинных запросов </a:t>
+              <a:t>искусственного</a:t>
             </a:r>
             <a:r>
               <a:rPr sz="1050" b="0" i="0" dirty="0">
@@ -6360,7 +7059,7 @@
                 </a:solidFill>
                 <a:latin typeface="Aptos"/>
               </a:rPr>
-              <a:t>и </a:t>
+              <a:t> </a:t>
             </a:r>
             <a:r>
               <a:rPr sz="1050" b="0" i="0" dirty="0" err="1">
@@ -6369,7 +7068,160 @@
                 </a:solidFill>
                 <a:latin typeface="Aptos"/>
               </a:rPr>
-              <a:t>определения приоритетов </a:t>
+              <a:t>интеллекта</a:t>
+            </a:r>
+            <a:r>
+              <a:rPr sz="1050" b="0" i="0" dirty="0">
+                <a:solidFill>
+                  <a:srgbClr val="64716D"/>
+                </a:solidFill>
+                <a:latin typeface="Aptos"/>
+              </a:rPr>
+              <a:t> </a:t>
+            </a:r>
+            <a:r>
+              <a:rPr sz="1050" b="0" i="0" dirty="0" err="1">
+                <a:solidFill>
+                  <a:srgbClr val="64716D"/>
+                </a:solidFill>
+                <a:latin typeface="Aptos"/>
+              </a:rPr>
+              <a:t>снимает</a:t>
+            </a:r>
+            <a:r>
+              <a:rPr sz="1050" b="0" i="0" dirty="0">
+                <a:solidFill>
+                  <a:srgbClr val="64716D"/>
+                </a:solidFill>
+                <a:latin typeface="Aptos"/>
+              </a:rPr>
+              <a:t> </a:t>
+            </a:r>
+            <a:r>
+              <a:rPr sz="1050" b="0" i="0" dirty="0" err="1">
+                <a:solidFill>
+                  <a:srgbClr val="64716D"/>
+                </a:solidFill>
+                <a:latin typeface="Aptos"/>
+              </a:rPr>
+              <a:t>нагрузку</a:t>
+            </a:r>
+            <a:r>
+              <a:rPr sz="1050" b="0" i="0" dirty="0">
+                <a:solidFill>
+                  <a:srgbClr val="64716D"/>
+                </a:solidFill>
+                <a:latin typeface="Aptos"/>
+              </a:rPr>
+              <a:t> с руководства и </a:t>
+            </a:r>
+            <a:r>
+              <a:rPr sz="1050" b="0" i="0" dirty="0" err="1">
+                <a:solidFill>
+                  <a:srgbClr val="64716D"/>
+                </a:solidFill>
+                <a:latin typeface="Aptos"/>
+              </a:rPr>
+              <a:t>бухгалтерии</a:t>
+            </a:r>
+            <a:r>
+              <a:rPr sz="1050" b="0" i="0" dirty="0">
+                <a:solidFill>
+                  <a:srgbClr val="64716D"/>
+                </a:solidFill>
+                <a:latin typeface="Aptos"/>
+              </a:rPr>
+              <a:t> в </a:t>
+            </a:r>
+            <a:r>
+              <a:rPr sz="1050" b="0" i="0" dirty="0" err="1">
+                <a:solidFill>
+                  <a:srgbClr val="64716D"/>
+                </a:solidFill>
+                <a:latin typeface="Aptos"/>
+              </a:rPr>
+              <a:t>части</a:t>
+            </a:r>
+            <a:r>
+              <a:rPr sz="1050" b="0" i="0" dirty="0">
+                <a:solidFill>
+                  <a:srgbClr val="64716D"/>
+                </a:solidFill>
+                <a:latin typeface="Aptos"/>
+              </a:rPr>
+              <a:t> </a:t>
+            </a:r>
+            <a:r>
+              <a:rPr sz="1050" b="0" i="0" dirty="0" err="1">
+                <a:solidFill>
+                  <a:srgbClr val="64716D"/>
+                </a:solidFill>
+                <a:latin typeface="Aptos"/>
+              </a:rPr>
+              <a:t>рутинных</a:t>
+            </a:r>
+            <a:r>
+              <a:rPr sz="1050" b="0" i="0" dirty="0">
+                <a:solidFill>
+                  <a:srgbClr val="64716D"/>
+                </a:solidFill>
+                <a:latin typeface="Aptos"/>
+              </a:rPr>
+              <a:t> </a:t>
+            </a:r>
+            <a:r>
+              <a:rPr sz="1050" b="0" i="0" dirty="0" err="1">
+                <a:solidFill>
+                  <a:srgbClr val="64716D"/>
+                </a:solidFill>
+                <a:latin typeface="Aptos"/>
+              </a:rPr>
+              <a:t>запросов</a:t>
+            </a:r>
+            <a:r>
+              <a:rPr sz="1050" b="0" i="0" dirty="0">
+                <a:solidFill>
+                  <a:srgbClr val="64716D"/>
+                </a:solidFill>
+                <a:latin typeface="Aptos"/>
+              </a:rPr>
+              <a:t> и </a:t>
+            </a:r>
+            <a:r>
+              <a:rPr sz="1050" b="0" i="0" dirty="0" err="1">
+                <a:solidFill>
+                  <a:srgbClr val="64716D"/>
+                </a:solidFill>
+                <a:latin typeface="Aptos"/>
+              </a:rPr>
+              <a:t>определения</a:t>
+            </a:r>
+            <a:r>
+              <a:rPr sz="1050" b="0" i="0" dirty="0">
+                <a:solidFill>
+                  <a:srgbClr val="64716D"/>
+                </a:solidFill>
+                <a:latin typeface="Aptos"/>
+              </a:rPr>
+              <a:t> </a:t>
+            </a:r>
+            <a:r>
+              <a:rPr sz="1050" b="0" i="0" dirty="0" err="1">
+                <a:solidFill>
+                  <a:srgbClr val="64716D"/>
+                </a:solidFill>
+                <a:latin typeface="Aptos"/>
+              </a:rPr>
+              <a:t>приоритетов</a:t>
+            </a:r>
+            <a:r>
+              <a:rPr sz="1050" b="0" i="0" dirty="0">
+                <a:solidFill>
+                  <a:srgbClr val="64716D"/>
+                </a:solidFill>
+                <a:latin typeface="Aptos"/>
+              </a:rPr>
+              <a:t> </a:t>
             </a:r>
             <a:r>
               <a:rPr lang="de-DE" sz="1050" b="0" i="0" dirty="0">
@@ -6378,7 +7230,7 @@
                 </a:solidFill>
                 <a:latin typeface="Aptos"/>
               </a:rPr>
-              <a:t>— </a:t>
+              <a:t>- </a:t>
             </a:r>
             <a:r>
               <a:rPr sz="1050" b="0" i="0" dirty="0" err="1">
@@ -6578,7 +7430,7 @@
                 </a:solidFill>
                 <a:latin typeface="Aptos"/>
               </a:rPr>
-              <a:t> Платформа построена</a:t>
+              <a:t> Платформа</a:t>
             </a:r>
             <a:r>
               <a:rPr sz="1150" b="0" i="0" dirty="0">
@@ -6587,6 +7439,24 @@
                 </a:solidFill>
                 <a:latin typeface="Aptos"/>
               </a:rPr>
+              <a:t> </a:t>
+            </a:r>
+            <a:r>
+              <a:rPr sz="1150" b="0" i="0" dirty="0" err="1">
+                <a:solidFill>
+                  <a:srgbClr val="33413D"/>
+                </a:solidFill>
+                <a:latin typeface="Aptos"/>
+              </a:rPr>
+              <a:t>построена</a:t>
+            </a:r>
+            <a:r>
+              <a:rPr sz="1150" b="0" i="0" dirty="0">
+                <a:solidFill>
+                  <a:srgbClr val="33413D"/>
+                </a:solidFill>
+                <a:latin typeface="Aptos"/>
+              </a:rPr>
               <a:t> таким образом, </a:t>
             </a:r>
             <a:r>
@@ -6596,7 +7466,7 @@
                 </a:solidFill>
                 <a:latin typeface="Aptos"/>
               </a:rPr>
-              <a:t>что её можно масштабировать </a:t>
+              <a:t>что</a:t>
             </a:r>
             <a:r>
               <a:rPr sz="1150" b="0" i="0" dirty="0">
@@ -6605,7 +7475,7 @@
                 </a:solidFill>
                 <a:latin typeface="Aptos"/>
               </a:rPr>
-              <a:t>на </a:t>
+              <a:t> </a:t>
             </a:r>
             <a:r>
               <a:rPr sz="1150" b="0" i="0" dirty="0" err="1">
@@ -6614,7 +7484,7 @@
                 </a:solidFill>
                 <a:latin typeface="Aptos"/>
               </a:rPr>
-              <a:t>другие объекты</a:t>
+              <a:t>её</a:t>
             </a:r>
             <a:r>
               <a:rPr sz="1150" b="0" i="0" dirty="0">
@@ -6623,6 +7493,78 @@
                 </a:solidFill>
                 <a:latin typeface="Aptos"/>
               </a:rPr>
+              <a:t> </a:t>
+            </a:r>
+            <a:r>
+              <a:rPr sz="1150" b="0" i="0" dirty="0" err="1">
+                <a:solidFill>
+                  <a:srgbClr val="33413D"/>
+                </a:solidFill>
+                <a:latin typeface="Aptos"/>
+              </a:rPr>
+              <a:t>можно</a:t>
+            </a:r>
+            <a:r>
+              <a:rPr sz="1150" b="0" i="0" dirty="0">
+                <a:solidFill>
+                  <a:srgbClr val="33413D"/>
+                </a:solidFill>
+                <a:latin typeface="Aptos"/>
+              </a:rPr>
+              <a:t> </a:t>
+            </a:r>
+            <a:r>
+              <a:rPr sz="1150" b="0" i="0" dirty="0" err="1">
+                <a:solidFill>
+                  <a:srgbClr val="33413D"/>
+                </a:solidFill>
+                <a:latin typeface="Aptos"/>
+              </a:rPr>
+              <a:t>масштабировать</a:t>
+            </a:r>
+            <a:r>
+              <a:rPr sz="1150" b="0" i="0" dirty="0">
+                <a:solidFill>
+                  <a:srgbClr val="33413D"/>
+                </a:solidFill>
+                <a:latin typeface="Aptos"/>
+              </a:rPr>
+              <a:t> на </a:t>
+            </a:r>
+            <a:r>
+              <a:rPr sz="1150" b="0" i="0" dirty="0" err="1">
+                <a:solidFill>
+                  <a:srgbClr val="33413D"/>
+                </a:solidFill>
+                <a:latin typeface="Aptos"/>
+              </a:rPr>
+              <a:t>другие</a:t>
+            </a:r>
+            <a:r>
+              <a:rPr sz="1150" b="0" i="0" dirty="0">
+                <a:solidFill>
+                  <a:srgbClr val="33413D"/>
+                </a:solidFill>
+                <a:latin typeface="Aptos"/>
+              </a:rPr>
+              <a:t> </a:t>
+            </a:r>
+            <a:r>
+              <a:rPr sz="1150" b="0" i="0" dirty="0" err="1">
+                <a:solidFill>
+                  <a:srgbClr val="33413D"/>
+                </a:solidFill>
+                <a:latin typeface="Aptos"/>
+              </a:rPr>
+              <a:t>объекты</a:t>
+            </a:r>
+            <a:r>
+              <a:rPr sz="1150" b="0" i="0" dirty="0">
+                <a:solidFill>
+                  <a:srgbClr val="33413D"/>
+                </a:solidFill>
+                <a:latin typeface="Aptos"/>
+              </a:rPr>
               <a:t> и </a:t>
             </a:r>
             <a:r>
@@ -6632,7 +7574,16 @@
                 </a:solidFill>
                 <a:latin typeface="Aptos"/>
               </a:rPr>
-              <a:t>локации </a:t>
+              <a:t>локации</a:t>
+            </a:r>
+            <a:r>
+              <a:rPr sz="1150" b="0" i="0" dirty="0">
+                <a:solidFill>
+                  <a:srgbClr val="33413D"/>
+                </a:solidFill>
+                <a:latin typeface="Aptos"/>
+              </a:rPr>
+              <a:t> </a:t>
             </a:r>
             <a:r>
               <a:rPr lang="de-DE" sz="1150" b="0" i="0" dirty="0">
@@ -6641,7 +7592,7 @@
                 </a:solidFill>
                 <a:latin typeface="Aptos"/>
               </a:rPr>
-              <a:t>— </a:t>
+              <a:t>- </a:t>
             </a:r>
             <a:r>
               <a:rPr sz="1150" b="0" i="0" dirty="0" err="1">
@@ -6756,7 +7707,7 @@
                 </a:solidFill>
                 <a:latin typeface="Aptos"/>
               </a:rPr>
-              <a:t>— </a:t>
+              <a:t>- </a:t>
             </a:r>
             <a:r>
               <a:rPr sz="750" b="0" i="0" dirty="0">
@@ -7072,7 +8023,7 @@
         <p:spPr>
           <a:xfrm>
             <a:off x="822960" y="2697480"/>
-            <a:ext cx="10515600" cy="523220"/>
+            <a:ext cx="10515600" cy="1046440"/>
           </a:xfrm>
           <a:prstGeom prst="rect">
             <a:avLst/>
@@ -7092,7 +8043,34 @@
                 </a:solidFill>
                 <a:latin typeface="Aptos"/>
               </a:rPr>
-              <a:t>Функциональные возможности </a:t>
+              <a:t>Функциональные</a:t>
+            </a:r>
+            <a:r>
+              <a:rPr sz="3400" b="1" i="0" dirty="0">
+                <a:solidFill>
+                  <a:srgbClr val="FFFFFF"/>
+                </a:solidFill>
+                <a:latin typeface="Aptos"/>
+              </a:rPr>
+              <a:t> </a:t>
+            </a:r>
+            <a:r>
+              <a:rPr sz="3400" b="1" i="0" dirty="0" err="1">
+                <a:solidFill>
+                  <a:srgbClr val="FFFFFF"/>
+                </a:solidFill>
+                <a:latin typeface="Aptos"/>
+              </a:rPr>
+              <a:t>возможности</a:t>
+            </a:r>
+            <a:r>
+              <a:rPr sz="3400" b="1" i="0" dirty="0">
+                <a:solidFill>
+                  <a:srgbClr val="FFFFFF"/>
+                </a:solidFill>
+                <a:latin typeface="Aptos"/>
+              </a:rPr>
+              <a:t> </a:t>
             </a:r>
             <a:r>
               <a:rPr lang="de-DE" sz="3400" b="1" i="0" dirty="0">
@@ -7101,7 +8079,7 @@
                 </a:solidFill>
                 <a:latin typeface="Aptos"/>
               </a:rPr>
-              <a:t>— </a:t>
+              <a:t>- </a:t>
             </a:r>
             <a:r>
               <a:rPr sz="3400" b="1" i="0" dirty="0">
@@ -7205,7 +8183,7 @@
                 </a:solidFill>
                 <a:latin typeface="Aptos"/>
               </a:rPr>
-              <a:t>— </a:t>
+              <a:t>- </a:t>
             </a:r>
             <a:r>
               <a:rPr sz="750" b="0" i="0" dirty="0">
@@ -7622,7 +8600,7 @@
         </p:nvGraphicFramePr>
         <p:xfrm>
           <a:off x="640080" y="1600200"/>
-          <a:ext cx="10881358" cy="1883664"/>
+          <a:ext cx="10881358" cy="1911096"/>
         </p:xfrm>
         <a:graphic>
           <a:graphicData uri="http://schemas.openxmlformats.org/drawingml/2006/table">
@@ -7850,7 +8828,7 @@
                           </a:solidFill>
                           <a:latin typeface="Aptos"/>
                         </a:rPr>
-                        <a:t>обеспечиваются </a:t>
+                        <a:t>обеспечиваются</a:t>
                       </a:r>
                       <a:r>
                         <a:rPr sz="1050" b="0" i="0" dirty="0">
@@ -7859,7 +8837,7 @@
                           </a:solidFill>
                           <a:latin typeface="Aptos"/>
                         </a:rPr>
-                        <a:t>как в </a:t>
+                        <a:t> как в </a:t>
                       </a:r>
                       <a:r>
                         <a:rPr sz="1050" b="0" i="0" dirty="0" err="1">
@@ -7868,7 +8846,7 @@
                           </a:solidFill>
                           <a:latin typeface="Aptos"/>
                         </a:rPr>
-                        <a:t>приложении, </a:t>
+                        <a:t>приложении</a:t>
                       </a:r>
                       <a:r>
                         <a:rPr sz="1050" b="0" i="0" dirty="0">
@@ -7877,7 +8855,7 @@
                           </a:solidFill>
                           <a:latin typeface="Aptos"/>
                         </a:rPr>
-                        <a:t>так и в </a:t>
+                        <a:t>, так и в </a:t>
                       </a:r>
                       <a:r>
                         <a:rPr sz="1050" b="0" i="0" dirty="0" err="1">
@@ -7886,7 +8864,34 @@
                           </a:solidFill>
                           <a:latin typeface="Aptos"/>
                         </a:rPr>
-                        <a:t>базе данных </a:t>
+                        <a:t>базе</a:t>
+                      </a:r>
+                      <a:r>
+                        <a:rPr sz="1050" b="0" i="0" dirty="0">
+                          <a:solidFill>
+                            <a:srgbClr val="33413D"/>
+                          </a:solidFill>
+                          <a:latin typeface="Aptos"/>
+                        </a:rPr>
+                        <a:t> </a:t>
+                      </a:r>
+                      <a:r>
+                        <a:rPr sz="1050" b="0" i="0" dirty="0" err="1">
+                          <a:solidFill>
+                            <a:srgbClr val="33413D"/>
+                          </a:solidFill>
+                          <a:latin typeface="Aptos"/>
+                        </a:rPr>
+                        <a:t>данных</a:t>
+                      </a:r>
+                      <a:r>
+                        <a:rPr sz="1050" b="0" i="0" dirty="0">
+                          <a:solidFill>
+                            <a:srgbClr val="33413D"/>
+                          </a:solidFill>
+                          <a:latin typeface="Aptos"/>
+                        </a:rPr>
+                        <a:t> </a:t>
                       </a:r>
                       <a:r>
                         <a:rPr lang="de-DE" sz="1050" b="0" i="0" dirty="0">
@@ -7895,7 +8900,7 @@
                           </a:solidFill>
                           <a:latin typeface="Aptos"/>
                         </a:rPr>
-                        <a:t>— а </a:t>
+                        <a:t>- а </a:t>
                       </a:r>
                       <a:r>
                         <a:rPr sz="1050" b="0" i="0" dirty="0">
@@ -8151,7 +9156,7 @@
                 </a:solidFill>
                 <a:latin typeface="Aptos"/>
               </a:rPr>
-              <a:t>— </a:t>
+              <a:t>- </a:t>
             </a:r>
             <a:r>
               <a:rPr sz="750" b="0" i="0" dirty="0">
@@ -8568,7 +9573,7 @@
         </p:nvGraphicFramePr>
         <p:xfrm>
           <a:off x="640080" y="1600200"/>
-          <a:ext cx="10881358" cy="1856232"/>
+          <a:ext cx="10881358" cy="2071116"/>
         </p:xfrm>
         <a:graphic>
           <a:graphicData uri="http://schemas.openxmlformats.org/drawingml/2006/table">
@@ -8713,7 +9718,7 @@
                           </a:solidFill>
                           <a:latin typeface="Aptos"/>
                         </a:rPr>
-                        <a:t>Централизованный обзор всех объектов с указанием </a:t>
+                        <a:t>Централизованный</a:t>
                       </a:r>
                       <a:r>
                         <a:rPr sz="1050" b="0" i="0" dirty="0">
@@ -8722,7 +9727,7 @@
                           </a:solidFill>
                           <a:latin typeface="Aptos"/>
                         </a:rPr>
-                        <a:t>блока, номера, </a:t>
+                        <a:t> </a:t>
                       </a:r>
                       <a:r>
                         <a:rPr sz="1050" b="0" i="0" dirty="0" err="1">
@@ -8731,6 +9736,78 @@
                           </a:solidFill>
                           <a:latin typeface="Aptos"/>
                         </a:rPr>
+                        <a:t>обзор</a:t>
+                      </a:r>
+                      <a:r>
+                        <a:rPr sz="1050" b="0" i="0" dirty="0">
+                          <a:solidFill>
+                            <a:srgbClr val="33413D"/>
+                          </a:solidFill>
+                          <a:latin typeface="Aptos"/>
+                        </a:rPr>
+                        <a:t> </a:t>
+                      </a:r>
+                      <a:r>
+                        <a:rPr sz="1050" b="0" i="0" dirty="0" err="1">
+                          <a:solidFill>
+                            <a:srgbClr val="33413D"/>
+                          </a:solidFill>
+                          <a:latin typeface="Aptos"/>
+                        </a:rPr>
+                        <a:t>всех</a:t>
+                      </a:r>
+                      <a:r>
+                        <a:rPr sz="1050" b="0" i="0" dirty="0">
+                          <a:solidFill>
+                            <a:srgbClr val="33413D"/>
+                          </a:solidFill>
+                          <a:latin typeface="Aptos"/>
+                        </a:rPr>
+                        <a:t> </a:t>
+                      </a:r>
+                      <a:r>
+                        <a:rPr sz="1050" b="0" i="0" dirty="0" err="1">
+                          <a:solidFill>
+                            <a:srgbClr val="33413D"/>
+                          </a:solidFill>
+                          <a:latin typeface="Aptos"/>
+                        </a:rPr>
+                        <a:t>объектов</a:t>
+                      </a:r>
+                      <a:r>
+                        <a:rPr sz="1050" b="0" i="0" dirty="0">
+                          <a:solidFill>
+                            <a:srgbClr val="33413D"/>
+                          </a:solidFill>
+                          <a:latin typeface="Aptos"/>
+                        </a:rPr>
+                        <a:t> с </a:t>
+                      </a:r>
+                      <a:r>
+                        <a:rPr sz="1050" b="0" i="0" dirty="0" err="1">
+                          <a:solidFill>
+                            <a:srgbClr val="33413D"/>
+                          </a:solidFill>
+                          <a:latin typeface="Aptos"/>
+                        </a:rPr>
+                        <a:t>указанием</a:t>
+                      </a:r>
+                      <a:r>
+                        <a:rPr sz="1050" b="0" i="0" dirty="0">
+                          <a:solidFill>
+                            <a:srgbClr val="33413D"/>
+                          </a:solidFill>
+                          <a:latin typeface="Aptos"/>
+                        </a:rPr>
+                        <a:t> блока, номера, </a:t>
+                      </a:r>
+                      <a:r>
+                        <a:rPr sz="1050" b="0" i="0" dirty="0" err="1">
+                          <a:solidFill>
+                            <a:srgbClr val="33413D"/>
+                          </a:solidFill>
+                          <a:latin typeface="Aptos"/>
+                        </a:rPr>
                         <a:t>владельца</a:t>
                       </a:r>
                       <a:r>
@@ -8767,7 +9844,7 @@
                           </a:solidFill>
                           <a:latin typeface="Aptos"/>
                         </a:rPr>
-                        <a:t>статуса задолженности</a:t>
+                        <a:t>статуса</a:t>
                       </a:r>
                       <a:r>
                         <a:rPr sz="1050" b="0" i="0" dirty="0">
@@ -8776,6 +9853,24 @@
                           </a:solidFill>
                           <a:latin typeface="Aptos"/>
                         </a:rPr>
+                        <a:t> </a:t>
+                      </a:r>
+                      <a:r>
+                        <a:rPr sz="1050" b="0" i="0" dirty="0" err="1">
+                          <a:solidFill>
+                            <a:srgbClr val="33413D"/>
+                          </a:solidFill>
+                          <a:latin typeface="Aptos"/>
+                        </a:rPr>
+                        <a:t>задолженности</a:t>
+                      </a:r>
+                      <a:r>
+                        <a:rPr sz="1050" b="0" i="0" dirty="0">
+                          <a:solidFill>
+                            <a:srgbClr val="33413D"/>
+                          </a:solidFill>
+                          <a:latin typeface="Aptos"/>
+                        </a:rPr>
                         <a:t>, </a:t>
                       </a:r>
                       <a:r>
@@ -8821,7 +9916,16 @@
                           </a:solidFill>
                           <a:latin typeface="Aptos"/>
                         </a:rPr>
-                        <a:t>доступа </a:t>
+                        <a:t>доступа</a:t>
+                      </a:r>
+                      <a:r>
+                        <a:rPr sz="1050" b="0" i="0" dirty="0">
+                          <a:solidFill>
+                            <a:srgbClr val="33413D"/>
+                          </a:solidFill>
+                          <a:latin typeface="Aptos"/>
+                        </a:rPr>
+                        <a:t> </a:t>
                       </a:r>
                       <a:r>
                         <a:rPr lang="de-DE" sz="1050" b="0" i="0" dirty="0">
@@ -8830,7 +9934,7 @@
                           </a:solidFill>
                           <a:latin typeface="Aptos"/>
                         </a:rPr>
-                        <a:t>— </a:t>
+                        <a:t>- </a:t>
                       </a:r>
                       <a:r>
                         <a:rPr sz="1050" b="0" i="0" dirty="0" err="1">
@@ -9014,7 +10118,7 @@
                           </a:solidFill>
                           <a:latin typeface="Aptos"/>
                         </a:rPr>
-                        <a:t>Статус продажи</a:t>
+                        <a:t>Статус</a:t>
                       </a:r>
                       <a:r>
                         <a:rPr sz="1050" b="0" i="0" dirty="0">
@@ -9023,6 +10127,24 @@
                           </a:solidFill>
                           <a:latin typeface="Aptos"/>
                         </a:rPr>
+                        <a:t> </a:t>
+                      </a:r>
+                      <a:r>
+                        <a:rPr sz="1050" b="0" i="0" dirty="0" err="1">
+                          <a:solidFill>
+                            <a:srgbClr val="33413D"/>
+                          </a:solidFill>
+                          <a:latin typeface="Aptos"/>
+                        </a:rPr>
+                        <a:t>продажи</a:t>
+                      </a:r>
+                      <a:r>
+                        <a:rPr sz="1050" b="0" i="0" dirty="0">
+                          <a:solidFill>
+                            <a:srgbClr val="33413D"/>
+                          </a:solidFill>
+                          <a:latin typeface="Aptos"/>
+                        </a:rPr>
                         <a:t>, </a:t>
                       </a:r>
                       <a:r>
@@ -9032,7 +10154,7 @@
                           </a:solidFill>
                           <a:latin typeface="Aptos"/>
                         </a:rPr>
-                        <a:t>цена по прейскуранту </a:t>
+                        <a:t>цена</a:t>
                       </a:r>
                       <a:r>
                         <a:rPr sz="1050" b="0" i="0" dirty="0">
@@ -9041,7 +10163,7 @@
                           </a:solidFill>
                           <a:latin typeface="Aptos"/>
                         </a:rPr>
-                        <a:t>и </a:t>
+                        <a:t> </a:t>
                       </a:r>
                       <a:r>
                         <a:rPr sz="1050" b="0" i="0" dirty="0" err="1">
@@ -9050,7 +10172,7 @@
                           </a:solidFill>
                           <a:latin typeface="Aptos"/>
                         </a:rPr>
-                        <a:t>источник цены </a:t>
+                        <a:t>по</a:t>
                       </a:r>
                       <a:r>
                         <a:rPr sz="1050" b="0" i="0" dirty="0">
@@ -9059,7 +10181,79 @@
                           </a:solidFill>
                           <a:latin typeface="Aptos"/>
                         </a:rPr>
-                        <a:t>для каждой единицы </a:t>
+                        <a:t> </a:t>
+                      </a:r>
+                      <a:r>
+                        <a:rPr sz="1050" b="0" i="0" dirty="0" err="1">
+                          <a:solidFill>
+                            <a:srgbClr val="33413D"/>
+                          </a:solidFill>
+                          <a:latin typeface="Aptos"/>
+                        </a:rPr>
+                        <a:t>прейскуранту</a:t>
+                      </a:r>
+                      <a:r>
+                        <a:rPr sz="1050" b="0" i="0" dirty="0">
+                          <a:solidFill>
+                            <a:srgbClr val="33413D"/>
+                          </a:solidFill>
+                          <a:latin typeface="Aptos"/>
+                        </a:rPr>
+                        <a:t> и </a:t>
+                      </a:r>
+                      <a:r>
+                        <a:rPr sz="1050" b="0" i="0" dirty="0" err="1">
+                          <a:solidFill>
+                            <a:srgbClr val="33413D"/>
+                          </a:solidFill>
+                          <a:latin typeface="Aptos"/>
+                        </a:rPr>
+                        <a:t>источник</a:t>
+                      </a:r>
+                      <a:r>
+                        <a:rPr sz="1050" b="0" i="0" dirty="0">
+                          <a:solidFill>
+                            <a:srgbClr val="33413D"/>
+                          </a:solidFill>
+                          <a:latin typeface="Aptos"/>
+                        </a:rPr>
+                        <a:t> </a:t>
+                      </a:r>
+                      <a:r>
+                        <a:rPr sz="1050" b="0" i="0" dirty="0" err="1">
+                          <a:solidFill>
+                            <a:srgbClr val="33413D"/>
+                          </a:solidFill>
+                          <a:latin typeface="Aptos"/>
+                        </a:rPr>
+                        <a:t>цены</a:t>
+                      </a:r>
+                      <a:r>
+                        <a:rPr sz="1050" b="0" i="0" dirty="0">
+                          <a:solidFill>
+                            <a:srgbClr val="33413D"/>
+                          </a:solidFill>
+                          <a:latin typeface="Aptos"/>
+                        </a:rPr>
+                        <a:t> для каждой </a:t>
+                      </a:r>
+                      <a:r>
+                        <a:rPr sz="1050" b="0" i="0" dirty="0" err="1">
+                          <a:solidFill>
+                            <a:srgbClr val="33413D"/>
+                          </a:solidFill>
+                          <a:latin typeface="Aptos"/>
+                        </a:rPr>
+                        <a:t>единицы</a:t>
+                      </a:r>
+                      <a:r>
+                        <a:rPr sz="1050" b="0" i="0" dirty="0">
+                          <a:solidFill>
+                            <a:srgbClr val="33413D"/>
+                          </a:solidFill>
+                          <a:latin typeface="Aptos"/>
+                        </a:rPr>
+                        <a:t> </a:t>
                       </a:r>
                       <a:r>
                         <a:rPr lang="de-DE" sz="1050" b="0" i="0" dirty="0">
@@ -9068,7 +10262,7 @@
                           </a:solidFill>
                           <a:latin typeface="Aptos"/>
                         </a:rPr>
-                        <a:t>— </a:t>
+                        <a:t>- </a:t>
                       </a:r>
                       <a:r>
                         <a:rPr sz="1050" b="0" i="0" dirty="0">
@@ -9268,7 +10462,7 @@
                 </a:solidFill>
                 <a:latin typeface="Aptos"/>
               </a:rPr>
-              <a:t>— </a:t>
+              <a:t>- </a:t>
             </a:r>
             <a:r>
               <a:rPr sz="750" b="0" i="0" dirty="0">
@@ -9904,7 +11098,7 @@
                           </a:solidFill>
                           <a:latin typeface="Aptos"/>
                         </a:rPr>
-                        <a:t>Один раз занесенные финансовые записи больше</a:t>
+                        <a:t>Один</a:t>
                       </a:r>
                       <a:r>
                         <a:rPr sz="1050" b="0" i="0" dirty="0">
@@ -9913,6 +11107,96 @@
                           </a:solidFill>
                           <a:latin typeface="Aptos"/>
                         </a:rPr>
+                        <a:t> </a:t>
+                      </a:r>
+                      <a:r>
+                        <a:rPr sz="1050" b="0" i="0" dirty="0" err="1">
+                          <a:solidFill>
+                            <a:srgbClr val="33413D"/>
+                          </a:solidFill>
+                          <a:latin typeface="Aptos"/>
+                        </a:rPr>
+                        <a:t>раз</a:t>
+                      </a:r>
+                      <a:r>
+                        <a:rPr sz="1050" b="0" i="0" dirty="0">
+                          <a:solidFill>
+                            <a:srgbClr val="33413D"/>
+                          </a:solidFill>
+                          <a:latin typeface="Aptos"/>
+                        </a:rPr>
+                        <a:t> </a:t>
+                      </a:r>
+                      <a:r>
+                        <a:rPr sz="1050" b="0" i="0" dirty="0" err="1">
+                          <a:solidFill>
+                            <a:srgbClr val="33413D"/>
+                          </a:solidFill>
+                          <a:latin typeface="Aptos"/>
+                        </a:rPr>
+                        <a:t>занесенные</a:t>
+                      </a:r>
+                      <a:r>
+                        <a:rPr sz="1050" b="0" i="0" dirty="0">
+                          <a:solidFill>
+                            <a:srgbClr val="33413D"/>
+                          </a:solidFill>
+                          <a:latin typeface="Aptos"/>
+                        </a:rPr>
+                        <a:t> </a:t>
+                      </a:r>
+                      <a:r>
+                        <a:rPr sz="1050" b="0" i="0" dirty="0" err="1">
+                          <a:solidFill>
+                            <a:srgbClr val="33413D"/>
+                          </a:solidFill>
+                          <a:latin typeface="Aptos"/>
+                        </a:rPr>
+                        <a:t>финансовые</a:t>
+                      </a:r>
+                      <a:r>
+                        <a:rPr sz="1050" b="0" i="0" dirty="0">
+                          <a:solidFill>
+                            <a:srgbClr val="33413D"/>
+                          </a:solidFill>
+                          <a:latin typeface="Aptos"/>
+                        </a:rPr>
+                        <a:t> </a:t>
+                      </a:r>
+                      <a:r>
+                        <a:rPr sz="1050" b="0" i="0" dirty="0" err="1">
+                          <a:solidFill>
+                            <a:srgbClr val="33413D"/>
+                          </a:solidFill>
+                          <a:latin typeface="Aptos"/>
+                        </a:rPr>
+                        <a:t>записи</a:t>
+                      </a:r>
+                      <a:r>
+                        <a:rPr sz="1050" b="0" i="0" dirty="0">
+                          <a:solidFill>
+                            <a:srgbClr val="33413D"/>
+                          </a:solidFill>
+                          <a:latin typeface="Aptos"/>
+                        </a:rPr>
+                        <a:t> </a:t>
+                      </a:r>
+                      <a:r>
+                        <a:rPr sz="1050" b="0" i="0" dirty="0" err="1">
+                          <a:solidFill>
+                            <a:srgbClr val="33413D"/>
+                          </a:solidFill>
+                          <a:latin typeface="Aptos"/>
+                        </a:rPr>
+                        <a:t>больше</a:t>
+                      </a:r>
+                      <a:r>
+                        <a:rPr sz="1050" b="0" i="0" dirty="0">
+                          <a:solidFill>
+                            <a:srgbClr val="33413D"/>
+                          </a:solidFill>
+                          <a:latin typeface="Aptos"/>
+                        </a:rPr>
                         <a:t> нельзя </a:t>
                       </a:r>
                       <a:r>
@@ -9922,7 +11206,16 @@
                           </a:solidFill>
                           <a:latin typeface="Aptos"/>
                         </a:rPr>
-                        <a:t>изменить </a:t>
+                        <a:t>изменить</a:t>
+                      </a:r>
+                      <a:r>
+                        <a:rPr sz="1050" b="0" i="0" dirty="0">
+                          <a:solidFill>
+                            <a:srgbClr val="33413D"/>
+                          </a:solidFill>
+                          <a:latin typeface="Aptos"/>
+                        </a:rPr>
+                        <a:t> </a:t>
                       </a:r>
                       <a:r>
                         <a:rPr lang="de-DE" sz="1050" b="0" i="0" dirty="0">
@@ -9931,7 +11224,7 @@
                           </a:solidFill>
                           <a:latin typeface="Aptos"/>
                         </a:rPr>
-                        <a:t>— </a:t>
+                        <a:t>- </a:t>
                       </a:r>
                       <a:r>
                         <a:rPr sz="1050" b="0" i="0" dirty="0" err="1">
@@ -10115,7 +11408,7 @@
                           </a:solidFill>
                           <a:latin typeface="Aptos"/>
                         </a:rPr>
-                        <a:t>Выявление </a:t>
+                        <a:t>Выявление</a:t>
                       </a:r>
                       <a:r>
                         <a:rPr sz="1050" b="0" i="0" dirty="0">
@@ -10124,7 +11417,7 @@
                           </a:solidFill>
                           <a:latin typeface="Aptos"/>
                         </a:rPr>
-                        <a:t>и </a:t>
+                        <a:t> и </a:t>
                       </a:r>
                       <a:r>
                         <a:rPr sz="1050" b="0" i="0" dirty="0" err="1">
@@ -10133,7 +11426,106 @@
                           </a:solidFill>
                           <a:latin typeface="Aptos"/>
                         </a:rPr>
-                        <a:t>рекомендация ограничений при наличии просроченной задолженности </a:t>
+                        <a:t>рекомендация</a:t>
+                      </a:r>
+                      <a:r>
+                        <a:rPr sz="1050" b="0" i="0" dirty="0">
+                          <a:solidFill>
+                            <a:srgbClr val="33413D"/>
+                          </a:solidFill>
+                          <a:latin typeface="Aptos"/>
+                        </a:rPr>
+                        <a:t> </a:t>
+                      </a:r>
+                      <a:r>
+                        <a:rPr sz="1050" b="0" i="0" dirty="0" err="1">
+                          <a:solidFill>
+                            <a:srgbClr val="33413D"/>
+                          </a:solidFill>
+                          <a:latin typeface="Aptos"/>
+                        </a:rPr>
+                        <a:t>ограничений</a:t>
+                      </a:r>
+                      <a:r>
+                        <a:rPr sz="1050" b="0" i="0" dirty="0">
+                          <a:solidFill>
+                            <a:srgbClr val="33413D"/>
+                          </a:solidFill>
+                          <a:latin typeface="Aptos"/>
+                        </a:rPr>
+                        <a:t> </a:t>
+                      </a:r>
+                      <a:r>
+                        <a:rPr sz="1050" b="0" i="0" dirty="0" err="1">
+                          <a:solidFill>
+                            <a:srgbClr val="33413D"/>
+                          </a:solidFill>
+                          <a:latin typeface="Aptos"/>
+                        </a:rPr>
+                        <a:t>при</a:t>
+                      </a:r>
+                      <a:r>
+                        <a:rPr sz="1050" b="0" i="0" dirty="0">
+                          <a:solidFill>
+                            <a:srgbClr val="33413D"/>
+                          </a:solidFill>
+                          <a:latin typeface="Aptos"/>
+                        </a:rPr>
+                        <a:t> </a:t>
+                      </a:r>
+                      <a:r>
+                        <a:rPr sz="1050" b="0" i="0" dirty="0" err="1">
+                          <a:solidFill>
+                            <a:srgbClr val="33413D"/>
+                          </a:solidFill>
+                          <a:latin typeface="Aptos"/>
+                        </a:rPr>
+                        <a:t>наличии</a:t>
+                      </a:r>
+                      <a:r>
+                        <a:rPr sz="1050" b="0" i="0" dirty="0">
+                          <a:solidFill>
+                            <a:srgbClr val="33413D"/>
+                          </a:solidFill>
+                          <a:latin typeface="Aptos"/>
+                        </a:rPr>
+                        <a:t> </a:t>
+                      </a:r>
+                      <a:r>
+                        <a:rPr sz="1050" b="0" i="0" dirty="0" err="1">
+                          <a:solidFill>
+                            <a:srgbClr val="33413D"/>
+                          </a:solidFill>
+                          <a:latin typeface="Aptos"/>
+                        </a:rPr>
+                        <a:t>просроченной</a:t>
+                      </a:r>
+                      <a:r>
+                        <a:rPr sz="1050" b="0" i="0" dirty="0">
+                          <a:solidFill>
+                            <a:srgbClr val="33413D"/>
+                          </a:solidFill>
+                          <a:latin typeface="Aptos"/>
+                        </a:rPr>
+                        <a:t> </a:t>
+                      </a:r>
+                      <a:r>
+                        <a:rPr sz="1050" b="0" i="0" dirty="0" err="1">
+                          <a:solidFill>
+                            <a:srgbClr val="33413D"/>
+                          </a:solidFill>
+                          <a:latin typeface="Aptos"/>
+                        </a:rPr>
+                        <a:t>задолженности</a:t>
+                      </a:r>
+                      <a:r>
+                        <a:rPr sz="1050" b="0" i="0" dirty="0">
+                          <a:solidFill>
+                            <a:srgbClr val="33413D"/>
+                          </a:solidFill>
+                          <a:latin typeface="Aptos"/>
+                        </a:rPr>
+                        <a:t> </a:t>
                       </a:r>
                       <a:r>
                         <a:rPr lang="de-DE" sz="1050" b="0" i="0" dirty="0">
@@ -10142,7 +11534,7 @@
                           </a:solidFill>
                           <a:latin typeface="Aptos"/>
                         </a:rPr>
-                        <a:t>— </a:t>
+                        <a:t>- </a:t>
                       </a:r>
                       <a:r>
                         <a:rPr sz="1050" b="0" i="0" dirty="0" err="1">
@@ -10315,7 +11707,7 @@
                 </a:solidFill>
                 <a:latin typeface="Aptos"/>
               </a:rPr>
-              <a:t>— </a:t>
+              <a:t>- </a:t>
             </a:r>
             <a:r>
               <a:rPr sz="750" b="0" i="0" dirty="0">
@@ -10732,7 +12124,7 @@
         </p:nvGraphicFramePr>
         <p:xfrm>
           <a:off x="640080" y="1600200"/>
-          <a:ext cx="10881358" cy="1856232"/>
+          <a:ext cx="10881358" cy="1911096"/>
         </p:xfrm>
         <a:graphic>
           <a:graphicData uri="http://schemas.openxmlformats.org/drawingml/2006/table">
@@ -11174,7 +12566,7 @@
                 </a:solidFill>
                 <a:latin typeface="Aptos"/>
               </a:rPr>
-              <a:t>— </a:t>
+              <a:t>- </a:t>
             </a:r>
             <a:r>
               <a:rPr sz="750" b="0" i="0" dirty="0">
@@ -11959,7 +13351,7 @@
                 </a:solidFill>
                 <a:latin typeface="Aptos"/>
               </a:rPr>
-              <a:t>— </a:t>
+              <a:t>- </a:t>
             </a:r>
             <a:r>
               <a:rPr sz="750" b="0" i="0" dirty="0">
@@ -12376,7 +13768,7 @@
         </p:nvGraphicFramePr>
         <p:xfrm>
           <a:off x="640080" y="1600200"/>
-          <a:ext cx="10881358" cy="1883664"/>
+          <a:ext cx="10881358" cy="2098548"/>
         </p:xfrm>
         <a:graphic>
           <a:graphicData uri="http://schemas.openxmlformats.org/drawingml/2006/table">
@@ -12818,7 +14210,7 @@
                 </a:solidFill>
                 <a:latin typeface="Aptos"/>
               </a:rPr>
-              <a:t>— </a:t>
+              <a:t>- </a:t>
             </a:r>
             <a:r>
               <a:rPr sz="750" b="0" i="0" dirty="0">
@@ -13699,7 +15091,7 @@
                 </a:solidFill>
                 <a:latin typeface="Aptos"/>
               </a:rPr>
-              <a:t>— </a:t>
+              <a:t>- </a:t>
             </a:r>
             <a:r>
               <a:rPr sz="750" b="0" i="0" dirty="0">
@@ -14647,13 +16039,49 @@
               <a:t>06 </a:t>
             </a:r>
             <a:r>
+              <a:rPr sz="1250" b="1" i="0" dirty="0">
+                <a:solidFill>
+                  <a:srgbClr val="101820"/>
+                </a:solidFill>
+                <a:latin typeface="Aptos"/>
+              </a:rPr>
+              <a:t>  </a:t>
+            </a:r>
+            <a:r>
               <a:rPr sz="1250" b="1" i="0" dirty="0" err="1">
                 <a:solidFill>
                   <a:srgbClr val="101820"/>
                 </a:solidFill>
                 <a:latin typeface="Aptos"/>
               </a:rPr>
-              <a:t>  Функциональные возможности </a:t>
+              <a:t>Функциональные</a:t>
+            </a:r>
+            <a:r>
+              <a:rPr sz="1250" b="1" i="0" dirty="0">
+                <a:solidFill>
+                  <a:srgbClr val="101820"/>
+                </a:solidFill>
+                <a:latin typeface="Aptos"/>
+              </a:rPr>
+              <a:t> </a:t>
+            </a:r>
+            <a:r>
+              <a:rPr sz="1250" b="1" i="0" dirty="0" err="1">
+                <a:solidFill>
+                  <a:srgbClr val="101820"/>
+                </a:solidFill>
+                <a:latin typeface="Aptos"/>
+              </a:rPr>
+              <a:t>возможности</a:t>
+            </a:r>
+            <a:r>
+              <a:rPr sz="1250" b="1" i="0" dirty="0">
+                <a:solidFill>
+                  <a:srgbClr val="101820"/>
+                </a:solidFill>
+                <a:latin typeface="Aptos"/>
+              </a:rPr>
+              <a:t> </a:t>
             </a:r>
             <a:r>
               <a:rPr lang="de-DE" sz="1250" b="1" i="0" dirty="0">
@@ -14662,7 +16090,7 @@
                 </a:solidFill>
                 <a:latin typeface="Aptos"/>
               </a:rPr>
-              <a:t>— </a:t>
+              <a:t>- </a:t>
             </a:r>
             <a:r>
               <a:rPr sz="1250" b="1" i="0" dirty="0">
@@ -14873,7 +16301,25 @@
                 </a:solidFill>
                 <a:latin typeface="Aptos"/>
               </a:rPr>
-              <a:t>  Демонстрация </a:t>
+              <a:t>  </a:t>
+            </a:r>
+            <a:r>
+              <a:rPr sz="1250" b="1" i="0" dirty="0" err="1">
+                <a:solidFill>
+                  <a:srgbClr val="101820"/>
+                </a:solidFill>
+                <a:latin typeface="Aptos"/>
+              </a:rPr>
+              <a:t>Демонстрация</a:t>
+            </a:r>
+            <a:r>
+              <a:rPr sz="1250" b="1" i="0" dirty="0">
+                <a:solidFill>
+                  <a:srgbClr val="101820"/>
+                </a:solidFill>
+                <a:latin typeface="Aptos"/>
+              </a:rPr>
+              <a:t> </a:t>
             </a:r>
             <a:r>
               <a:rPr lang="de-DE" sz="1250" b="1" i="0" dirty="0">
@@ -14882,7 +16328,7 @@
                 </a:solidFill>
                 <a:latin typeface="Aptos"/>
               </a:rPr>
-              <a:t>— </a:t>
+              <a:t>- </a:t>
             </a:r>
             <a:r>
               <a:rPr sz="1250" b="1" i="0" dirty="0">
@@ -15364,7 +16810,7 @@
                 </a:solidFill>
                 <a:latin typeface="Aptos"/>
               </a:rPr>
-              <a:t>Каждая функция помечена</a:t>
+              <a:t>Каждая</a:t>
             </a:r>
             <a:r>
               <a:rPr sz="1150" b="0" i="0" dirty="0">
@@ -15373,7 +16819,61 @@
                 </a:solidFill>
                 <a:latin typeface="Aptos"/>
               </a:rPr>
-              <a:t> статусом </a:t>
+              <a:t> </a:t>
+            </a:r>
+            <a:r>
+              <a:rPr sz="1150" b="0" i="0" dirty="0" err="1">
+                <a:solidFill>
+                  <a:srgbClr val="33413D"/>
+                </a:solidFill>
+                <a:latin typeface="Aptos"/>
+              </a:rPr>
+              <a:t>функция</a:t>
+            </a:r>
+            <a:r>
+              <a:rPr sz="1150" b="0" i="0" dirty="0">
+                <a:solidFill>
+                  <a:srgbClr val="33413D"/>
+                </a:solidFill>
+                <a:latin typeface="Aptos"/>
+              </a:rPr>
+              <a:t> </a:t>
+            </a:r>
+            <a:r>
+              <a:rPr sz="1150" b="0" i="0" dirty="0" err="1">
+                <a:solidFill>
+                  <a:srgbClr val="33413D"/>
+                </a:solidFill>
+                <a:latin typeface="Aptos"/>
+              </a:rPr>
+              <a:t>помечена</a:t>
+            </a:r>
+            <a:r>
+              <a:rPr sz="1150" b="0" i="0" dirty="0">
+                <a:solidFill>
+                  <a:srgbClr val="33413D"/>
+                </a:solidFill>
+                <a:latin typeface="Aptos"/>
+              </a:rPr>
+              <a:t> </a:t>
+            </a:r>
+            <a:r>
+              <a:rPr sz="1150" b="0" i="0" dirty="0" err="1">
+                <a:solidFill>
+                  <a:srgbClr val="33413D"/>
+                </a:solidFill>
+                <a:latin typeface="Aptos"/>
+              </a:rPr>
+              <a:t>статусом</a:t>
+            </a:r>
+            <a:r>
+              <a:rPr sz="1150" b="0" i="0" dirty="0">
+                <a:solidFill>
+                  <a:srgbClr val="33413D"/>
+                </a:solidFill>
+                <a:latin typeface="Aptos"/>
+              </a:rPr>
+              <a:t> </a:t>
             </a:r>
             <a:r>
               <a:rPr lang="de-DE" sz="1150" b="0" i="0" dirty="0">
@@ -15382,7 +16882,7 @@
                 </a:solidFill>
                 <a:latin typeface="Aptos"/>
               </a:rPr>
-              <a:t>— </a:t>
+              <a:t>- </a:t>
             </a:r>
             <a:r>
               <a:rPr sz="1150" b="0" i="0" dirty="0">
@@ -15524,7 +17024,7 @@
                 </a:solidFill>
                 <a:latin typeface="Aptos"/>
               </a:rPr>
-              <a:t>— </a:t>
+              <a:t>- </a:t>
             </a:r>
             <a:r>
               <a:rPr sz="750" b="0" i="0" dirty="0">
@@ -15772,7 +17272,7 @@
                 </a:solidFill>
                 <a:latin typeface="Aptos"/>
               </a:rPr>
-              <a:t>— </a:t>
+              <a:t>- </a:t>
             </a:r>
             <a:r>
               <a:rPr sz="2700" b="1" i="0" dirty="0" err="1">
@@ -16258,7 +17758,7 @@
                           </a:solidFill>
                           <a:latin typeface="Aptos"/>
                         </a:rPr>
-                        <a:t>Любой </a:t>
+                        <a:t>Любой</a:t>
                       </a:r>
                       <a:r>
                         <a:rPr sz="1050" b="0" i="0" dirty="0">
@@ -16267,7 +17767,7 @@
                           </a:solidFill>
                           <a:latin typeface="Aptos"/>
                         </a:rPr>
-                        <a:t>человек </a:t>
+                        <a:t> человек </a:t>
                       </a:r>
                       <a:r>
                         <a:rPr sz="1050" b="0" i="0" dirty="0" err="1">
@@ -16276,7 +17776,106 @@
                           </a:solidFill>
                           <a:latin typeface="Aptos"/>
                         </a:rPr>
-                        <a:t>может подать заявку без учетной записи </a:t>
+                        <a:t>может</a:t>
+                      </a:r>
+                      <a:r>
+                        <a:rPr sz="1050" b="0" i="0" dirty="0">
+                          <a:solidFill>
+                            <a:srgbClr val="33413D"/>
+                          </a:solidFill>
+                          <a:latin typeface="Aptos"/>
+                        </a:rPr>
+                        <a:t> </a:t>
+                      </a:r>
+                      <a:r>
+                        <a:rPr sz="1050" b="0" i="0" dirty="0" err="1">
+                          <a:solidFill>
+                            <a:srgbClr val="33413D"/>
+                          </a:solidFill>
+                          <a:latin typeface="Aptos"/>
+                        </a:rPr>
+                        <a:t>подать</a:t>
+                      </a:r>
+                      <a:r>
+                        <a:rPr sz="1050" b="0" i="0" dirty="0">
+                          <a:solidFill>
+                            <a:srgbClr val="33413D"/>
+                          </a:solidFill>
+                          <a:latin typeface="Aptos"/>
+                        </a:rPr>
+                        <a:t> </a:t>
+                      </a:r>
+                      <a:r>
+                        <a:rPr sz="1050" b="0" i="0" dirty="0" err="1">
+                          <a:solidFill>
+                            <a:srgbClr val="33413D"/>
+                          </a:solidFill>
+                          <a:latin typeface="Aptos"/>
+                        </a:rPr>
+                        <a:t>заявку</a:t>
+                      </a:r>
+                      <a:r>
+                        <a:rPr sz="1050" b="0" i="0" dirty="0">
+                          <a:solidFill>
+                            <a:srgbClr val="33413D"/>
+                          </a:solidFill>
+                          <a:latin typeface="Aptos"/>
+                        </a:rPr>
+                        <a:t> </a:t>
+                      </a:r>
+                      <a:r>
+                        <a:rPr sz="1050" b="0" i="0" dirty="0" err="1">
+                          <a:solidFill>
+                            <a:srgbClr val="33413D"/>
+                          </a:solidFill>
+                          <a:latin typeface="Aptos"/>
+                        </a:rPr>
+                        <a:t>без</a:t>
+                      </a:r>
+                      <a:r>
+                        <a:rPr sz="1050" b="0" i="0" dirty="0">
+                          <a:solidFill>
+                            <a:srgbClr val="33413D"/>
+                          </a:solidFill>
+                          <a:latin typeface="Aptos"/>
+                        </a:rPr>
+                        <a:t> </a:t>
+                      </a:r>
+                      <a:r>
+                        <a:rPr sz="1050" b="0" i="0" dirty="0" err="1">
+                          <a:solidFill>
+                            <a:srgbClr val="33413D"/>
+                          </a:solidFill>
+                          <a:latin typeface="Aptos"/>
+                        </a:rPr>
+                        <a:t>учетной</a:t>
+                      </a:r>
+                      <a:r>
+                        <a:rPr sz="1050" b="0" i="0" dirty="0">
+                          <a:solidFill>
+                            <a:srgbClr val="33413D"/>
+                          </a:solidFill>
+                          <a:latin typeface="Aptos"/>
+                        </a:rPr>
+                        <a:t> </a:t>
+                      </a:r>
+                      <a:r>
+                        <a:rPr sz="1050" b="0" i="0" dirty="0" err="1">
+                          <a:solidFill>
+                            <a:srgbClr val="33413D"/>
+                          </a:solidFill>
+                          <a:latin typeface="Aptos"/>
+                        </a:rPr>
+                        <a:t>записи</a:t>
+                      </a:r>
+                      <a:r>
+                        <a:rPr sz="1050" b="0" i="0" dirty="0">
+                          <a:solidFill>
+                            <a:srgbClr val="33413D"/>
+                          </a:solidFill>
+                          <a:latin typeface="Aptos"/>
+                        </a:rPr>
+                        <a:t> </a:t>
                       </a:r>
                       <a:r>
                         <a:rPr lang="de-DE" sz="1050" b="0" i="0" dirty="0">
@@ -16285,7 +17884,7 @@
                           </a:solidFill>
                           <a:latin typeface="Aptos"/>
                         </a:rPr>
-                        <a:t>— </a:t>
+                        <a:t>- </a:t>
                       </a:r>
                       <a:r>
                         <a:rPr sz="1050" b="0" i="0" dirty="0" err="1">
@@ -16550,7 +18149,7 @@
                 </a:solidFill>
                 <a:latin typeface="Aptos"/>
               </a:rPr>
-              <a:t>— </a:t>
+              <a:t>- </a:t>
             </a:r>
             <a:r>
               <a:rPr sz="750" b="0" i="0" dirty="0">
@@ -17112,7 +18711,7 @@
                           </a:solidFill>
                           <a:latin typeface="Aptos"/>
                         </a:rPr>
-                        <a:t>Помощник в </a:t>
+                        <a:t>Помощник</a:t>
                       </a:r>
                       <a:r>
                         <a:rPr sz="1050" b="0" i="0" dirty="0">
@@ -17121,7 +18720,7 @@
                           </a:solidFill>
                           <a:latin typeface="Aptos"/>
                         </a:rPr>
-                        <a:t>портале, </a:t>
+                        <a:t> в портале, </a:t>
                       </a:r>
                       <a:r>
                         <a:rPr sz="1050" b="0" i="0" dirty="0" err="1">
@@ -17130,7 +18729,7 @@
                           </a:solidFill>
                           <a:latin typeface="Aptos"/>
                         </a:rPr>
-                        <a:t>работающий в зависимости от роли, </a:t>
+                        <a:t>работающий</a:t>
                       </a:r>
                       <a:r>
                         <a:rPr sz="1050" b="0" i="0" dirty="0">
@@ -17139,7 +18738,7 @@
                           </a:solidFill>
                           <a:latin typeface="Aptos"/>
                         </a:rPr>
-                        <a:t>предназначенный для создания </a:t>
+                        <a:t> в </a:t>
                       </a:r>
                       <a:r>
                         <a:rPr sz="1050" b="0" i="0" dirty="0" err="1">
@@ -17148,6 +18747,60 @@
                           </a:solidFill>
                           <a:latin typeface="Aptos"/>
                         </a:rPr>
+                        <a:t>зависимости</a:t>
+                      </a:r>
+                      <a:r>
+                        <a:rPr sz="1050" b="0" i="0" dirty="0">
+                          <a:solidFill>
+                            <a:srgbClr val="33413D"/>
+                          </a:solidFill>
+                          <a:latin typeface="Aptos"/>
+                        </a:rPr>
+                        <a:t> </a:t>
+                      </a:r>
+                      <a:r>
+                        <a:rPr sz="1050" b="0" i="0" dirty="0" err="1">
+                          <a:solidFill>
+                            <a:srgbClr val="33413D"/>
+                          </a:solidFill>
+                          <a:latin typeface="Aptos"/>
+                        </a:rPr>
+                        <a:t>от</a:t>
+                      </a:r>
+                      <a:r>
+                        <a:rPr sz="1050" b="0" i="0" dirty="0">
+                          <a:solidFill>
+                            <a:srgbClr val="33413D"/>
+                          </a:solidFill>
+                          <a:latin typeface="Aptos"/>
+                        </a:rPr>
+                        <a:t> </a:t>
+                      </a:r>
+                      <a:r>
+                        <a:rPr sz="1050" b="0" i="0" dirty="0" err="1">
+                          <a:solidFill>
+                            <a:srgbClr val="33413D"/>
+                          </a:solidFill>
+                          <a:latin typeface="Aptos"/>
+                        </a:rPr>
+                        <a:t>роли</a:t>
+                      </a:r>
+                      <a:r>
+                        <a:rPr sz="1050" b="0" i="0" dirty="0">
+                          <a:solidFill>
+                            <a:srgbClr val="33413D"/>
+                          </a:solidFill>
+                          <a:latin typeface="Aptos"/>
+                        </a:rPr>
+                        <a:t>, предназначенный для создания </a:t>
+                      </a:r>
+                      <a:r>
+                        <a:rPr sz="1050" b="0" i="0" dirty="0" err="1">
+                          <a:solidFill>
+                            <a:srgbClr val="33413D"/>
+                          </a:solidFill>
+                          <a:latin typeface="Aptos"/>
+                        </a:rPr>
                         <a:t>сводок</a:t>
                       </a:r>
                       <a:r>
@@ -17166,7 +18819,7 @@
                           </a:solidFill>
                           <a:latin typeface="Aptos"/>
                         </a:rPr>
-                        <a:t>определения приоритетов </a:t>
+                        <a:t>определения</a:t>
                       </a:r>
                       <a:r>
                         <a:rPr sz="1050" b="0" i="0" dirty="0">
@@ -17175,7 +18828,7 @@
                           </a:solidFill>
                           <a:latin typeface="Aptos"/>
                         </a:rPr>
-                        <a:t>и </a:t>
+                        <a:t> </a:t>
                       </a:r>
                       <a:r>
                         <a:rPr sz="1050" b="0" i="0" dirty="0" err="1">
@@ -17184,7 +18837,70 @@
                           </a:solidFill>
                           <a:latin typeface="Aptos"/>
                         </a:rPr>
-                        <a:t>подготовки черновых текстов </a:t>
+                        <a:t>приоритетов</a:t>
+                      </a:r>
+                      <a:r>
+                        <a:rPr sz="1050" b="0" i="0" dirty="0">
+                          <a:solidFill>
+                            <a:srgbClr val="33413D"/>
+                          </a:solidFill>
+                          <a:latin typeface="Aptos"/>
+                        </a:rPr>
+                        <a:t> и </a:t>
+                      </a:r>
+                      <a:r>
+                        <a:rPr sz="1050" b="0" i="0" dirty="0" err="1">
+                          <a:solidFill>
+                            <a:srgbClr val="33413D"/>
+                          </a:solidFill>
+                          <a:latin typeface="Aptos"/>
+                        </a:rPr>
+                        <a:t>подготовки</a:t>
+                      </a:r>
+                      <a:r>
+                        <a:rPr sz="1050" b="0" i="0" dirty="0">
+                          <a:solidFill>
+                            <a:srgbClr val="33413D"/>
+                          </a:solidFill>
+                          <a:latin typeface="Aptos"/>
+                        </a:rPr>
+                        <a:t> </a:t>
+                      </a:r>
+                      <a:r>
+                        <a:rPr sz="1050" b="0" i="0" dirty="0" err="1">
+                          <a:solidFill>
+                            <a:srgbClr val="33413D"/>
+                          </a:solidFill>
+                          <a:latin typeface="Aptos"/>
+                        </a:rPr>
+                        <a:t>черновых</a:t>
+                      </a:r>
+                      <a:r>
+                        <a:rPr sz="1050" b="0" i="0" dirty="0">
+                          <a:solidFill>
+                            <a:srgbClr val="33413D"/>
+                          </a:solidFill>
+                          <a:latin typeface="Aptos"/>
+                        </a:rPr>
+                        <a:t> </a:t>
+                      </a:r>
+                      <a:r>
+                        <a:rPr sz="1050" b="0" i="0" dirty="0" err="1">
+                          <a:solidFill>
+                            <a:srgbClr val="33413D"/>
+                          </a:solidFill>
+                          <a:latin typeface="Aptos"/>
+                        </a:rPr>
+                        <a:t>текстов</a:t>
+                      </a:r>
+                      <a:r>
+                        <a:rPr sz="1050" b="0" i="0" dirty="0">
+                          <a:solidFill>
+                            <a:srgbClr val="33413D"/>
+                          </a:solidFill>
+                          <a:latin typeface="Aptos"/>
+                        </a:rPr>
+                        <a:t> </a:t>
                       </a:r>
                       <a:r>
                         <a:rPr lang="de-DE" sz="1050" b="0" i="0" dirty="0">
@@ -17193,7 +18909,7 @@
                           </a:solidFill>
                           <a:latin typeface="Aptos"/>
                         </a:rPr>
-                        <a:t>— </a:t>
+                        <a:t>- </a:t>
                       </a:r>
                       <a:r>
                         <a:rPr sz="1050" b="0" i="0" dirty="0" err="1">
@@ -17455,7 +19171,7 @@
                 </a:solidFill>
                 <a:latin typeface="Aptos"/>
               </a:rPr>
-              <a:t>— </a:t>
+              <a:t>- </a:t>
             </a:r>
             <a:r>
               <a:rPr sz="750" b="0" i="0" dirty="0">
@@ -18017,7 +19733,7 @@
                           </a:solidFill>
                           <a:latin typeface="Aptos"/>
                         </a:rPr>
-                        <a:t>Полностью </a:t>
+                        <a:t>Полностью</a:t>
                       </a:r>
                       <a:r>
                         <a:rPr sz="1050" b="0" i="0" dirty="0">
@@ -18026,7 +19742,7 @@
                           </a:solidFill>
                           <a:latin typeface="Aptos"/>
                         </a:rPr>
-                        <a:t>на </a:t>
+                        <a:t> на </a:t>
                       </a:r>
                       <a:r>
                         <a:rPr sz="1050" b="0" i="0" dirty="0" err="1">
@@ -18053,7 +19769,34 @@
                           </a:solidFill>
                           <a:latin typeface="Aptos"/>
                         </a:rPr>
-                        <a:t>русском языках </a:t>
+                        <a:t>русском</a:t>
+                      </a:r>
+                      <a:r>
+                        <a:rPr sz="1050" b="0" i="0" dirty="0">
+                          <a:solidFill>
+                            <a:srgbClr val="33413D"/>
+                          </a:solidFill>
+                          <a:latin typeface="Aptos"/>
+                        </a:rPr>
+                        <a:t> </a:t>
+                      </a:r>
+                      <a:r>
+                        <a:rPr sz="1050" b="0" i="0" dirty="0" err="1">
+                          <a:solidFill>
+                            <a:srgbClr val="33413D"/>
+                          </a:solidFill>
+                          <a:latin typeface="Aptos"/>
+                        </a:rPr>
+                        <a:t>языках</a:t>
+                      </a:r>
+                      <a:r>
+                        <a:rPr sz="1050" b="0" i="0" dirty="0">
+                          <a:solidFill>
+                            <a:srgbClr val="33413D"/>
+                          </a:solidFill>
+                          <a:latin typeface="Aptos"/>
+                        </a:rPr>
+                        <a:t> </a:t>
                       </a:r>
                       <a:r>
                         <a:rPr lang="de-DE" sz="1050" b="0" i="0" dirty="0">
@@ -18062,7 +19805,7 @@
                           </a:solidFill>
                           <a:latin typeface="Aptos"/>
                         </a:rPr>
-                        <a:t>— </a:t>
+                        <a:t>- </a:t>
                       </a:r>
                       <a:r>
                         <a:rPr sz="1050" b="0" i="0" dirty="0" err="1">
@@ -18401,7 +20144,7 @@
                 </a:solidFill>
                 <a:latin typeface="Aptos"/>
               </a:rPr>
-              <a:t>— </a:t>
+              <a:t>- </a:t>
             </a:r>
             <a:r>
               <a:rPr sz="750" b="0" i="0" dirty="0">
@@ -18856,14 +20599,38 @@
                     <a:lstStyle/>
                     <a:p>
                       <a:r>
-                        <a:rPr sz="1050" b="1" i="0">
+                        <a:rPr sz="1050" b="1" i="0" dirty="0" err="1">
                           <a:solidFill>
                             <a:srgbClr val="FFFFFF"/>
                           </a:solidFill>
                           <a:latin typeface="Aptos"/>
                         </a:rPr>
-                        <a:t>Ваши требования</a:t>
-                      </a:r>
+                        <a:t>Ваши</a:t>
+                      </a:r>
+                      <a:r>
+                        <a:rPr sz="1050" b="1" i="0" dirty="0">
+                          <a:solidFill>
+                            <a:srgbClr val="FFFFFF"/>
+                          </a:solidFill>
+                          <a:latin typeface="Aptos"/>
+                        </a:rPr>
+                        <a:t> </a:t>
+                      </a:r>
+                      <a:r>
+                        <a:rPr sz="1050" b="1" i="0" dirty="0" err="1">
+                          <a:solidFill>
+                            <a:srgbClr val="FFFFFF"/>
+                          </a:solidFill>
+                          <a:latin typeface="Aptos"/>
+                        </a:rPr>
+                        <a:t>требования</a:t>
+                      </a:r>
+                      <a:endParaRPr sz="1050" b="1" i="0" dirty="0">
+                        <a:solidFill>
+                          <a:srgbClr val="FFFFFF"/>
+                        </a:solidFill>
+                        <a:latin typeface="Aptos"/>
+                      </a:endParaRPr>
                     </a:p>
                   </a:txBody>
                   <a:tcPr marL="73152" marR="73152" marT="36576" marB="36576" anchor="ctr">
@@ -19122,13 +20889,238 @@
                     <a:lstStyle/>
                     <a:p>
                       <a:r>
-                        <a:rPr sz="950" b="0" i="0">
+                        <a:rPr sz="950" b="0" i="0" dirty="0" err="1">
                           <a:solidFill>
                             <a:srgbClr val="33413D"/>
                           </a:solidFill>
                           <a:latin typeface="Aptos"/>
                         </a:rPr>
-                        <a:t>Счета и остатки — полностью; функция активного ввода данных/автоматического зачета находится в стадии подготовки.</a:t>
+                        <a:t>Счета</a:t>
+                      </a:r>
+                      <a:r>
+                        <a:rPr sz="950" b="0" i="0" dirty="0">
+                          <a:solidFill>
+                            <a:srgbClr val="33413D"/>
+                          </a:solidFill>
+                          <a:latin typeface="Aptos"/>
+                        </a:rPr>
+                        <a:t> и </a:t>
+                      </a:r>
+                      <a:r>
+                        <a:rPr sz="950" b="0" i="0" dirty="0" err="1">
+                          <a:solidFill>
+                            <a:srgbClr val="33413D"/>
+                          </a:solidFill>
+                          <a:latin typeface="Aptos"/>
+                        </a:rPr>
+                        <a:t>остатки</a:t>
+                      </a:r>
+                      <a:r>
+                        <a:rPr sz="950" b="0" i="0" dirty="0">
+                          <a:solidFill>
+                            <a:srgbClr val="33413D"/>
+                          </a:solidFill>
+                          <a:latin typeface="Aptos"/>
+                        </a:rPr>
+                        <a:t> </a:t>
+                      </a:r>
+                      <a:r>
+                        <a:rPr lang="de-DE" sz="950" b="0" i="0" dirty="0">
+                          <a:solidFill>
+                            <a:srgbClr val="33413D"/>
+                          </a:solidFill>
+                          <a:latin typeface="Aptos"/>
+                        </a:rPr>
+                        <a:t>-</a:t>
+                      </a:r>
+                      <a:r>
+                        <a:rPr sz="950" b="0" i="0" dirty="0">
+                          <a:solidFill>
+                            <a:srgbClr val="33413D"/>
+                          </a:solidFill>
+                          <a:latin typeface="Aptos"/>
+                        </a:rPr>
+                        <a:t> </a:t>
+                      </a:r>
+                      <a:r>
+                        <a:rPr sz="950" b="0" i="0" dirty="0" err="1">
+                          <a:solidFill>
+                            <a:srgbClr val="33413D"/>
+                          </a:solidFill>
+                          <a:latin typeface="Aptos"/>
+                        </a:rPr>
+                        <a:t>полностью</a:t>
+                      </a:r>
+                      <a:r>
+                        <a:rPr sz="950" b="0" i="0" dirty="0">
+                          <a:solidFill>
+                            <a:srgbClr val="33413D"/>
+                          </a:solidFill>
+                          <a:latin typeface="Aptos"/>
+                        </a:rPr>
+                        <a:t>; </a:t>
+                      </a:r>
+                      <a:r>
+                        <a:rPr sz="950" b="0" i="0" dirty="0" err="1">
+                          <a:solidFill>
+                            <a:srgbClr val="33413D"/>
+                          </a:solidFill>
+                          <a:latin typeface="Aptos"/>
+                        </a:rPr>
+                        <a:t>функция</a:t>
+                      </a:r>
+                      <a:r>
+                        <a:rPr sz="950" b="0" i="0" dirty="0">
+                          <a:solidFill>
+                            <a:srgbClr val="33413D"/>
+                          </a:solidFill>
+                          <a:latin typeface="Aptos"/>
+                        </a:rPr>
+                        <a:t> </a:t>
+                      </a:r>
+                      <a:r>
+                        <a:rPr sz="950" b="0" i="0" dirty="0" err="1">
+                          <a:solidFill>
+                            <a:srgbClr val="33413D"/>
+                          </a:solidFill>
+                          <a:latin typeface="Aptos"/>
+                        </a:rPr>
+                        <a:t>активного</a:t>
+                      </a:r>
+                      <a:r>
+                        <a:rPr sz="950" b="0" i="0" dirty="0">
+                          <a:solidFill>
+                            <a:srgbClr val="33413D"/>
+                          </a:solidFill>
+                          <a:latin typeface="Aptos"/>
+                        </a:rPr>
+                        <a:t> </a:t>
+                      </a:r>
+                      <a:r>
+                        <a:rPr sz="950" b="0" i="0" dirty="0" err="1">
+                          <a:solidFill>
+                            <a:srgbClr val="33413D"/>
+                          </a:solidFill>
+                          <a:latin typeface="Aptos"/>
+                        </a:rPr>
+                        <a:t>ввода</a:t>
+                      </a:r>
+                      <a:r>
+                        <a:rPr sz="950" b="0" i="0" dirty="0">
+                          <a:solidFill>
+                            <a:srgbClr val="33413D"/>
+                          </a:solidFill>
+                          <a:latin typeface="Aptos"/>
+                        </a:rPr>
+                        <a:t> </a:t>
+                      </a:r>
+                      <a:r>
+                        <a:rPr sz="950" b="0" i="0" dirty="0" err="1">
+                          <a:solidFill>
+                            <a:srgbClr val="33413D"/>
+                          </a:solidFill>
+                          <a:latin typeface="Aptos"/>
+                        </a:rPr>
+                        <a:t>данных</a:t>
+                      </a:r>
+                      <a:r>
+                        <a:rPr sz="950" b="0" i="0" dirty="0">
+                          <a:solidFill>
+                            <a:srgbClr val="33413D"/>
+                          </a:solidFill>
+                          <a:latin typeface="Aptos"/>
+                        </a:rPr>
+                        <a:t>/</a:t>
+                      </a:r>
+                      <a:r>
+                        <a:rPr sz="950" b="0" i="0" dirty="0" err="1">
+                          <a:solidFill>
+                            <a:srgbClr val="33413D"/>
+                          </a:solidFill>
+                          <a:latin typeface="Aptos"/>
+                        </a:rPr>
+                        <a:t>автоматического</a:t>
+                      </a:r>
+                      <a:r>
+                        <a:rPr sz="950" b="0" i="0" dirty="0">
+                          <a:solidFill>
+                            <a:srgbClr val="33413D"/>
+                          </a:solidFill>
+                          <a:latin typeface="Aptos"/>
+                        </a:rPr>
+                        <a:t> </a:t>
+                      </a:r>
+                      <a:r>
+                        <a:rPr sz="950" b="0" i="0" dirty="0" err="1">
+                          <a:solidFill>
+                            <a:srgbClr val="33413D"/>
+                          </a:solidFill>
+                          <a:latin typeface="Aptos"/>
+                        </a:rPr>
+                        <a:t>зачета</a:t>
+                      </a:r>
+                      <a:r>
+                        <a:rPr sz="950" b="0" i="0" dirty="0">
+                          <a:solidFill>
+                            <a:srgbClr val="33413D"/>
+                          </a:solidFill>
+                          <a:latin typeface="Aptos"/>
+                        </a:rPr>
+                        <a:t> </a:t>
+                      </a:r>
+                      <a:r>
+                        <a:rPr sz="950" b="0" i="0" dirty="0" err="1">
+                          <a:solidFill>
+                            <a:srgbClr val="33413D"/>
+                          </a:solidFill>
+                          <a:latin typeface="Aptos"/>
+                        </a:rPr>
+                        <a:t>находится</a:t>
+                      </a:r>
+                      <a:r>
+                        <a:rPr sz="950" b="0" i="0" dirty="0">
+                          <a:solidFill>
+                            <a:srgbClr val="33413D"/>
+                          </a:solidFill>
+                          <a:latin typeface="Aptos"/>
+                        </a:rPr>
+                        <a:t> в </a:t>
+                      </a:r>
+                      <a:r>
+                        <a:rPr sz="950" b="0" i="0" dirty="0" err="1">
+                          <a:solidFill>
+                            <a:srgbClr val="33413D"/>
+                          </a:solidFill>
+                          <a:latin typeface="Aptos"/>
+                        </a:rPr>
+                        <a:t>стадии</a:t>
+                      </a:r>
+                      <a:r>
+                        <a:rPr sz="950" b="0" i="0" dirty="0">
+                          <a:solidFill>
+                            <a:srgbClr val="33413D"/>
+                          </a:solidFill>
+                          <a:latin typeface="Aptos"/>
+                        </a:rPr>
+                        <a:t> </a:t>
+                      </a:r>
+                      <a:r>
+                        <a:rPr sz="950" b="0" i="0" dirty="0" err="1">
+                          <a:solidFill>
+                            <a:srgbClr val="33413D"/>
+                          </a:solidFill>
+                          <a:latin typeface="Aptos"/>
+                        </a:rPr>
+                        <a:t>подготовки</a:t>
+                      </a:r>
+                      <a:r>
+                        <a:rPr sz="950" b="0" i="0" dirty="0">
+                          <a:solidFill>
+                            <a:srgbClr val="33413D"/>
+                          </a:solidFill>
+                          <a:latin typeface="Aptos"/>
+                        </a:rPr>
+                        <a:t>.</a:t>
                       </a:r>
                     </a:p>
                   </a:txBody>
@@ -19566,13 +21558,166 @@
                     <a:lstStyle/>
                     <a:p>
                       <a:r>
-                        <a:rPr sz="950" b="0" i="0">
+                        <a:rPr sz="950" b="0" i="0" dirty="0" err="1">
                           <a:solidFill>
                             <a:srgbClr val="33413D"/>
                           </a:solidFill>
                           <a:latin typeface="Aptos"/>
                         </a:rPr>
-                        <a:t>Рекомендации доступны; фактическое выполнение — после получения юридического разрешения.</a:t>
+                        <a:t>Рекомендации</a:t>
+                      </a:r>
+                      <a:r>
+                        <a:rPr sz="950" b="0" i="0" dirty="0">
+                          <a:solidFill>
+                            <a:srgbClr val="33413D"/>
+                          </a:solidFill>
+                          <a:latin typeface="Aptos"/>
+                        </a:rPr>
+                        <a:t> </a:t>
+                      </a:r>
+                      <a:r>
+                        <a:rPr sz="950" b="0" i="0" dirty="0" err="1">
+                          <a:solidFill>
+                            <a:srgbClr val="33413D"/>
+                          </a:solidFill>
+                          <a:latin typeface="Aptos"/>
+                        </a:rPr>
+                        <a:t>доступны</a:t>
+                      </a:r>
+                      <a:r>
+                        <a:rPr sz="950" b="0" i="0" dirty="0">
+                          <a:solidFill>
+                            <a:srgbClr val="33413D"/>
+                          </a:solidFill>
+                          <a:latin typeface="Aptos"/>
+                        </a:rPr>
+                        <a:t>; </a:t>
+                      </a:r>
+                      <a:r>
+                        <a:rPr sz="950" b="0" i="0" dirty="0" err="1">
+                          <a:solidFill>
+                            <a:srgbClr val="33413D"/>
+                          </a:solidFill>
+                          <a:latin typeface="Aptos"/>
+                        </a:rPr>
+                        <a:t>фактическое</a:t>
+                      </a:r>
+                      <a:r>
+                        <a:rPr sz="950" b="0" i="0" dirty="0">
+                          <a:solidFill>
+                            <a:srgbClr val="33413D"/>
+                          </a:solidFill>
+                          <a:latin typeface="Aptos"/>
+                        </a:rPr>
+                        <a:t> </a:t>
+                      </a:r>
+                      <a:r>
+                        <a:rPr sz="950" b="0" i="0" dirty="0" err="1">
+                          <a:solidFill>
+                            <a:srgbClr val="33413D"/>
+                          </a:solidFill>
+                          <a:latin typeface="Aptos"/>
+                        </a:rPr>
+                        <a:t>выполнение</a:t>
+                      </a:r>
+                      <a:r>
+                        <a:rPr sz="950" b="0" i="0" dirty="0">
+                          <a:solidFill>
+                            <a:srgbClr val="33413D"/>
+                          </a:solidFill>
+                          <a:latin typeface="Aptos"/>
+                        </a:rPr>
+                        <a:t> </a:t>
+                      </a:r>
+                      <a:r>
+                        <a:rPr lang="de-DE" sz="950" b="0" i="0" dirty="0">
+                          <a:solidFill>
+                            <a:srgbClr val="33413D"/>
+                          </a:solidFill>
+                          <a:latin typeface="Aptos"/>
+                        </a:rPr>
+                        <a:t>-</a:t>
+                      </a:r>
+                      <a:r>
+                        <a:rPr sz="950" b="0" i="0" dirty="0">
+                          <a:solidFill>
+                            <a:srgbClr val="33413D"/>
+                          </a:solidFill>
+                          <a:latin typeface="Aptos"/>
+                        </a:rPr>
+                        <a:t> </a:t>
+                      </a:r>
+                      <a:r>
+                        <a:rPr sz="950" b="0" i="0" dirty="0" err="1">
+                          <a:solidFill>
+                            <a:srgbClr val="33413D"/>
+                          </a:solidFill>
+                          <a:latin typeface="Aptos"/>
+                        </a:rPr>
+                        <a:t>после</a:t>
+                      </a:r>
+                      <a:r>
+                        <a:rPr sz="950" b="0" i="0" dirty="0">
+                          <a:solidFill>
+                            <a:srgbClr val="33413D"/>
+                          </a:solidFill>
+                          <a:latin typeface="Aptos"/>
+                        </a:rPr>
+                        <a:t> </a:t>
+                      </a:r>
+                      <a:r>
+                        <a:rPr sz="950" b="0" i="0" dirty="0" err="1">
+                          <a:solidFill>
+                            <a:srgbClr val="33413D"/>
+                          </a:solidFill>
+                          <a:latin typeface="Aptos"/>
+                        </a:rPr>
+                        <a:t>получения</a:t>
+                      </a:r>
+                      <a:r>
+                        <a:rPr sz="950" b="0" i="0" dirty="0">
+                          <a:solidFill>
+                            <a:srgbClr val="33413D"/>
+                          </a:solidFill>
+                          <a:latin typeface="Aptos"/>
+                        </a:rPr>
+                        <a:t> </a:t>
+                      </a:r>
+                      <a:r>
+                        <a:rPr sz="950" b="0" i="0" dirty="0" err="1">
+                          <a:solidFill>
+                            <a:srgbClr val="33413D"/>
+                          </a:solidFill>
+                          <a:latin typeface="Aptos"/>
+                        </a:rPr>
+                        <a:t>юридического</a:t>
+                      </a:r>
+                      <a:r>
+                        <a:rPr sz="950" b="0" i="0" dirty="0">
+                          <a:solidFill>
+                            <a:srgbClr val="33413D"/>
+                          </a:solidFill>
+                          <a:latin typeface="Aptos"/>
+                        </a:rPr>
+                        <a:t> </a:t>
+                      </a:r>
+                      <a:r>
+                        <a:rPr sz="950" b="0" i="0" dirty="0" err="1">
+                          <a:solidFill>
+                            <a:srgbClr val="33413D"/>
+                          </a:solidFill>
+                          <a:latin typeface="Aptos"/>
+                        </a:rPr>
+                        <a:t>разрешения</a:t>
+                      </a:r>
+                      <a:r>
+                        <a:rPr sz="950" b="0" i="0" dirty="0">
+                          <a:solidFill>
+                            <a:srgbClr val="33413D"/>
+                          </a:solidFill>
+                          <a:latin typeface="Aptos"/>
+                        </a:rPr>
+                        <a:t>.</a:t>
                       </a:r>
                     </a:p>
                   </a:txBody>
@@ -19704,7 +21849,7 @@
                 </a:solidFill>
                 <a:latin typeface="Aptos"/>
               </a:rPr>
-              <a:t>— </a:t>
+              <a:t>- </a:t>
             </a:r>
             <a:r>
               <a:rPr sz="750" b="0" i="0" dirty="0">
@@ -20159,14 +22304,38 @@
                     <a:lstStyle/>
                     <a:p>
                       <a:r>
-                        <a:rPr sz="1050" b="1" i="0">
+                        <a:rPr sz="1050" b="1" i="0" dirty="0" err="1">
                           <a:solidFill>
                             <a:srgbClr val="FFFFFF"/>
                           </a:solidFill>
                           <a:latin typeface="Aptos"/>
                         </a:rPr>
-                        <a:t>Ваше требование</a:t>
-                      </a:r>
+                        <a:t>Ваше</a:t>
+                      </a:r>
+                      <a:r>
+                        <a:rPr sz="1050" b="1" i="0" dirty="0">
+                          <a:solidFill>
+                            <a:srgbClr val="FFFFFF"/>
+                          </a:solidFill>
+                          <a:latin typeface="Aptos"/>
+                        </a:rPr>
+                        <a:t> </a:t>
+                      </a:r>
+                      <a:r>
+                        <a:rPr sz="1050" b="1" i="0" dirty="0" err="1">
+                          <a:solidFill>
+                            <a:srgbClr val="FFFFFF"/>
+                          </a:solidFill>
+                          <a:latin typeface="Aptos"/>
+                        </a:rPr>
+                        <a:t>требование</a:t>
+                      </a:r>
+                      <a:endParaRPr sz="1050" b="1" i="0" dirty="0">
+                        <a:solidFill>
+                          <a:srgbClr val="FFFFFF"/>
+                        </a:solidFill>
+                        <a:latin typeface="Aptos"/>
+                      </a:endParaRPr>
                     </a:p>
                   </a:txBody>
                   <a:tcPr marL="73152" marR="73152" marT="36576" marB="36576" anchor="ctr">
@@ -20795,13 +22964,274 @@
                     <a:lstStyle/>
                     <a:p>
                       <a:r>
-                        <a:rPr sz="950" b="0" i="0">
+                        <a:rPr sz="950" b="0" i="0" dirty="0" err="1">
                           <a:solidFill>
                             <a:srgbClr val="33413D"/>
                           </a:solidFill>
                           <a:latin typeface="Aptos"/>
                         </a:rPr>
-                        <a:t>Данные по долгам, задачам и KPI доступны в режиме реального времени; показатели по доходам и расходам — в стадии разработки.</a:t>
+                        <a:t>Данные</a:t>
+                      </a:r>
+                      <a:r>
+                        <a:rPr sz="950" b="0" i="0" dirty="0">
+                          <a:solidFill>
+                            <a:srgbClr val="33413D"/>
+                          </a:solidFill>
+                          <a:latin typeface="Aptos"/>
+                        </a:rPr>
+                        <a:t> </a:t>
+                      </a:r>
+                      <a:r>
+                        <a:rPr sz="950" b="0" i="0" dirty="0" err="1">
+                          <a:solidFill>
+                            <a:srgbClr val="33413D"/>
+                          </a:solidFill>
+                          <a:latin typeface="Aptos"/>
+                        </a:rPr>
+                        <a:t>по</a:t>
+                      </a:r>
+                      <a:r>
+                        <a:rPr sz="950" b="0" i="0" dirty="0">
+                          <a:solidFill>
+                            <a:srgbClr val="33413D"/>
+                          </a:solidFill>
+                          <a:latin typeface="Aptos"/>
+                        </a:rPr>
+                        <a:t> </a:t>
+                      </a:r>
+                      <a:r>
+                        <a:rPr sz="950" b="0" i="0" dirty="0" err="1">
+                          <a:solidFill>
+                            <a:srgbClr val="33413D"/>
+                          </a:solidFill>
+                          <a:latin typeface="Aptos"/>
+                        </a:rPr>
+                        <a:t>долгам</a:t>
+                      </a:r>
+                      <a:r>
+                        <a:rPr sz="950" b="0" i="0" dirty="0">
+                          <a:solidFill>
+                            <a:srgbClr val="33413D"/>
+                          </a:solidFill>
+                          <a:latin typeface="Aptos"/>
+                        </a:rPr>
+                        <a:t>, </a:t>
+                      </a:r>
+                      <a:r>
+                        <a:rPr sz="950" b="0" i="0" dirty="0" err="1">
+                          <a:solidFill>
+                            <a:srgbClr val="33413D"/>
+                          </a:solidFill>
+                          <a:latin typeface="Aptos"/>
+                        </a:rPr>
+                        <a:t>задачам</a:t>
+                      </a:r>
+                      <a:r>
+                        <a:rPr sz="950" b="0" i="0" dirty="0">
+                          <a:solidFill>
+                            <a:srgbClr val="33413D"/>
+                          </a:solidFill>
+                          <a:latin typeface="Aptos"/>
+                        </a:rPr>
+                        <a:t> и KPI </a:t>
+                      </a:r>
+                      <a:r>
+                        <a:rPr sz="950" b="0" i="0" dirty="0" err="1">
+                          <a:solidFill>
+                            <a:srgbClr val="33413D"/>
+                          </a:solidFill>
+                          <a:latin typeface="Aptos"/>
+                        </a:rPr>
+                        <a:t>доступны</a:t>
+                      </a:r>
+                      <a:r>
+                        <a:rPr sz="950" b="0" i="0" dirty="0">
+                          <a:solidFill>
+                            <a:srgbClr val="33413D"/>
+                          </a:solidFill>
+                          <a:latin typeface="Aptos"/>
+                        </a:rPr>
+                        <a:t> в </a:t>
+                      </a:r>
+                      <a:r>
+                        <a:rPr sz="950" b="0" i="0" dirty="0" err="1">
+                          <a:solidFill>
+                            <a:srgbClr val="33413D"/>
+                          </a:solidFill>
+                          <a:latin typeface="Aptos"/>
+                        </a:rPr>
+                        <a:t>режиме</a:t>
+                      </a:r>
+                      <a:r>
+                        <a:rPr sz="950" b="0" i="0" dirty="0">
+                          <a:solidFill>
+                            <a:srgbClr val="33413D"/>
+                          </a:solidFill>
+                          <a:latin typeface="Aptos"/>
+                        </a:rPr>
+                        <a:t> </a:t>
+                      </a:r>
+                      <a:r>
+                        <a:rPr sz="950" b="0" i="0" dirty="0" err="1">
+                          <a:solidFill>
+                            <a:srgbClr val="33413D"/>
+                          </a:solidFill>
+                          <a:latin typeface="Aptos"/>
+                        </a:rPr>
+                        <a:t>реального</a:t>
+                      </a:r>
+                      <a:r>
+                        <a:rPr sz="950" b="0" i="0" dirty="0">
+                          <a:solidFill>
+                            <a:srgbClr val="33413D"/>
+                          </a:solidFill>
+                          <a:latin typeface="Aptos"/>
+                        </a:rPr>
+                        <a:t> </a:t>
+                      </a:r>
+                      <a:r>
+                        <a:rPr sz="950" b="0" i="0" dirty="0" err="1">
+                          <a:solidFill>
+                            <a:srgbClr val="33413D"/>
+                          </a:solidFill>
+                          <a:latin typeface="Aptos"/>
+                        </a:rPr>
+                        <a:t>времени</a:t>
+                      </a:r>
+                      <a:r>
+                        <a:rPr sz="950" b="0" i="0" dirty="0">
+                          <a:solidFill>
+                            <a:srgbClr val="33413D"/>
+                          </a:solidFill>
+                          <a:latin typeface="Aptos"/>
+                        </a:rPr>
+                        <a:t>; </a:t>
+                      </a:r>
+                      <a:r>
+                        <a:rPr sz="950" b="0" i="0" dirty="0" err="1">
+                          <a:solidFill>
+                            <a:srgbClr val="33413D"/>
+                          </a:solidFill>
+                          <a:latin typeface="Aptos"/>
+                        </a:rPr>
+                        <a:t>показатели</a:t>
+                      </a:r>
+                      <a:r>
+                        <a:rPr sz="950" b="0" i="0" dirty="0">
+                          <a:solidFill>
+                            <a:srgbClr val="33413D"/>
+                          </a:solidFill>
+                          <a:latin typeface="Aptos"/>
+                        </a:rPr>
+                        <a:t> </a:t>
+                      </a:r>
+                      <a:r>
+                        <a:rPr sz="950" b="0" i="0" dirty="0" err="1">
+                          <a:solidFill>
+                            <a:srgbClr val="33413D"/>
+                          </a:solidFill>
+                          <a:latin typeface="Aptos"/>
+                        </a:rPr>
+                        <a:t>по</a:t>
+                      </a:r>
+                      <a:r>
+                        <a:rPr sz="950" b="0" i="0" dirty="0">
+                          <a:solidFill>
+                            <a:srgbClr val="33413D"/>
+                          </a:solidFill>
+                          <a:latin typeface="Aptos"/>
+                        </a:rPr>
+                        <a:t> </a:t>
+                      </a:r>
+                      <a:r>
+                        <a:rPr sz="950" b="0" i="0" dirty="0" err="1">
+                          <a:solidFill>
+                            <a:srgbClr val="33413D"/>
+                          </a:solidFill>
+                          <a:latin typeface="Aptos"/>
+                        </a:rPr>
+                        <a:t>доходам</a:t>
+                      </a:r>
+                      <a:r>
+                        <a:rPr sz="950" b="0" i="0" dirty="0">
+                          <a:solidFill>
+                            <a:srgbClr val="33413D"/>
+                          </a:solidFill>
+                          <a:latin typeface="Aptos"/>
+                        </a:rPr>
+                        <a:t> и </a:t>
+                      </a:r>
+                      <a:r>
+                        <a:rPr sz="950" b="0" i="0" dirty="0" err="1">
+                          <a:solidFill>
+                            <a:srgbClr val="33413D"/>
+                          </a:solidFill>
+                          <a:latin typeface="Aptos"/>
+                        </a:rPr>
+                        <a:t>расходам</a:t>
+                      </a:r>
+                      <a:r>
+                        <a:rPr sz="950" b="0" i="0" dirty="0">
+                          <a:solidFill>
+                            <a:srgbClr val="33413D"/>
+                          </a:solidFill>
+                          <a:latin typeface="Aptos"/>
+                        </a:rPr>
+                        <a:t> </a:t>
+                      </a:r>
+                      <a:r>
+                        <a:rPr lang="de-DE" sz="950" b="0" i="0" dirty="0">
+                          <a:solidFill>
+                            <a:srgbClr val="33413D"/>
+                          </a:solidFill>
+                          <a:latin typeface="Aptos"/>
+                        </a:rPr>
+                        <a:t>-</a:t>
+                      </a:r>
+                      <a:r>
+                        <a:rPr sz="950" b="0" i="0" dirty="0">
+                          <a:solidFill>
+                            <a:srgbClr val="33413D"/>
+                          </a:solidFill>
+                          <a:latin typeface="Aptos"/>
+                        </a:rPr>
+                        <a:t> в </a:t>
+                      </a:r>
+                      <a:r>
+                        <a:rPr sz="950" b="0" i="0" dirty="0" err="1">
+                          <a:solidFill>
+                            <a:srgbClr val="33413D"/>
+                          </a:solidFill>
+                          <a:latin typeface="Aptos"/>
+                        </a:rPr>
+                        <a:t>стадии</a:t>
+                      </a:r>
+                      <a:r>
+                        <a:rPr sz="950" b="0" i="0" dirty="0">
+                          <a:solidFill>
+                            <a:srgbClr val="33413D"/>
+                          </a:solidFill>
+                          <a:latin typeface="Aptos"/>
+                        </a:rPr>
+                        <a:t> </a:t>
+                      </a:r>
+                      <a:r>
+                        <a:rPr sz="950" b="0" i="0" dirty="0" err="1">
+                          <a:solidFill>
+                            <a:srgbClr val="33413D"/>
+                          </a:solidFill>
+                          <a:latin typeface="Aptos"/>
+                        </a:rPr>
+                        <a:t>разработки</a:t>
+                      </a:r>
+                      <a:r>
+                        <a:rPr sz="950" b="0" i="0" dirty="0">
+                          <a:solidFill>
+                            <a:srgbClr val="33413D"/>
+                          </a:solidFill>
+                          <a:latin typeface="Aptos"/>
+                        </a:rPr>
+                        <a:t>.</a:t>
                       </a:r>
                     </a:p>
                   </a:txBody>
@@ -21007,7 +23437,7 @@
                 </a:solidFill>
                 <a:latin typeface="Aptos"/>
               </a:rPr>
-              <a:t>— </a:t>
+              <a:t>- </a:t>
             </a:r>
             <a:r>
               <a:rPr sz="750" b="0" i="0" dirty="0">
@@ -21246,7 +23676,7 @@
                 </a:solidFill>
                 <a:latin typeface="Aptos"/>
               </a:rPr>
-              <a:t>Повторяющийся </a:t>
+              <a:t>Повторяющийся</a:t>
             </a:r>
             <a:r>
               <a:rPr sz="2700" b="1" i="0" dirty="0">
@@ -21255,7 +23685,25 @@
                 </a:solidFill>
                 <a:latin typeface="Aptos"/>
               </a:rPr>
-              <a:t>паттерн </a:t>
+              <a:t> </a:t>
+            </a:r>
+            <a:r>
+              <a:rPr sz="2700" b="1" i="0" dirty="0" err="1">
+                <a:solidFill>
+                  <a:srgbClr val="044F49"/>
+                </a:solidFill>
+                <a:latin typeface="Aptos"/>
+              </a:rPr>
+              <a:t>паттерн</a:t>
+            </a:r>
+            <a:r>
+              <a:rPr sz="2700" b="1" i="0" dirty="0">
+                <a:solidFill>
+                  <a:srgbClr val="044F49"/>
+                </a:solidFill>
+                <a:latin typeface="Aptos"/>
+              </a:rPr>
+              <a:t> </a:t>
             </a:r>
             <a:r>
               <a:rPr lang="de-DE" sz="2700" b="1" i="0" dirty="0">
@@ -21264,7 +23712,7 @@
                 </a:solidFill>
                 <a:latin typeface="Aptos"/>
               </a:rPr>
-              <a:t>— </a:t>
+              <a:t>- </a:t>
             </a:r>
             <a:r>
               <a:rPr sz="2700" b="1" i="0" dirty="0">
@@ -21579,8 +24027,8 @@
         </p:nvSpPr>
         <p:spPr>
           <a:xfrm>
-            <a:off x="896112" y="2747322"/>
-            <a:ext cx="10469880" cy="723275"/>
+            <a:off x="896112" y="2658837"/>
+            <a:ext cx="10469880" cy="900246"/>
           </a:xfrm>
           <a:prstGeom prst="rect">
             <a:avLst/>
@@ -21600,7 +24048,7 @@
                 </a:solidFill>
                 <a:latin typeface="Aptos"/>
               </a:rPr>
-              <a:t>Отображение </a:t>
+              <a:t>Отображение</a:t>
             </a:r>
             <a:r>
               <a:rPr sz="1250" b="1" i="0" dirty="0">
@@ -21609,7 +24057,7 @@
                 </a:solidFill>
                 <a:latin typeface="Aptos"/>
               </a:rPr>
-              <a:t>и </a:t>
+              <a:t> и </a:t>
             </a:r>
             <a:r>
               <a:rPr sz="1250" b="1" i="0" dirty="0" err="1">
@@ -21618,7 +24066,16 @@
                 </a:solidFill>
                 <a:latin typeface="Aptos"/>
               </a:rPr>
-              <a:t>рекомендация </a:t>
+              <a:t>рекомендация</a:t>
+            </a:r>
+            <a:r>
+              <a:rPr sz="1250" b="1" i="0" dirty="0">
+                <a:solidFill>
+                  <a:srgbClr val="044F49"/>
+                </a:solidFill>
+                <a:latin typeface="Aptos"/>
+              </a:rPr>
+              <a:t> </a:t>
             </a:r>
             <a:r>
               <a:rPr lang="de-DE" sz="1250" b="1" i="0" dirty="0">
@@ -21627,7 +24084,7 @@
                 </a:solidFill>
                 <a:latin typeface="Aptos"/>
               </a:rPr>
-              <a:t>—</a:t>
+              <a:t>-</a:t>
             </a:r>
             <a:r>
               <a:rPr sz="1250" b="1" i="0" dirty="0">
@@ -21645,7 +24102,70 @@
                 </a:solidFill>
                 <a:latin typeface="Aptos"/>
               </a:rPr>
-              <a:t>автоматическое выполнение намеренно запускается </a:t>
+              <a:t>автоматическое</a:t>
+            </a:r>
+            <a:r>
+              <a:rPr sz="1250" b="1" i="0" dirty="0">
+                <a:solidFill>
+                  <a:srgbClr val="044F49"/>
+                </a:solidFill>
+                <a:latin typeface="Aptos"/>
+              </a:rPr>
+              <a:t> </a:t>
+            </a:r>
+            <a:r>
+              <a:rPr sz="1250" b="1" i="0" dirty="0" err="1">
+                <a:solidFill>
+                  <a:srgbClr val="044F49"/>
+                </a:solidFill>
+                <a:latin typeface="Aptos"/>
+              </a:rPr>
+              <a:t>выполнение</a:t>
+            </a:r>
+            <a:r>
+              <a:rPr sz="1250" b="1" i="0" dirty="0">
+                <a:solidFill>
+                  <a:srgbClr val="044F49"/>
+                </a:solidFill>
+                <a:latin typeface="Aptos"/>
+              </a:rPr>
+              <a:t> </a:t>
+            </a:r>
+            <a:r>
+              <a:rPr sz="1250" b="1" i="0" dirty="0" err="1">
+                <a:solidFill>
+                  <a:srgbClr val="044F49"/>
+                </a:solidFill>
+                <a:latin typeface="Aptos"/>
+              </a:rPr>
+              <a:t>намеренно</a:t>
+            </a:r>
+            <a:r>
+              <a:rPr sz="1250" b="1" i="0" dirty="0">
+                <a:solidFill>
+                  <a:srgbClr val="044F49"/>
+                </a:solidFill>
+                <a:latin typeface="Aptos"/>
+              </a:rPr>
+              <a:t> </a:t>
+            </a:r>
+            <a:r>
+              <a:rPr sz="1250" b="1" i="0" dirty="0" err="1">
+                <a:solidFill>
+                  <a:srgbClr val="044F49"/>
+                </a:solidFill>
+                <a:latin typeface="Aptos"/>
+              </a:rPr>
+              <a:t>запускается</a:t>
+            </a:r>
+            <a:r>
+              <a:rPr sz="1250" b="1" i="0" dirty="0">
+                <a:solidFill>
+                  <a:srgbClr val="044F49"/>
+                </a:solidFill>
+                <a:latin typeface="Aptos"/>
+              </a:rPr>
+              <a:t> </a:t>
             </a:r>
             <a:r>
               <a:rPr sz="1150" b="0" i="0" dirty="0" err="1">
@@ -21657,13 +24177,40 @@
               <a:t>только</a:t>
             </a:r>
             <a:r>
+              <a:rPr sz="1250" b="1" i="0" dirty="0">
+                <a:solidFill>
+                  <a:srgbClr val="044F49"/>
+                </a:solidFill>
+                <a:latin typeface="Aptos"/>
+              </a:rPr>
+              <a:t> </a:t>
+            </a:r>
+            <a:r>
               <a:rPr sz="1250" b="1" i="0" dirty="0" err="1">
                 <a:solidFill>
                   <a:srgbClr val="044F49"/>
                 </a:solidFill>
                 <a:latin typeface="Aptos"/>
               </a:rPr>
-              <a:t> после утверждения</a:t>
+              <a:t>после</a:t>
+            </a:r>
+            <a:r>
+              <a:rPr sz="1250" b="1" i="0" dirty="0">
+                <a:solidFill>
+                  <a:srgbClr val="044F49"/>
+                </a:solidFill>
+                <a:latin typeface="Aptos"/>
+              </a:rPr>
+              <a:t> </a:t>
+            </a:r>
+            <a:r>
+              <a:rPr sz="1250" b="1" i="0" dirty="0" err="1">
+                <a:solidFill>
+                  <a:srgbClr val="044F49"/>
+                </a:solidFill>
+                <a:latin typeface="Aptos"/>
+              </a:rPr>
+              <a:t>утверждения</a:t>
             </a:r>
             <a:r>
               <a:rPr sz="1250" b="1" i="0" dirty="0">
@@ -22566,7 +25113,7 @@
                 </a:solidFill>
                 <a:latin typeface="Aptos"/>
               </a:rPr>
-              <a:t>— </a:t>
+              <a:t>- </a:t>
             </a:r>
             <a:r>
               <a:rPr sz="750" b="0" i="0" dirty="0">
@@ -22799,13 +25346,22 @@
           <a:lstStyle/>
           <a:p>
             <a:r>
+              <a:rPr sz="2700" b="1" i="0" dirty="0" err="1">
+                <a:solidFill>
+                  <a:srgbClr val="044F49"/>
+                </a:solidFill>
+                <a:latin typeface="Aptos"/>
+              </a:rPr>
+              <a:t>Демонстрация</a:t>
+            </a:r>
+            <a:r>
               <a:rPr sz="2700" b="1" i="0" dirty="0">
                 <a:solidFill>
                   <a:srgbClr val="044F49"/>
                 </a:solidFill>
                 <a:latin typeface="Aptos"/>
               </a:rPr>
-              <a:t>Демонстрация </a:t>
+              <a:t> </a:t>
             </a:r>
             <a:r>
               <a:rPr lang="de-DE" sz="2700" b="1" i="0" dirty="0">
@@ -22814,7 +25370,7 @@
                 </a:solidFill>
                 <a:latin typeface="Aptos"/>
               </a:rPr>
-              <a:t>— </a:t>
+              <a:t>- </a:t>
             </a:r>
             <a:r>
               <a:rPr sz="2700" b="1" i="0" dirty="0">
@@ -23040,7 +25596,7 @@
                 </a:solidFill>
                 <a:latin typeface="Aptos"/>
               </a:rPr>
-              <a:t>На данный</a:t>
+              <a:t>На</a:t>
             </a:r>
             <a:r>
               <a:rPr sz="1200" i="0" dirty="0">
@@ -23049,6 +25605,24 @@
                 </a:solidFill>
                 <a:latin typeface="Aptos"/>
               </a:rPr>
+              <a:t> </a:t>
+            </a:r>
+            <a:r>
+              <a:rPr sz="1200" i="0" dirty="0" err="1">
+                <a:solidFill>
+                  <a:srgbClr val="33413D"/>
+                </a:solidFill>
+                <a:latin typeface="Aptos"/>
+              </a:rPr>
+              <a:t>данный</a:t>
+            </a:r>
+            <a:r>
+              <a:rPr sz="1200" i="0" dirty="0">
+                <a:solidFill>
+                  <a:srgbClr val="33413D"/>
+                </a:solidFill>
+                <a:latin typeface="Aptos"/>
+              </a:rPr>
               <a:t> момент </a:t>
             </a:r>
             <a:r>
@@ -23058,7 +25632,88 @@
                 </a:solidFill>
                 <a:latin typeface="Aptos"/>
               </a:rPr>
-              <a:t>создана полностью работоспособная демонстрационная среда </a:t>
+              <a:t>создана</a:t>
+            </a:r>
+            <a:r>
+              <a:rPr sz="1200" i="0" dirty="0">
+                <a:solidFill>
+                  <a:srgbClr val="33413D"/>
+                </a:solidFill>
+                <a:latin typeface="Aptos"/>
+              </a:rPr>
+              <a:t> </a:t>
+            </a:r>
+            <a:r>
+              <a:rPr sz="1200" i="0" dirty="0" err="1">
+                <a:solidFill>
+                  <a:srgbClr val="33413D"/>
+                </a:solidFill>
+                <a:latin typeface="Aptos"/>
+              </a:rPr>
+              <a:t>полностью</a:t>
+            </a:r>
+            <a:r>
+              <a:rPr sz="1200" i="0" dirty="0">
+                <a:solidFill>
+                  <a:srgbClr val="33413D"/>
+                </a:solidFill>
+                <a:latin typeface="Aptos"/>
+              </a:rPr>
+              <a:t> </a:t>
+            </a:r>
+            <a:r>
+              <a:rPr sz="1200" i="0" dirty="0" err="1">
+                <a:solidFill>
+                  <a:srgbClr val="33413D"/>
+                </a:solidFill>
+                <a:latin typeface="Aptos"/>
+              </a:rPr>
+              <a:t>работоспособная</a:t>
+            </a:r>
+            <a:r>
+              <a:rPr sz="1200" i="0" dirty="0">
+                <a:solidFill>
+                  <a:srgbClr val="33413D"/>
+                </a:solidFill>
+                <a:latin typeface="Aptos"/>
+              </a:rPr>
+              <a:t> </a:t>
+            </a:r>
+            <a:r>
+              <a:rPr sz="1200" i="0" dirty="0" err="1">
+                <a:solidFill>
+                  <a:srgbClr val="33413D"/>
+                </a:solidFill>
+                <a:latin typeface="Aptos"/>
+              </a:rPr>
+              <a:t>демонстрационная</a:t>
+            </a:r>
+            <a:r>
+              <a:rPr sz="1200" i="0" dirty="0">
+                <a:solidFill>
+                  <a:srgbClr val="33413D"/>
+                </a:solidFill>
+                <a:latin typeface="Aptos"/>
+              </a:rPr>
+              <a:t> </a:t>
+            </a:r>
+            <a:r>
+              <a:rPr sz="1200" i="0" dirty="0" err="1">
+                <a:solidFill>
+                  <a:srgbClr val="33413D"/>
+                </a:solidFill>
+                <a:latin typeface="Aptos"/>
+              </a:rPr>
+              <a:t>среда</a:t>
+            </a:r>
+            <a:r>
+              <a:rPr sz="1200" i="0" dirty="0">
+                <a:solidFill>
+                  <a:srgbClr val="33413D"/>
+                </a:solidFill>
+                <a:latin typeface="Aptos"/>
+              </a:rPr>
+              <a:t> </a:t>
             </a:r>
             <a:r>
               <a:rPr lang="de-DE" sz="1200" i="0" dirty="0">
@@ -23067,7 +25722,7 @@
                 </a:solidFill>
                 <a:latin typeface="Aptos"/>
               </a:rPr>
-              <a:t>— </a:t>
+              <a:t>- </a:t>
             </a:r>
             <a:r>
               <a:rPr sz="1200" i="0" dirty="0">
@@ -23247,7 +25902,7 @@
                 </a:solidFill>
                 <a:latin typeface="Aptos"/>
               </a:rPr>
-              <a:t>• </a:t>
+              <a:t>•  </a:t>
             </a:r>
             <a:r>
               <a:rPr sz="1100" b="0" i="0" dirty="0" err="1">
@@ -23256,7 +25911,7 @@
                 </a:solidFill>
                 <a:latin typeface="Aptos"/>
               </a:rPr>
-              <a:t> Полный</a:t>
+              <a:t>Полный</a:t>
             </a:r>
             <a:r>
               <a:rPr sz="1100" b="0" i="0" dirty="0">
@@ -23274,7 +25929,16 @@
                 </a:solidFill>
                 <a:latin typeface="Aptos"/>
               </a:rPr>
-              <a:t>функций </a:t>
+              <a:t>функций</a:t>
+            </a:r>
+            <a:r>
+              <a:rPr sz="1100" b="0" i="0" dirty="0">
+                <a:solidFill>
+                  <a:srgbClr val="33413D"/>
+                </a:solidFill>
+                <a:latin typeface="Aptos"/>
+              </a:rPr>
+              <a:t> </a:t>
             </a:r>
             <a:r>
               <a:rPr lang="de-DE" sz="1100" b="0" i="0" dirty="0">
@@ -23283,7 +25947,7 @@
                 </a:solidFill>
                 <a:latin typeface="Aptos"/>
               </a:rPr>
-              <a:t>— </a:t>
+              <a:t>- </a:t>
             </a:r>
             <a:r>
               <a:rPr sz="1100" b="0" i="0" dirty="0" err="1">
@@ -23405,7 +26069,7 @@
                 </a:solidFill>
                 <a:latin typeface="Aptos"/>
               </a:rPr>
-              <a:t>• </a:t>
+              <a:t>•  </a:t>
             </a:r>
             <a:r>
               <a:rPr sz="1100" b="0" i="0" dirty="0" err="1">
@@ -23414,7 +26078,7 @@
                 </a:solidFill>
                 <a:latin typeface="Aptos"/>
               </a:rPr>
-              <a:t> Общедоступный</a:t>
+              <a:t>Общедоступный</a:t>
             </a:r>
             <a:r>
               <a:rPr sz="1100" b="0" i="0" dirty="0">
@@ -23432,7 +26096,7 @@
                 </a:solidFill>
                 <a:latin typeface="Aptos"/>
               </a:rPr>
-              <a:t>раздел с регистрацией</a:t>
+              <a:t>раздел</a:t>
             </a:r>
             <a:r>
               <a:rPr sz="1100" b="0" i="0" dirty="0">
@@ -23441,6 +26105,24 @@
                 </a:solidFill>
                 <a:latin typeface="Aptos"/>
               </a:rPr>
+              <a:t> с </a:t>
+            </a:r>
+            <a:r>
+              <a:rPr sz="1100" b="0" i="0" dirty="0" err="1">
+                <a:solidFill>
+                  <a:srgbClr val="33413D"/>
+                </a:solidFill>
+                <a:latin typeface="Aptos"/>
+              </a:rPr>
+              <a:t>регистрацией</a:t>
+            </a:r>
+            <a:r>
+              <a:rPr sz="1100" b="0" i="0" dirty="0">
+                <a:solidFill>
+                  <a:srgbClr val="33413D"/>
+                </a:solidFill>
+                <a:latin typeface="Aptos"/>
+              </a:rPr>
               <a:t>, </a:t>
             </a:r>
             <a:r>
@@ -23450,7 +26132,7 @@
                 </a:solidFill>
                 <a:latin typeface="Aptos"/>
               </a:rPr>
-              <a:t>каналом обратной связи </a:t>
+              <a:t>каналом</a:t>
             </a:r>
             <a:r>
               <a:rPr sz="1100" b="0" i="0" dirty="0">
@@ -23459,7 +26141,61 @@
                 </a:solidFill>
                 <a:latin typeface="Aptos"/>
               </a:rPr>
-              <a:t>и QR-плакатом </a:t>
+              <a:t> </a:t>
+            </a:r>
+            <a:r>
+              <a:rPr sz="1100" b="0" i="0" dirty="0" err="1">
+                <a:solidFill>
+                  <a:srgbClr val="33413D"/>
+                </a:solidFill>
+                <a:latin typeface="Aptos"/>
+              </a:rPr>
+              <a:t>обратной</a:t>
+            </a:r>
+            <a:r>
+              <a:rPr sz="1100" b="0" i="0" dirty="0">
+                <a:solidFill>
+                  <a:srgbClr val="33413D"/>
+                </a:solidFill>
+                <a:latin typeface="Aptos"/>
+              </a:rPr>
+              <a:t> </a:t>
+            </a:r>
+            <a:r>
+              <a:rPr sz="1100" b="0" i="0" dirty="0" err="1">
+                <a:solidFill>
+                  <a:srgbClr val="33413D"/>
+                </a:solidFill>
+                <a:latin typeface="Aptos"/>
+              </a:rPr>
+              <a:t>связи</a:t>
+            </a:r>
+            <a:r>
+              <a:rPr sz="1100" b="0" i="0" dirty="0">
+                <a:solidFill>
+                  <a:srgbClr val="33413D"/>
+                </a:solidFill>
+                <a:latin typeface="Aptos"/>
+              </a:rPr>
+              <a:t> и QR-</a:t>
+            </a:r>
+            <a:r>
+              <a:rPr sz="1100" b="0" i="0" dirty="0" err="1">
+                <a:solidFill>
+                  <a:srgbClr val="33413D"/>
+                </a:solidFill>
+                <a:latin typeface="Aptos"/>
+              </a:rPr>
+              <a:t>плакатом</a:t>
+            </a:r>
+            <a:r>
+              <a:rPr sz="1100" b="0" i="0" dirty="0">
+                <a:solidFill>
+                  <a:srgbClr val="33413D"/>
+                </a:solidFill>
+                <a:latin typeface="Aptos"/>
+              </a:rPr>
+              <a:t> </a:t>
             </a:r>
             <a:r>
               <a:rPr lang="de-DE" sz="1100" b="0" i="0" dirty="0">
@@ -23468,7 +26204,7 @@
                 </a:solidFill>
                 <a:latin typeface="Aptos"/>
               </a:rPr>
-              <a:t>— </a:t>
+              <a:t>- </a:t>
             </a:r>
             <a:r>
               <a:rPr sz="1100" b="0" i="0" dirty="0" err="1">
@@ -23888,7 +26624,70 @@
                 </a:solidFill>
                 <a:latin typeface="Aptos"/>
               </a:rPr>
-              <a:t>не принимает самостоятельных решений </a:t>
+              <a:t>не</a:t>
+            </a:r>
+            <a:r>
+              <a:rPr sz="1100" b="0" i="0" dirty="0">
+                <a:solidFill>
+                  <a:srgbClr val="33413D"/>
+                </a:solidFill>
+                <a:latin typeface="Aptos"/>
+              </a:rPr>
+              <a:t> </a:t>
+            </a:r>
+            <a:r>
+              <a:rPr sz="1100" b="0" i="0" dirty="0" err="1">
+                <a:solidFill>
+                  <a:srgbClr val="33413D"/>
+                </a:solidFill>
+                <a:latin typeface="Aptos"/>
+              </a:rPr>
+              <a:t>принимает</a:t>
+            </a:r>
+            <a:r>
+              <a:rPr sz="1100" b="0" i="0" dirty="0">
+                <a:solidFill>
+                  <a:srgbClr val="33413D"/>
+                </a:solidFill>
+                <a:latin typeface="Aptos"/>
+              </a:rPr>
+              <a:t> </a:t>
+            </a:r>
+            <a:r>
+              <a:rPr sz="1100" b="0" i="0" dirty="0" err="1">
+                <a:solidFill>
+                  <a:srgbClr val="33413D"/>
+                </a:solidFill>
+                <a:latin typeface="Aptos"/>
+              </a:rPr>
+              <a:t>самостоятельных</a:t>
+            </a:r>
+            <a:r>
+              <a:rPr sz="1100" b="0" i="0" dirty="0">
+                <a:solidFill>
+                  <a:srgbClr val="33413D"/>
+                </a:solidFill>
+                <a:latin typeface="Aptos"/>
+              </a:rPr>
+              <a:t> </a:t>
+            </a:r>
+            <a:r>
+              <a:rPr sz="1100" b="0" i="0" dirty="0" err="1">
+                <a:solidFill>
+                  <a:srgbClr val="33413D"/>
+                </a:solidFill>
+                <a:latin typeface="Aptos"/>
+              </a:rPr>
+              <a:t>решений</a:t>
+            </a:r>
+            <a:r>
+              <a:rPr sz="1100" b="0" i="0" dirty="0">
+                <a:solidFill>
+                  <a:srgbClr val="33413D"/>
+                </a:solidFill>
+                <a:latin typeface="Aptos"/>
+              </a:rPr>
+              <a:t> </a:t>
             </a:r>
             <a:r>
               <a:rPr lang="de-DE" sz="1100" b="0" i="0" dirty="0">
@@ -23897,7 +26696,7 @@
                 </a:solidFill>
                 <a:latin typeface="Aptos"/>
               </a:rPr>
-              <a:t>— </a:t>
+              <a:t>- </a:t>
             </a:r>
             <a:r>
               <a:rPr sz="1100" b="0" i="0" dirty="0" err="1">
@@ -23976,7 +26775,7 @@
                 </a:solidFill>
                 <a:latin typeface="Aptos"/>
               </a:rPr>
-              <a:t>— </a:t>
+              <a:t>- </a:t>
             </a:r>
             <a:r>
               <a:rPr sz="750" b="0" i="0" dirty="0">
@@ -24524,7 +27323,7 @@
                 </a:solidFill>
                 <a:latin typeface="Aptos"/>
               </a:rPr>
-              <a:t>впечат</a:t>
+              <a:t>впечатление</a:t>
             </a:r>
             <a:r>
               <a:rPr sz="1250" b="1" i="0" dirty="0">
@@ -24533,7 +27332,7 @@
                 </a:solidFill>
                 <a:latin typeface="Aptos"/>
               </a:rPr>
-              <a:t>ление </a:t>
+              <a:t> </a:t>
             </a:r>
             <a:r>
               <a:rPr sz="1250" b="1" i="0" dirty="0" err="1">
@@ -24542,7 +27341,7 @@
                 </a:solidFill>
                 <a:latin typeface="Aptos"/>
               </a:rPr>
-              <a:t>везде одинаково </a:t>
+              <a:t>везде</a:t>
             </a:r>
             <a:r>
               <a:rPr sz="1250" b="1" i="0" dirty="0">
@@ -24551,7 +27350,43 @@
                 </a:solidFill>
                 <a:latin typeface="Aptos"/>
               </a:rPr>
-              <a:t>сильное </a:t>
+              <a:t> </a:t>
+            </a:r>
+            <a:r>
+              <a:rPr sz="1250" b="1" i="0" dirty="0" err="1">
+                <a:solidFill>
+                  <a:srgbClr val="044F49"/>
+                </a:solidFill>
+                <a:latin typeface="Aptos"/>
+              </a:rPr>
+              <a:t>одинаково</a:t>
+            </a:r>
+            <a:r>
+              <a:rPr sz="1250" b="1" i="0" dirty="0">
+                <a:solidFill>
+                  <a:srgbClr val="044F49"/>
+                </a:solidFill>
+                <a:latin typeface="Aptos"/>
+              </a:rPr>
+              <a:t> </a:t>
+            </a:r>
+            <a:r>
+              <a:rPr sz="1250" b="1" i="0" dirty="0" err="1">
+                <a:solidFill>
+                  <a:srgbClr val="044F49"/>
+                </a:solidFill>
+                <a:latin typeface="Aptos"/>
+              </a:rPr>
+              <a:t>сильное</a:t>
+            </a:r>
+            <a:r>
+              <a:rPr sz="1250" b="1" i="0" dirty="0">
+                <a:solidFill>
+                  <a:srgbClr val="044F49"/>
+                </a:solidFill>
+                <a:latin typeface="Aptos"/>
+              </a:rPr>
+              <a:t> </a:t>
             </a:r>
             <a:r>
               <a:rPr lang="de-DE" sz="1250" b="1" i="0" dirty="0">
@@ -24560,7 +27395,7 @@
                 </a:solidFill>
                 <a:latin typeface="Aptos"/>
               </a:rPr>
-              <a:t>— </a:t>
+              <a:t>- </a:t>
             </a:r>
             <a:r>
               <a:rPr sz="1250" b="1" i="0" dirty="0" err="1">
@@ -24668,7 +27503,7 @@
                 </a:solidFill>
                 <a:latin typeface="Aptos"/>
               </a:rPr>
-              <a:t>Именно поэтому индикатор статуса </a:t>
+              <a:t>Именно</a:t>
             </a:r>
             <a:r>
               <a:rPr sz="1150" b="0" i="0" dirty="0">
@@ -24677,7 +27512,7 @@
                 </a:solidFill>
                 <a:latin typeface="Aptos"/>
               </a:rPr>
-              <a:t>в </a:t>
+              <a:t> </a:t>
             </a:r>
             <a:r>
               <a:rPr sz="1150" b="0" i="0" dirty="0" err="1">
@@ -24686,6 +27521,60 @@
                 </a:solidFill>
                 <a:latin typeface="Aptos"/>
               </a:rPr>
+              <a:t>поэтому</a:t>
+            </a:r>
+            <a:r>
+              <a:rPr sz="1150" b="0" i="0" dirty="0">
+                <a:solidFill>
+                  <a:srgbClr val="33413D"/>
+                </a:solidFill>
+                <a:latin typeface="Aptos"/>
+              </a:rPr>
+              <a:t> </a:t>
+            </a:r>
+            <a:r>
+              <a:rPr sz="1150" b="0" i="0" dirty="0" err="1">
+                <a:solidFill>
+                  <a:srgbClr val="33413D"/>
+                </a:solidFill>
+                <a:latin typeface="Aptos"/>
+              </a:rPr>
+              <a:t>индикатор</a:t>
+            </a:r>
+            <a:r>
+              <a:rPr sz="1150" b="0" i="0" dirty="0">
+                <a:solidFill>
+                  <a:srgbClr val="33413D"/>
+                </a:solidFill>
+                <a:latin typeface="Aptos"/>
+              </a:rPr>
+              <a:t> </a:t>
+            </a:r>
+            <a:r>
+              <a:rPr sz="1150" b="0" i="0" dirty="0" err="1">
+                <a:solidFill>
+                  <a:srgbClr val="33413D"/>
+                </a:solidFill>
+                <a:latin typeface="Aptos"/>
+              </a:rPr>
+              <a:t>статуса</a:t>
+            </a:r>
+            <a:r>
+              <a:rPr sz="1150" b="0" i="0" dirty="0">
+                <a:solidFill>
+                  <a:srgbClr val="33413D"/>
+                </a:solidFill>
+                <a:latin typeface="Aptos"/>
+              </a:rPr>
+              <a:t> в </a:t>
+            </a:r>
+            <a:r>
+              <a:rPr sz="1150" b="0" i="0" dirty="0" err="1">
+                <a:solidFill>
+                  <a:srgbClr val="33413D"/>
+                </a:solidFill>
+                <a:latin typeface="Aptos"/>
+              </a:rPr>
               <a:t>главах</a:t>
             </a:r>
             <a:r>
@@ -24704,7 +27593,16 @@
                 </a:solidFill>
                 <a:latin typeface="Aptos"/>
               </a:rPr>
-              <a:t>важен </a:t>
+              <a:t>важен</a:t>
+            </a:r>
+            <a:r>
+              <a:rPr sz="1150" b="0" i="0" dirty="0">
+                <a:solidFill>
+                  <a:srgbClr val="33413D"/>
+                </a:solidFill>
+                <a:latin typeface="Aptos"/>
+              </a:rPr>
+              <a:t> </a:t>
             </a:r>
             <a:r>
               <a:rPr lang="de-DE" sz="1150" b="0" i="0" dirty="0">
@@ -24713,7 +27611,7 @@
                 </a:solidFill>
                 <a:latin typeface="Aptos"/>
               </a:rPr>
-              <a:t>— </a:t>
+              <a:t>- </a:t>
             </a:r>
             <a:r>
               <a:rPr sz="1150" b="0" i="0" dirty="0">
@@ -24855,7 +27753,7 @@
                 </a:solidFill>
                 <a:latin typeface="Aptos"/>
               </a:rPr>
-              <a:t>— </a:t>
+              <a:t>- </a:t>
             </a:r>
             <a:r>
               <a:rPr sz="750" b="0" i="0" dirty="0">
@@ -25365,7 +28263,7 @@
         <p:spPr>
           <a:xfrm>
             <a:off x="914400" y="1691640"/>
-            <a:ext cx="10332720" cy="589905"/>
+            <a:ext cx="10332720" cy="759182"/>
           </a:xfrm>
           <a:prstGeom prst="rect">
             <a:avLst/>
@@ -25394,7 +28292,7 @@
                 </a:solidFill>
                 <a:latin typeface="Aptos"/>
               </a:rPr>
-              <a:t>— </a:t>
+              <a:t>- </a:t>
             </a:r>
             <a:r>
               <a:rPr sz="1300" b="1" i="0" dirty="0">
@@ -25563,7 +28461,34 @@
                 </a:solidFill>
                 <a:latin typeface="Aptos"/>
               </a:rPr>
-              <a:t>основа готова </a:t>
+              <a:t>основа</a:t>
+            </a:r>
+            <a:r>
+              <a:rPr sz="1100" b="0" i="0" dirty="0">
+                <a:solidFill>
+                  <a:srgbClr val="33413D"/>
+                </a:solidFill>
+                <a:latin typeface="Aptos"/>
+              </a:rPr>
+              <a:t> </a:t>
+            </a:r>
+            <a:r>
+              <a:rPr sz="1100" b="0" i="0" dirty="0" err="1">
+                <a:solidFill>
+                  <a:srgbClr val="33413D"/>
+                </a:solidFill>
+                <a:latin typeface="Aptos"/>
+              </a:rPr>
+              <a:t>готова</a:t>
+            </a:r>
+            <a:r>
+              <a:rPr sz="1100" b="0" i="0" dirty="0">
+                <a:solidFill>
+                  <a:srgbClr val="33413D"/>
+                </a:solidFill>
+                <a:latin typeface="Aptos"/>
+              </a:rPr>
+              <a:t> </a:t>
             </a:r>
             <a:r>
               <a:rPr lang="de-DE" sz="1100" b="0" i="0" dirty="0">
@@ -25572,7 +28497,7 @@
                 </a:solidFill>
                 <a:latin typeface="Aptos"/>
               </a:rPr>
-              <a:t>— </a:t>
+              <a:t>- </a:t>
             </a:r>
             <a:r>
               <a:rPr sz="1100" b="0" i="0" dirty="0">
@@ -25808,7 +28733,7 @@
                 </a:solidFill>
                 <a:latin typeface="Aptos"/>
               </a:rPr>
-              <a:t>— </a:t>
+              <a:t>- </a:t>
             </a:r>
             <a:r>
               <a:rPr sz="1300" b="1" i="0" dirty="0" err="1">
@@ -25857,7 +28782,7 @@
                 </a:solidFill>
                 <a:latin typeface="Aptos"/>
               </a:rPr>
-              <a:t>• </a:t>
+              <a:t>•  </a:t>
             </a:r>
             <a:r>
               <a:rPr sz="1100" b="0" i="0" dirty="0" err="1">
@@ -25866,7 +28791,52 @@
                 </a:solidFill>
                 <a:latin typeface="Aptos"/>
               </a:rPr>
-              <a:t> Создание резервирования/бронирования </a:t>
+              <a:t>Создание</a:t>
+            </a:r>
+            <a:r>
+              <a:rPr sz="1100" b="0" i="0" dirty="0">
+                <a:solidFill>
+                  <a:srgbClr val="33413D"/>
+                </a:solidFill>
+                <a:latin typeface="Aptos"/>
+              </a:rPr>
+              <a:t> </a:t>
+            </a:r>
+            <a:r>
+              <a:rPr sz="1100" b="0" i="0" dirty="0" err="1">
+                <a:solidFill>
+                  <a:srgbClr val="33413D"/>
+                </a:solidFill>
+                <a:latin typeface="Aptos"/>
+              </a:rPr>
+              <a:t>резервирования</a:t>
+            </a:r>
+            <a:r>
+              <a:rPr sz="1100" b="0" i="0" dirty="0">
+                <a:solidFill>
+                  <a:srgbClr val="33413D"/>
+                </a:solidFill>
+                <a:latin typeface="Aptos"/>
+              </a:rPr>
+              <a:t>/</a:t>
+            </a:r>
+            <a:r>
+              <a:rPr sz="1100" b="0" i="0" dirty="0" err="1">
+                <a:solidFill>
+                  <a:srgbClr val="33413D"/>
+                </a:solidFill>
+                <a:latin typeface="Aptos"/>
+              </a:rPr>
+              <a:t>бронирования</a:t>
+            </a:r>
+            <a:r>
+              <a:rPr sz="1100" b="0" i="0" dirty="0">
+                <a:solidFill>
+                  <a:srgbClr val="33413D"/>
+                </a:solidFill>
+                <a:latin typeface="Aptos"/>
+              </a:rPr>
+              <a:t> </a:t>
             </a:r>
             <a:r>
               <a:rPr lang="de-DE" sz="1100" b="0" i="0" dirty="0">
@@ -25875,7 +28845,7 @@
                 </a:solidFill>
                 <a:latin typeface="Aptos"/>
               </a:rPr>
-              <a:t>— </a:t>
+              <a:t>- </a:t>
             </a:r>
             <a:r>
               <a:rPr sz="1100" b="0" i="0" dirty="0" err="1">
@@ -25963,7 +28933,7 @@
                 </a:solidFill>
                 <a:latin typeface="Aptos"/>
               </a:rPr>
-              <a:t>• </a:t>
+              <a:t>•  </a:t>
             </a:r>
             <a:r>
               <a:rPr sz="1100" b="0" i="0" dirty="0" err="1">
@@ -25972,7 +28942,52 @@
                 </a:solidFill>
                 <a:latin typeface="Aptos"/>
               </a:rPr>
-              <a:t> Ввод финансовой проводки </a:t>
+              <a:t>Ввод</a:t>
+            </a:r>
+            <a:r>
+              <a:rPr sz="1100" b="0" i="0" dirty="0">
+                <a:solidFill>
+                  <a:srgbClr val="33413D"/>
+                </a:solidFill>
+                <a:latin typeface="Aptos"/>
+              </a:rPr>
+              <a:t> </a:t>
+            </a:r>
+            <a:r>
+              <a:rPr sz="1100" b="0" i="0" dirty="0" err="1">
+                <a:solidFill>
+                  <a:srgbClr val="33413D"/>
+                </a:solidFill>
+                <a:latin typeface="Aptos"/>
+              </a:rPr>
+              <a:t>финансовой</a:t>
+            </a:r>
+            <a:r>
+              <a:rPr sz="1100" b="0" i="0" dirty="0">
+                <a:solidFill>
+                  <a:srgbClr val="33413D"/>
+                </a:solidFill>
+                <a:latin typeface="Aptos"/>
+              </a:rPr>
+              <a:t> </a:t>
+            </a:r>
+            <a:r>
+              <a:rPr sz="1100" b="0" i="0" dirty="0" err="1">
+                <a:solidFill>
+                  <a:srgbClr val="33413D"/>
+                </a:solidFill>
+                <a:latin typeface="Aptos"/>
+              </a:rPr>
+              <a:t>проводки</a:t>
+            </a:r>
+            <a:r>
+              <a:rPr sz="1100" b="0" i="0" dirty="0">
+                <a:solidFill>
+                  <a:srgbClr val="33413D"/>
+                </a:solidFill>
+                <a:latin typeface="Aptos"/>
+              </a:rPr>
+              <a:t> </a:t>
             </a:r>
             <a:r>
               <a:rPr lang="de-DE" sz="1100" b="0" i="0" dirty="0">
@@ -25981,7 +28996,7 @@
                 </a:solidFill>
                 <a:latin typeface="Aptos"/>
               </a:rPr>
-              <a:t>— </a:t>
+              <a:t>- </a:t>
             </a:r>
             <a:r>
               <a:rPr sz="1100" b="0" i="0" dirty="0" err="1">
@@ -26254,7 +29269,7 @@
                 </a:solidFill>
                 <a:latin typeface="Aptos"/>
               </a:rPr>
-              <a:t>— </a:t>
+              <a:t>- </a:t>
             </a:r>
             <a:r>
               <a:rPr sz="750" b="0" i="0" dirty="0">
@@ -26502,7 +29517,7 @@
                 </a:solidFill>
                 <a:latin typeface="Aptos"/>
               </a:rPr>
-              <a:t>— </a:t>
+              <a:t>- </a:t>
             </a:r>
             <a:r>
               <a:rPr sz="2700" b="1" i="0" dirty="0" err="1">
@@ -27363,7 +30378,7 @@
                 </a:solidFill>
                 <a:latin typeface="Aptos"/>
               </a:rPr>
-              <a:t>— </a:t>
+              <a:t>- </a:t>
             </a:r>
             <a:r>
               <a:rPr sz="750" b="0" i="0" dirty="0">
@@ -27611,7 +30626,7 @@
                 </a:solidFill>
                 <a:latin typeface="Aptos"/>
               </a:rPr>
-              <a:t>— </a:t>
+              <a:t>- </a:t>
             </a:r>
             <a:r>
               <a:rPr sz="2700" b="1" i="0" dirty="0" err="1">
@@ -27806,7 +30821,7 @@
         <p:spPr>
           <a:xfrm>
             <a:off x="640080" y="1481328"/>
-            <a:ext cx="10881360" cy="176972"/>
+            <a:ext cx="10881360" cy="353943"/>
           </a:xfrm>
           <a:prstGeom prst="rect">
             <a:avLst/>
@@ -27831,7 +30846,7 @@
                 </a:solidFill>
                 <a:latin typeface="Aptos"/>
               </a:rPr>
-              <a:t>Проект нового строительства, включающий</a:t>
+              <a:t>Проект</a:t>
             </a:r>
             <a:r>
               <a:rPr sz="1150" i="0" dirty="0">
@@ -27840,6 +30855,60 @@
                 </a:solidFill>
                 <a:latin typeface="Aptos"/>
               </a:rPr>
+              <a:t> </a:t>
+            </a:r>
+            <a:r>
+              <a:rPr sz="1150" i="0" dirty="0" err="1">
+                <a:solidFill>
+                  <a:srgbClr val="33413D"/>
+                </a:solidFill>
+                <a:latin typeface="Aptos"/>
+              </a:rPr>
+              <a:t>нового</a:t>
+            </a:r>
+            <a:r>
+              <a:rPr sz="1150" i="0" dirty="0">
+                <a:solidFill>
+                  <a:srgbClr val="33413D"/>
+                </a:solidFill>
+                <a:latin typeface="Aptos"/>
+              </a:rPr>
+              <a:t> </a:t>
+            </a:r>
+            <a:r>
+              <a:rPr sz="1150" i="0" dirty="0" err="1">
+                <a:solidFill>
+                  <a:srgbClr val="33413D"/>
+                </a:solidFill>
+                <a:latin typeface="Aptos"/>
+              </a:rPr>
+              <a:t>строительства</a:t>
+            </a:r>
+            <a:r>
+              <a:rPr sz="1150" i="0" dirty="0">
+                <a:solidFill>
+                  <a:srgbClr val="33413D"/>
+                </a:solidFill>
+                <a:latin typeface="Aptos"/>
+              </a:rPr>
+              <a:t>, </a:t>
+            </a:r>
+            <a:r>
+              <a:rPr sz="1150" i="0" dirty="0" err="1">
+                <a:solidFill>
+                  <a:srgbClr val="33413D"/>
+                </a:solidFill>
+                <a:latin typeface="Aptos"/>
+              </a:rPr>
+              <a:t>включающий</a:t>
+            </a:r>
+            <a:r>
+              <a:rPr sz="1150" i="0" dirty="0">
+                <a:solidFill>
+                  <a:srgbClr val="33413D"/>
+                </a:solidFill>
+                <a:latin typeface="Aptos"/>
+              </a:rPr>
               <a:t> 769 </a:t>
             </a:r>
             <a:r>
@@ -27849,7 +30918,7 @@
                 </a:solidFill>
                 <a:latin typeface="Aptos"/>
               </a:rPr>
-              <a:t>жилых единиц, </a:t>
+              <a:t>жилых</a:t>
             </a:r>
             <a:r>
               <a:rPr sz="1150" i="0" dirty="0">
@@ -27858,7 +30927,7 @@
                 </a:solidFill>
                 <a:latin typeface="Aptos"/>
               </a:rPr>
-              <a:t>расположенный на </a:t>
+              <a:t> </a:t>
             </a:r>
             <a:r>
               <a:rPr sz="1150" i="0" dirty="0" err="1">
@@ -27867,7 +30936,106 @@
                 </a:solidFill>
                 <a:latin typeface="Aptos"/>
               </a:rPr>
-              <a:t>лесистом склоне с видом на море </a:t>
+              <a:t>единиц</a:t>
+            </a:r>
+            <a:r>
+              <a:rPr sz="1150" i="0" dirty="0">
+                <a:solidFill>
+                  <a:srgbClr val="33413D"/>
+                </a:solidFill>
+                <a:latin typeface="Aptos"/>
+              </a:rPr>
+              <a:t>, расположенный на </a:t>
+            </a:r>
+            <a:r>
+              <a:rPr sz="1150" i="0" dirty="0" err="1">
+                <a:solidFill>
+                  <a:srgbClr val="33413D"/>
+                </a:solidFill>
+                <a:latin typeface="Aptos"/>
+              </a:rPr>
+              <a:t>лесистом</a:t>
+            </a:r>
+            <a:r>
+              <a:rPr sz="1150" i="0" dirty="0">
+                <a:solidFill>
+                  <a:srgbClr val="33413D"/>
+                </a:solidFill>
+                <a:latin typeface="Aptos"/>
+              </a:rPr>
+              <a:t> </a:t>
+            </a:r>
+            <a:r>
+              <a:rPr sz="1150" i="0" dirty="0" err="1">
+                <a:solidFill>
+                  <a:srgbClr val="33413D"/>
+                </a:solidFill>
+                <a:latin typeface="Aptos"/>
+              </a:rPr>
+              <a:t>склоне</a:t>
+            </a:r>
+            <a:r>
+              <a:rPr sz="1150" i="0" dirty="0">
+                <a:solidFill>
+                  <a:srgbClr val="33413D"/>
+                </a:solidFill>
+                <a:latin typeface="Aptos"/>
+              </a:rPr>
+              <a:t> с </a:t>
+            </a:r>
+            <a:r>
+              <a:rPr sz="1150" i="0" dirty="0" err="1">
+                <a:solidFill>
+                  <a:srgbClr val="33413D"/>
+                </a:solidFill>
+                <a:latin typeface="Aptos"/>
+              </a:rPr>
+              <a:t>видом</a:t>
+            </a:r>
+            <a:r>
+              <a:rPr sz="1150" i="0" dirty="0">
+                <a:solidFill>
+                  <a:srgbClr val="33413D"/>
+                </a:solidFill>
+                <a:latin typeface="Aptos"/>
+              </a:rPr>
+              <a:t> </a:t>
+            </a:r>
+            <a:r>
+              <a:rPr sz="1150" i="0" dirty="0" err="1">
+                <a:solidFill>
+                  <a:srgbClr val="33413D"/>
+                </a:solidFill>
+                <a:latin typeface="Aptos"/>
+              </a:rPr>
+              <a:t>на</a:t>
+            </a:r>
+            <a:r>
+              <a:rPr sz="1150" i="0" dirty="0">
+                <a:solidFill>
+                  <a:srgbClr val="33413D"/>
+                </a:solidFill>
+                <a:latin typeface="Aptos"/>
+              </a:rPr>
+              <a:t> </a:t>
+            </a:r>
+            <a:r>
+              <a:rPr sz="1150" i="0" dirty="0" err="1">
+                <a:solidFill>
+                  <a:srgbClr val="33413D"/>
+                </a:solidFill>
+                <a:latin typeface="Aptos"/>
+              </a:rPr>
+              <a:t>море</a:t>
+            </a:r>
+            <a:r>
+              <a:rPr sz="1150" i="0" dirty="0">
+                <a:solidFill>
+                  <a:srgbClr val="33413D"/>
+                </a:solidFill>
+                <a:latin typeface="Aptos"/>
+              </a:rPr>
+              <a:t> </a:t>
             </a:r>
             <a:r>
               <a:rPr lang="de-DE" sz="1150" i="0" dirty="0">
@@ -27876,7 +31044,7 @@
                 </a:solidFill>
                 <a:latin typeface="Aptos"/>
               </a:rPr>
-              <a:t>— </a:t>
+              <a:t>- </a:t>
             </a:r>
             <a:r>
               <a:rPr sz="1150" i="0" dirty="0">
@@ -27993,7 +31161,7 @@
         <p:spPr>
           <a:xfrm>
             <a:off x="640080" y="5120640"/>
-            <a:ext cx="5321808" cy="146194"/>
+            <a:ext cx="5321808" cy="292388"/>
           </a:xfrm>
           <a:prstGeom prst="rect">
             <a:avLst/>
@@ -28013,7 +31181,7 @@
                 </a:solidFill>
                 <a:latin typeface="Aptos"/>
               </a:rPr>
-              <a:t>Комплекс </a:t>
+              <a:t>Комплекс с высоты </a:t>
             </a:r>
             <a:r>
               <a:rPr sz="950" b="0" i="1" dirty="0" err="1">
@@ -28022,7 +31190,7 @@
                 </a:solidFill>
                 <a:latin typeface="Aptos"/>
               </a:rPr>
-              <a:t>с </a:t>
+              <a:t>птичьего</a:t>
             </a:r>
             <a:r>
               <a:rPr sz="950" b="0" i="1" dirty="0">
@@ -28031,7 +31199,7 @@
                 </a:solidFill>
                 <a:latin typeface="Aptos"/>
               </a:rPr>
-              <a:t>высоты </a:t>
+              <a:t> </a:t>
             </a:r>
             <a:r>
               <a:rPr sz="950" b="0" i="1" dirty="0" err="1">
@@ -28040,7 +31208,16 @@
                 </a:solidFill>
                 <a:latin typeface="Aptos"/>
               </a:rPr>
-              <a:t>птичьего полёта </a:t>
+              <a:t>полёта</a:t>
+            </a:r>
+            <a:r>
+              <a:rPr sz="950" b="0" i="1" dirty="0">
+                <a:solidFill>
+                  <a:srgbClr val="64716D"/>
+                </a:solidFill>
+                <a:latin typeface="Aptos"/>
+              </a:rPr>
+              <a:t> </a:t>
             </a:r>
             <a:r>
               <a:rPr lang="de-DE" sz="950" b="0" i="1" dirty="0">
@@ -28049,7 +31226,7 @@
                 </a:solidFill>
                 <a:latin typeface="Aptos"/>
               </a:rPr>
-              <a:t>— </a:t>
+              <a:t>- </a:t>
             </a:r>
             <a:r>
               <a:rPr sz="950" b="0" i="1" dirty="0" err="1">
@@ -28119,7 +31296,88 @@
                 </a:solidFill>
                 <a:latin typeface="Aptos"/>
               </a:rPr>
-              <a:t>Вид сбоку с видом на море </a:t>
+              <a:t>Вид</a:t>
+            </a:r>
+            <a:r>
+              <a:rPr sz="950" b="0" i="1" dirty="0">
+                <a:solidFill>
+                  <a:srgbClr val="64716D"/>
+                </a:solidFill>
+                <a:latin typeface="Aptos"/>
+              </a:rPr>
+              <a:t> </a:t>
+            </a:r>
+            <a:r>
+              <a:rPr sz="950" b="0" i="1" dirty="0" err="1">
+                <a:solidFill>
+                  <a:srgbClr val="64716D"/>
+                </a:solidFill>
+                <a:latin typeface="Aptos"/>
+              </a:rPr>
+              <a:t>сбоку</a:t>
+            </a:r>
+            <a:r>
+              <a:rPr sz="950" b="0" i="1" dirty="0">
+                <a:solidFill>
+                  <a:srgbClr val="64716D"/>
+                </a:solidFill>
+                <a:latin typeface="Aptos"/>
+              </a:rPr>
+              <a:t> с </a:t>
+            </a:r>
+            <a:r>
+              <a:rPr sz="950" b="0" i="1" dirty="0" err="1">
+                <a:solidFill>
+                  <a:srgbClr val="64716D"/>
+                </a:solidFill>
+                <a:latin typeface="Aptos"/>
+              </a:rPr>
+              <a:t>видом</a:t>
+            </a:r>
+            <a:r>
+              <a:rPr sz="950" b="0" i="1" dirty="0">
+                <a:solidFill>
+                  <a:srgbClr val="64716D"/>
+                </a:solidFill>
+                <a:latin typeface="Aptos"/>
+              </a:rPr>
+              <a:t> </a:t>
+            </a:r>
+            <a:r>
+              <a:rPr sz="950" b="0" i="1" dirty="0" err="1">
+                <a:solidFill>
+                  <a:srgbClr val="64716D"/>
+                </a:solidFill>
+                <a:latin typeface="Aptos"/>
+              </a:rPr>
+              <a:t>на</a:t>
+            </a:r>
+            <a:r>
+              <a:rPr sz="950" b="0" i="1" dirty="0">
+                <a:solidFill>
+                  <a:srgbClr val="64716D"/>
+                </a:solidFill>
+                <a:latin typeface="Aptos"/>
+              </a:rPr>
+              <a:t> </a:t>
+            </a:r>
+            <a:r>
+              <a:rPr sz="950" b="0" i="1" dirty="0" err="1">
+                <a:solidFill>
+                  <a:srgbClr val="64716D"/>
+                </a:solidFill>
+                <a:latin typeface="Aptos"/>
+              </a:rPr>
+              <a:t>море</a:t>
+            </a:r>
+            <a:r>
+              <a:rPr sz="950" b="0" i="1" dirty="0">
+                <a:solidFill>
+                  <a:srgbClr val="64716D"/>
+                </a:solidFill>
+                <a:latin typeface="Aptos"/>
+              </a:rPr>
+              <a:t> </a:t>
             </a:r>
             <a:r>
               <a:rPr lang="de-DE" sz="950" b="0" i="1" dirty="0">
@@ -28128,7 +31386,7 @@
                 </a:solidFill>
                 <a:latin typeface="Aptos"/>
               </a:rPr>
-              <a:t>— </a:t>
+              <a:t>- </a:t>
             </a:r>
             <a:r>
               <a:rPr sz="950" b="0" i="1" dirty="0">
@@ -28353,7 +31611,7 @@
                 </a:solidFill>
                 <a:latin typeface="Aptos"/>
               </a:rPr>
-              <a:t>— </a:t>
+              <a:t>- </a:t>
             </a:r>
             <a:r>
               <a:rPr sz="750" b="0" i="0" dirty="0">
@@ -28976,7 +32234,7 @@
                           </a:solidFill>
                           <a:latin typeface="Aptos"/>
                         </a:rPr>
-                        <a:t>— </a:t>
+                        <a:t>- </a:t>
                       </a:r>
                       <a:r>
                         <a:rPr sz="1000" b="1" i="0" dirty="0" err="1">
@@ -29464,7 +32722,7 @@
                 </a:solidFill>
                 <a:latin typeface="Aptos"/>
               </a:rPr>
-              <a:t>— </a:t>
+              <a:t>- </a:t>
             </a:r>
             <a:r>
               <a:rPr sz="750" b="0" i="0" dirty="0">
@@ -29973,8 +33231,8 @@
         </p:nvSpPr>
         <p:spPr>
           <a:xfrm>
-            <a:off x="896112" y="2793042"/>
-            <a:ext cx="10469880" cy="723275"/>
+            <a:off x="896112" y="2704557"/>
+            <a:ext cx="10469880" cy="900246"/>
           </a:xfrm>
           <a:prstGeom prst="rect">
             <a:avLst/>
@@ -29988,13 +33246,49 @@
           <a:lstStyle/>
           <a:p>
             <a:r>
+              <a:rPr sz="1250" b="1" i="0" dirty="0">
+                <a:solidFill>
+                  <a:srgbClr val="044F49"/>
+                </a:solidFill>
+                <a:latin typeface="Aptos"/>
+              </a:rPr>
+              <a:t>Работоспособная </a:t>
+            </a:r>
+            <a:r>
               <a:rPr sz="1250" b="1" i="0" dirty="0" err="1">
                 <a:solidFill>
                   <a:srgbClr val="044F49"/>
                 </a:solidFill>
                 <a:latin typeface="Aptos"/>
               </a:rPr>
-              <a:t>Работоспособная общая система </a:t>
+              <a:t>общая</a:t>
+            </a:r>
+            <a:r>
+              <a:rPr sz="1250" b="1" i="0" dirty="0">
+                <a:solidFill>
+                  <a:srgbClr val="044F49"/>
+                </a:solidFill>
+                <a:latin typeface="Aptos"/>
+              </a:rPr>
+              <a:t> </a:t>
+            </a:r>
+            <a:r>
+              <a:rPr sz="1250" b="1" i="0" dirty="0" err="1">
+                <a:solidFill>
+                  <a:srgbClr val="044F49"/>
+                </a:solidFill>
+                <a:latin typeface="Aptos"/>
+              </a:rPr>
+              <a:t>система</a:t>
+            </a:r>
+            <a:r>
+              <a:rPr sz="1250" b="1" i="0" dirty="0">
+                <a:solidFill>
+                  <a:srgbClr val="044F49"/>
+                </a:solidFill>
+                <a:latin typeface="Aptos"/>
+              </a:rPr>
+              <a:t> </a:t>
             </a:r>
             <a:r>
               <a:rPr lang="de-DE" sz="1250" b="1" i="0" dirty="0">
@@ -30003,7 +33297,7 @@
                 </a:solidFill>
                 <a:latin typeface="Aptos"/>
               </a:rPr>
-              <a:t>— </a:t>
+              <a:t>- </a:t>
             </a:r>
             <a:r>
               <a:rPr sz="1250" b="1" i="0" dirty="0" err="1">
@@ -30334,7 +33628,7 @@
                 </a:solidFill>
                 <a:latin typeface="Aptos"/>
               </a:rPr>
-              <a:t>— </a:t>
+              <a:t>- </a:t>
             </a:r>
             <a:r>
               <a:rPr sz="750" b="0" i="0" dirty="0">
@@ -30997,7 +34291,7 @@
         <p:spPr>
           <a:xfrm>
             <a:off x="868680" y="3575304"/>
-            <a:ext cx="4869180" cy="574516"/>
+            <a:ext cx="4869180" cy="736099"/>
           </a:xfrm>
           <a:prstGeom prst="rect">
             <a:avLst/>
@@ -31069,7 +34363,7 @@
                 </a:solidFill>
                 <a:latin typeface="Aptos"/>
               </a:rPr>
-              <a:t>повышает относительную</a:t>
+              <a:t>повышает</a:t>
             </a:r>
             <a:r>
               <a:rPr sz="1050" b="0" i="0" dirty="0">
@@ -31078,6 +34372,24 @@
                 </a:solidFill>
                 <a:latin typeface="Aptos"/>
               </a:rPr>
+              <a:t> </a:t>
+            </a:r>
+            <a:r>
+              <a:rPr sz="1050" b="0" i="0" dirty="0" err="1">
+                <a:solidFill>
+                  <a:srgbClr val="64716D"/>
+                </a:solidFill>
+                <a:latin typeface="Aptos"/>
+              </a:rPr>
+              <a:t>относительную</a:t>
+            </a:r>
+            <a:r>
+              <a:rPr sz="1050" b="0" i="0" dirty="0">
+                <a:solidFill>
+                  <a:srgbClr val="64716D"/>
+                </a:solidFill>
+                <a:latin typeface="Aptos"/>
+              </a:rPr>
               <a:t> ценность </a:t>
             </a:r>
             <a:r>
@@ -31087,7 +34399,88 @@
                 </a:solidFill>
                 <a:latin typeface="Aptos"/>
               </a:rPr>
-              <a:t>операционного совершенства в отношениях с существующими клиентами </a:t>
+              <a:t>операционного</a:t>
+            </a:r>
+            <a:r>
+              <a:rPr sz="1050" b="0" i="0" dirty="0">
+                <a:solidFill>
+                  <a:srgbClr val="64716D"/>
+                </a:solidFill>
+                <a:latin typeface="Aptos"/>
+              </a:rPr>
+              <a:t> </a:t>
+            </a:r>
+            <a:r>
+              <a:rPr sz="1050" b="0" i="0" dirty="0" err="1">
+                <a:solidFill>
+                  <a:srgbClr val="64716D"/>
+                </a:solidFill>
+                <a:latin typeface="Aptos"/>
+              </a:rPr>
+              <a:t>совершенства</a:t>
+            </a:r>
+            <a:r>
+              <a:rPr sz="1050" b="0" i="0" dirty="0">
+                <a:solidFill>
+                  <a:srgbClr val="64716D"/>
+                </a:solidFill>
+                <a:latin typeface="Aptos"/>
+              </a:rPr>
+              <a:t> в </a:t>
+            </a:r>
+            <a:r>
+              <a:rPr sz="1050" b="0" i="0" dirty="0" err="1">
+                <a:solidFill>
+                  <a:srgbClr val="64716D"/>
+                </a:solidFill>
+                <a:latin typeface="Aptos"/>
+              </a:rPr>
+              <a:t>отношениях</a:t>
+            </a:r>
+            <a:r>
+              <a:rPr sz="1050" b="0" i="0" dirty="0">
+                <a:solidFill>
+                  <a:srgbClr val="64716D"/>
+                </a:solidFill>
+                <a:latin typeface="Aptos"/>
+              </a:rPr>
+              <a:t> с </a:t>
+            </a:r>
+            <a:r>
+              <a:rPr sz="1050" b="0" i="0" dirty="0" err="1">
+                <a:solidFill>
+                  <a:srgbClr val="64716D"/>
+                </a:solidFill>
+                <a:latin typeface="Aptos"/>
+              </a:rPr>
+              <a:t>существующими</a:t>
+            </a:r>
+            <a:r>
+              <a:rPr sz="1050" b="0" i="0" dirty="0">
+                <a:solidFill>
+                  <a:srgbClr val="64716D"/>
+                </a:solidFill>
+                <a:latin typeface="Aptos"/>
+              </a:rPr>
+              <a:t> </a:t>
+            </a:r>
+            <a:r>
+              <a:rPr sz="1050" b="0" i="0" dirty="0" err="1">
+                <a:solidFill>
+                  <a:srgbClr val="64716D"/>
+                </a:solidFill>
+                <a:latin typeface="Aptos"/>
+              </a:rPr>
+              <a:t>клиентами</a:t>
+            </a:r>
+            <a:r>
+              <a:rPr sz="1050" b="0" i="0" dirty="0">
+                <a:solidFill>
+                  <a:srgbClr val="64716D"/>
+                </a:solidFill>
+                <a:latin typeface="Aptos"/>
+              </a:rPr>
+              <a:t> </a:t>
             </a:r>
             <a:r>
               <a:rPr lang="de-DE" sz="1050" b="0" i="0" dirty="0">
@@ -31096,7 +34489,7 @@
                 </a:solidFill>
                 <a:latin typeface="Aptos"/>
               </a:rPr>
-              <a:t>— </a:t>
+              <a:t>- </a:t>
             </a:r>
             <a:r>
               <a:rPr sz="1050" b="0" i="0" dirty="0" err="1">
@@ -31521,7 +34914,7 @@
                 </a:solidFill>
                 <a:latin typeface="Aptos"/>
               </a:rPr>
-              <a:t>из этих пунктов не представляет собой технического </a:t>
+              <a:t>из</a:t>
             </a:r>
             <a:r>
               <a:rPr sz="1150" b="0" i="0" dirty="0">
@@ -31530,7 +34923,133 @@
                 </a:solidFill>
                 <a:latin typeface="Aptos"/>
               </a:rPr>
-              <a:t>риска </a:t>
+              <a:t> </a:t>
+            </a:r>
+            <a:r>
+              <a:rPr sz="1150" b="0" i="0" dirty="0" err="1">
+                <a:solidFill>
+                  <a:srgbClr val="33413D"/>
+                </a:solidFill>
+                <a:latin typeface="Aptos"/>
+              </a:rPr>
+              <a:t>этих</a:t>
+            </a:r>
+            <a:r>
+              <a:rPr sz="1150" b="0" i="0" dirty="0">
+                <a:solidFill>
+                  <a:srgbClr val="33413D"/>
+                </a:solidFill>
+                <a:latin typeface="Aptos"/>
+              </a:rPr>
+              <a:t> </a:t>
+            </a:r>
+            <a:r>
+              <a:rPr sz="1150" b="0" i="0" dirty="0" err="1">
+                <a:solidFill>
+                  <a:srgbClr val="33413D"/>
+                </a:solidFill>
+                <a:latin typeface="Aptos"/>
+              </a:rPr>
+              <a:t>пунктов</a:t>
+            </a:r>
+            <a:r>
+              <a:rPr sz="1150" b="0" i="0" dirty="0">
+                <a:solidFill>
+                  <a:srgbClr val="33413D"/>
+                </a:solidFill>
+                <a:latin typeface="Aptos"/>
+              </a:rPr>
+              <a:t> </a:t>
+            </a:r>
+            <a:r>
+              <a:rPr sz="1150" b="0" i="0" dirty="0" err="1">
+                <a:solidFill>
+                  <a:srgbClr val="33413D"/>
+                </a:solidFill>
+                <a:latin typeface="Aptos"/>
+              </a:rPr>
+              <a:t>не</a:t>
+            </a:r>
+            <a:r>
+              <a:rPr sz="1150" b="0" i="0" dirty="0">
+                <a:solidFill>
+                  <a:srgbClr val="33413D"/>
+                </a:solidFill>
+                <a:latin typeface="Aptos"/>
+              </a:rPr>
+              <a:t> </a:t>
+            </a:r>
+            <a:r>
+              <a:rPr sz="1150" b="0" i="0" dirty="0" err="1">
+                <a:solidFill>
+                  <a:srgbClr val="33413D"/>
+                </a:solidFill>
+                <a:latin typeface="Aptos"/>
+              </a:rPr>
+              <a:t>представляет</a:t>
+            </a:r>
+            <a:r>
+              <a:rPr sz="1150" b="0" i="0" dirty="0">
+                <a:solidFill>
+                  <a:srgbClr val="33413D"/>
+                </a:solidFill>
+                <a:latin typeface="Aptos"/>
+              </a:rPr>
+              <a:t> </a:t>
+            </a:r>
+            <a:r>
+              <a:rPr sz="1150" b="0" i="0" dirty="0" err="1">
+                <a:solidFill>
+                  <a:srgbClr val="33413D"/>
+                </a:solidFill>
+                <a:latin typeface="Aptos"/>
+              </a:rPr>
+              <a:t>собой</a:t>
+            </a:r>
+            <a:r>
+              <a:rPr sz="1150" b="0" i="0" dirty="0">
+                <a:solidFill>
+                  <a:srgbClr val="33413D"/>
+                </a:solidFill>
+                <a:latin typeface="Aptos"/>
+              </a:rPr>
+              <a:t> </a:t>
+            </a:r>
+            <a:r>
+              <a:rPr sz="1150" b="0" i="0" dirty="0" err="1">
+                <a:solidFill>
+                  <a:srgbClr val="33413D"/>
+                </a:solidFill>
+                <a:latin typeface="Aptos"/>
+              </a:rPr>
+              <a:t>технического</a:t>
+            </a:r>
+            <a:r>
+              <a:rPr sz="1150" b="0" i="0" dirty="0">
+                <a:solidFill>
+                  <a:srgbClr val="33413D"/>
+                </a:solidFill>
+                <a:latin typeface="Aptos"/>
+              </a:rPr>
+              <a:t> </a:t>
+            </a:r>
+            <a:r>
+              <a:rPr sz="1150" b="0" i="0" dirty="0" err="1">
+                <a:solidFill>
+                  <a:srgbClr val="33413D"/>
+                </a:solidFill>
+                <a:latin typeface="Aptos"/>
+              </a:rPr>
+              <a:t>риска</a:t>
+            </a:r>
+            <a:r>
+              <a:rPr sz="1150" b="0" i="0" dirty="0">
+                <a:solidFill>
+                  <a:srgbClr val="33413D"/>
+                </a:solidFill>
+                <a:latin typeface="Aptos"/>
+              </a:rPr>
+              <a:t> </a:t>
             </a:r>
             <a:r>
               <a:rPr lang="de-DE" sz="1150" b="0" i="0" dirty="0">
@@ -31539,7 +35058,7 @@
                 </a:solidFill>
                 <a:latin typeface="Aptos"/>
               </a:rPr>
-              <a:t>— </a:t>
+              <a:t>- </a:t>
             </a:r>
             <a:r>
               <a:rPr sz="1150" b="0" i="0" dirty="0" err="1">
@@ -31618,7 +35137,7 @@
                 </a:solidFill>
                 <a:latin typeface="Aptos"/>
               </a:rPr>
-              <a:t>— </a:t>
+              <a:t>- </a:t>
             </a:r>
             <a:r>
               <a:rPr sz="750" b="0" i="0" dirty="0">
@@ -32327,7 +35846,7 @@
         <p:spPr>
           <a:xfrm>
             <a:off x="640080" y="1600200"/>
-            <a:ext cx="10881360" cy="530915"/>
+            <a:ext cx="10881360" cy="707886"/>
           </a:xfrm>
           <a:prstGeom prst="rect">
             <a:avLst/>
@@ -32361,7 +35880,7 @@
                 </a:solidFill>
                 <a:latin typeface="Aptos"/>
               </a:rPr>
-              <a:t>объединяет всю</a:t>
+              <a:t>объединяет</a:t>
             </a:r>
             <a:r>
               <a:rPr sz="1150" i="0" dirty="0">
@@ -32379,7 +35898,7 @@
                 </a:solidFill>
                 <a:latin typeface="Aptos"/>
               </a:rPr>
-              <a:t>деятельность </a:t>
+              <a:t>всю</a:t>
             </a:r>
             <a:r>
               <a:rPr sz="1150" i="0" dirty="0">
@@ -32388,7 +35907,7 @@
                 </a:solidFill>
                 <a:latin typeface="Aptos"/>
               </a:rPr>
-              <a:t>компании </a:t>
+              <a:t> </a:t>
             </a:r>
             <a:r>
               <a:rPr sz="1150" i="0" dirty="0" err="1">
@@ -32397,7 +35916,7 @@
                 </a:solidFill>
                 <a:latin typeface="Aptos"/>
               </a:rPr>
-              <a:t>Ataberk </a:t>
+              <a:t>деятельность</a:t>
             </a:r>
             <a:r>
               <a:rPr sz="1150" i="0" dirty="0">
@@ -32406,7 +35925,7 @@
                 </a:solidFill>
                 <a:latin typeface="Aptos"/>
               </a:rPr>
-              <a:t>Estate </a:t>
+              <a:t> компании </a:t>
             </a:r>
             <a:r>
               <a:rPr sz="1150" i="0" dirty="0" err="1">
@@ -32415,7 +35934,7 @@
                 </a:solidFill>
                 <a:latin typeface="Aptos"/>
               </a:rPr>
-              <a:t>в сфере недвижимости </a:t>
+              <a:t>Ataberk</a:t>
             </a:r>
             <a:r>
               <a:rPr sz="1150" i="0" dirty="0">
@@ -32424,7 +35943,7 @@
                 </a:solidFill>
                 <a:latin typeface="Aptos"/>
               </a:rPr>
-              <a:t>в </a:t>
+              <a:t> Estate в </a:t>
             </a:r>
             <a:r>
               <a:rPr sz="1150" i="0" dirty="0" err="1">
@@ -32433,7 +35952,7 @@
                 </a:solidFill>
                 <a:latin typeface="Aptos"/>
               </a:rPr>
-              <a:t>одном </a:t>
+              <a:t>сфере</a:t>
             </a:r>
             <a:r>
               <a:rPr sz="1150" i="0" dirty="0">
@@ -32442,7 +35961,61 @@
                 </a:solidFill>
                 <a:latin typeface="Aptos"/>
               </a:rPr>
-              <a:t>месте </a:t>
+              <a:t> </a:t>
+            </a:r>
+            <a:r>
+              <a:rPr sz="1150" i="0" dirty="0" err="1">
+                <a:solidFill>
+                  <a:srgbClr val="33413D"/>
+                </a:solidFill>
+                <a:latin typeface="Aptos"/>
+              </a:rPr>
+              <a:t>недвижимости</a:t>
+            </a:r>
+            <a:r>
+              <a:rPr sz="1150" i="0" dirty="0">
+                <a:solidFill>
+                  <a:srgbClr val="33413D"/>
+                </a:solidFill>
+                <a:latin typeface="Aptos"/>
+              </a:rPr>
+              <a:t> в </a:t>
+            </a:r>
+            <a:r>
+              <a:rPr sz="1150" i="0" dirty="0" err="1">
+                <a:solidFill>
+                  <a:srgbClr val="33413D"/>
+                </a:solidFill>
+                <a:latin typeface="Aptos"/>
+              </a:rPr>
+              <a:t>одном</a:t>
+            </a:r>
+            <a:r>
+              <a:rPr sz="1150" i="0" dirty="0">
+                <a:solidFill>
+                  <a:srgbClr val="33413D"/>
+                </a:solidFill>
+                <a:latin typeface="Aptos"/>
+              </a:rPr>
+              <a:t> </a:t>
+            </a:r>
+            <a:r>
+              <a:rPr sz="1150" i="0" dirty="0" err="1">
+                <a:solidFill>
+                  <a:srgbClr val="33413D"/>
+                </a:solidFill>
+                <a:latin typeface="Aptos"/>
+              </a:rPr>
+              <a:t>месте</a:t>
+            </a:r>
+            <a:r>
+              <a:rPr sz="1150" i="0" dirty="0">
+                <a:solidFill>
+                  <a:srgbClr val="33413D"/>
+                </a:solidFill>
+                <a:latin typeface="Aptos"/>
+              </a:rPr>
+              <a:t> </a:t>
             </a:r>
             <a:r>
               <a:rPr lang="de-DE" sz="1150" i="0" dirty="0">
@@ -32451,7 +36024,7 @@
                 </a:solidFill>
                 <a:latin typeface="Aptos"/>
               </a:rPr>
-              <a:t>— </a:t>
+              <a:t>- </a:t>
             </a:r>
             <a:r>
               <a:rPr sz="1150" i="0" dirty="0" err="1">
@@ -33308,7 +36881,16 @@
                 </a:solidFill>
                 <a:latin typeface="Aptos"/>
               </a:rPr>
-              <a:t>операции </a:t>
+              <a:t>операции</a:t>
+            </a:r>
+            <a:r>
+              <a:rPr sz="1150" b="0" i="0" dirty="0">
+                <a:solidFill>
+                  <a:srgbClr val="33413D"/>
+                </a:solidFill>
+                <a:latin typeface="Aptos"/>
+              </a:rPr>
+              <a:t> </a:t>
             </a:r>
             <a:r>
               <a:rPr lang="de-DE" sz="1150" b="0" i="0" dirty="0">
@@ -33317,7 +36899,7 @@
                 </a:solidFill>
                 <a:latin typeface="Aptos"/>
               </a:rPr>
-              <a:t>— </a:t>
+              <a:t>- </a:t>
             </a:r>
             <a:r>
               <a:rPr sz="1150" b="0" i="0" dirty="0" err="1">
@@ -33344,7 +36926,7 @@
                 </a:solidFill>
                 <a:latin typeface="Aptos"/>
               </a:rPr>
-              <a:t>блокировка доступа</a:t>
+              <a:t>блокировка</a:t>
             </a:r>
             <a:r>
               <a:rPr sz="1150" b="0" i="0" dirty="0">
@@ -33353,6 +36935,24 @@
                 </a:solidFill>
                 <a:latin typeface="Aptos"/>
               </a:rPr>
+              <a:t> </a:t>
+            </a:r>
+            <a:r>
+              <a:rPr sz="1150" b="0" i="0" dirty="0" err="1">
+                <a:solidFill>
+                  <a:srgbClr val="33413D"/>
+                </a:solidFill>
+                <a:latin typeface="Aptos"/>
+              </a:rPr>
+              <a:t>доступа</a:t>
+            </a:r>
+            <a:r>
+              <a:rPr sz="1150" b="0" i="0" dirty="0">
+                <a:solidFill>
+                  <a:srgbClr val="33413D"/>
+                </a:solidFill>
+                <a:latin typeface="Aptos"/>
+              </a:rPr>
               <a:t>, </a:t>
             </a:r>
             <a:r>
@@ -33362,7 +36962,16 @@
                 </a:solidFill>
                 <a:latin typeface="Aptos"/>
               </a:rPr>
-              <a:t>возмещения </a:t>
+              <a:t>возмещения</a:t>
+            </a:r>
+            <a:r>
+              <a:rPr sz="1150" b="0" i="0" dirty="0">
+                <a:solidFill>
+                  <a:srgbClr val="33413D"/>
+                </a:solidFill>
+                <a:latin typeface="Aptos"/>
+              </a:rPr>
+              <a:t> </a:t>
             </a:r>
             <a:r>
               <a:rPr lang="de-DE" sz="1150" b="0" i="0" dirty="0">
@@ -33371,7 +36980,7 @@
                 </a:solidFill>
                 <a:latin typeface="Aptos"/>
               </a:rPr>
-              <a:t>— </a:t>
+              <a:t>- </a:t>
             </a:r>
             <a:r>
               <a:rPr sz="1150" b="0" i="0" dirty="0" err="1">
@@ -33551,7 +37160,16 @@
                 </a:solidFill>
                 <a:latin typeface="Aptos"/>
               </a:rPr>
-              <a:t>человека </a:t>
+              <a:t>человека</a:t>
+            </a:r>
+            <a:r>
+              <a:rPr sz="1150" b="0" i="0" dirty="0">
+                <a:solidFill>
+                  <a:srgbClr val="33413D"/>
+                </a:solidFill>
+                <a:latin typeface="Aptos"/>
+              </a:rPr>
+              <a:t> </a:t>
             </a:r>
             <a:r>
               <a:rPr lang="de-DE" sz="1150" b="0" i="0" dirty="0">
@@ -33560,7 +37178,7 @@
                 </a:solidFill>
                 <a:latin typeface="Aptos"/>
               </a:rPr>
-              <a:t>— </a:t>
+              <a:t>- </a:t>
             </a:r>
             <a:r>
               <a:rPr sz="1150" b="0" i="0" dirty="0" err="1">
@@ -33639,7 +37257,7 @@
                 </a:solidFill>
                 <a:latin typeface="Aptos"/>
               </a:rPr>
-              <a:t>— </a:t>
+              <a:t>- </a:t>
             </a:r>
             <a:r>
               <a:rPr sz="750" b="0" i="0" dirty="0">
@@ -33887,7 +37505,70 @@
                 </a:solidFill>
                 <a:latin typeface="Aptos"/>
               </a:rPr>
-              <a:t>имеется на сегодняшний день </a:t>
+              <a:t>имеется</a:t>
+            </a:r>
+            <a:r>
+              <a:rPr sz="2700" b="1" i="0" dirty="0">
+                <a:solidFill>
+                  <a:srgbClr val="044F49"/>
+                </a:solidFill>
+                <a:latin typeface="Aptos"/>
+              </a:rPr>
+              <a:t> </a:t>
+            </a:r>
+            <a:r>
+              <a:rPr sz="2700" b="1" i="0" dirty="0" err="1">
+                <a:solidFill>
+                  <a:srgbClr val="044F49"/>
+                </a:solidFill>
+                <a:latin typeface="Aptos"/>
+              </a:rPr>
+              <a:t>на</a:t>
+            </a:r>
+            <a:r>
+              <a:rPr sz="2700" b="1" i="0" dirty="0">
+                <a:solidFill>
+                  <a:srgbClr val="044F49"/>
+                </a:solidFill>
+                <a:latin typeface="Aptos"/>
+              </a:rPr>
+              <a:t> </a:t>
+            </a:r>
+            <a:r>
+              <a:rPr sz="2700" b="1" i="0" dirty="0" err="1">
+                <a:solidFill>
+                  <a:srgbClr val="044F49"/>
+                </a:solidFill>
+                <a:latin typeface="Aptos"/>
+              </a:rPr>
+              <a:t>сегодняшний</a:t>
+            </a:r>
+            <a:r>
+              <a:rPr sz="2700" b="1" i="0" dirty="0">
+                <a:solidFill>
+                  <a:srgbClr val="044F49"/>
+                </a:solidFill>
+                <a:latin typeface="Aptos"/>
+              </a:rPr>
+              <a:t> </a:t>
+            </a:r>
+            <a:r>
+              <a:rPr sz="2700" b="1" i="0" dirty="0" err="1">
+                <a:solidFill>
+                  <a:srgbClr val="044F49"/>
+                </a:solidFill>
+                <a:latin typeface="Aptos"/>
+              </a:rPr>
+              <a:t>день</a:t>
+            </a:r>
+            <a:r>
+              <a:rPr sz="2700" b="1" i="0" dirty="0">
+                <a:solidFill>
+                  <a:srgbClr val="044F49"/>
+                </a:solidFill>
+                <a:latin typeface="Aptos"/>
+              </a:rPr>
+              <a:t> </a:t>
             </a:r>
             <a:r>
               <a:rPr lang="de-DE" sz="2700" b="1" i="0" dirty="0">
@@ -33896,7 +37577,7 @@
                 </a:solidFill>
                 <a:latin typeface="Aptos"/>
               </a:rPr>
-              <a:t>— </a:t>
+              <a:t>- </a:t>
             </a:r>
             <a:r>
               <a:rPr sz="2700" b="1" i="0" dirty="0">
@@ -34357,7 +38038,7 @@
         <p:spPr>
           <a:xfrm>
             <a:off x="6519672" y="1892808"/>
-            <a:ext cx="4745736" cy="1633781"/>
+            <a:ext cx="4745736" cy="1987724"/>
           </a:xfrm>
           <a:prstGeom prst="rect">
             <a:avLst/>
@@ -34438,7 +38119,7 @@
                 </a:solidFill>
                 <a:latin typeface="Aptos"/>
               </a:rPr>
-              <a:t>можете уже сегодня ознакомиться со</a:t>
+              <a:t>можете</a:t>
             </a:r>
             <a:r>
               <a:rPr sz="1150" b="0" i="0" dirty="0">
@@ -34456,6 +38137,78 @@
                 </a:solidFill>
                 <a:latin typeface="Aptos"/>
               </a:rPr>
+              <a:t>уже</a:t>
+            </a:r>
+            <a:r>
+              <a:rPr sz="1150" b="0" i="0" dirty="0">
+                <a:solidFill>
+                  <a:srgbClr val="33413D"/>
+                </a:solidFill>
+                <a:latin typeface="Aptos"/>
+              </a:rPr>
+              <a:t> </a:t>
+            </a:r>
+            <a:r>
+              <a:rPr sz="1150" b="0" i="0" dirty="0" err="1">
+                <a:solidFill>
+                  <a:srgbClr val="33413D"/>
+                </a:solidFill>
+                <a:latin typeface="Aptos"/>
+              </a:rPr>
+              <a:t>сегодня</a:t>
+            </a:r>
+            <a:r>
+              <a:rPr sz="1150" b="0" i="0" dirty="0">
+                <a:solidFill>
+                  <a:srgbClr val="33413D"/>
+                </a:solidFill>
+                <a:latin typeface="Aptos"/>
+              </a:rPr>
+              <a:t> </a:t>
+            </a:r>
+            <a:r>
+              <a:rPr sz="1150" b="0" i="0" dirty="0" err="1">
+                <a:solidFill>
+                  <a:srgbClr val="33413D"/>
+                </a:solidFill>
+                <a:latin typeface="Aptos"/>
+              </a:rPr>
+              <a:t>ознакомиться</a:t>
+            </a:r>
+            <a:r>
+              <a:rPr sz="1150" b="0" i="0" dirty="0">
+                <a:solidFill>
+                  <a:srgbClr val="33413D"/>
+                </a:solidFill>
+                <a:latin typeface="Aptos"/>
+              </a:rPr>
+              <a:t> </a:t>
+            </a:r>
+            <a:r>
+              <a:rPr sz="1150" b="0" i="0" dirty="0" err="1">
+                <a:solidFill>
+                  <a:srgbClr val="33413D"/>
+                </a:solidFill>
+                <a:latin typeface="Aptos"/>
+              </a:rPr>
+              <a:t>со</a:t>
+            </a:r>
+            <a:r>
+              <a:rPr sz="1150" b="0" i="0" dirty="0">
+                <a:solidFill>
+                  <a:srgbClr val="33413D"/>
+                </a:solidFill>
+                <a:latin typeface="Aptos"/>
+              </a:rPr>
+              <a:t> </a:t>
+            </a:r>
+            <a:r>
+              <a:rPr sz="1150" b="0" i="0" dirty="0" err="1">
+                <a:solidFill>
+                  <a:srgbClr val="33413D"/>
+                </a:solidFill>
+                <a:latin typeface="Aptos"/>
+              </a:rPr>
               <a:t>всем</a:t>
             </a:r>
             <a:r>
@@ -34474,7 +38227,7 @@
                 </a:solidFill>
                 <a:latin typeface="Aptos"/>
               </a:rPr>
-              <a:t>набором функций</a:t>
+              <a:t>набором</a:t>
             </a:r>
             <a:r>
               <a:rPr sz="1150" b="0" i="0" dirty="0">
@@ -34483,6 +38236,24 @@
                 </a:solidFill>
                 <a:latin typeface="Aptos"/>
               </a:rPr>
+              <a:t> </a:t>
+            </a:r>
+            <a:r>
+              <a:rPr sz="1150" b="0" i="0" dirty="0" err="1">
+                <a:solidFill>
+                  <a:srgbClr val="33413D"/>
+                </a:solidFill>
+                <a:latin typeface="Aptos"/>
+              </a:rPr>
+              <a:t>функций</a:t>
+            </a:r>
+            <a:r>
+              <a:rPr sz="1150" b="0" i="0" dirty="0">
+                <a:solidFill>
+                  <a:srgbClr val="33413D"/>
+                </a:solidFill>
+                <a:latin typeface="Aptos"/>
+              </a:rPr>
               <a:t>, </a:t>
             </a:r>
             <a:r>
@@ -34492,7 +38263,7 @@
                 </a:solidFill>
                 <a:latin typeface="Aptos"/>
               </a:rPr>
-              <a:t>протестировать их </a:t>
+              <a:t>протестировать</a:t>
             </a:r>
             <a:r>
               <a:rPr sz="1150" b="0" i="0" dirty="0">
@@ -34501,7 +38272,7 @@
                 </a:solidFill>
                 <a:latin typeface="Aptos"/>
               </a:rPr>
-              <a:t>и </a:t>
+              <a:t> </a:t>
             </a:r>
             <a:r>
               <a:rPr sz="1150" b="0" i="0" dirty="0" err="1">
@@ -34510,7 +38281,34 @@
                 </a:solidFill>
                 <a:latin typeface="Aptos"/>
               </a:rPr>
-              <a:t>оценить </a:t>
+              <a:t>их</a:t>
+            </a:r>
+            <a:r>
+              <a:rPr sz="1150" b="0" i="0" dirty="0">
+                <a:solidFill>
+                  <a:srgbClr val="33413D"/>
+                </a:solidFill>
+                <a:latin typeface="Aptos"/>
+              </a:rPr>
+              <a:t> и </a:t>
+            </a:r>
+            <a:r>
+              <a:rPr sz="1150" b="0" i="0" dirty="0" err="1">
+                <a:solidFill>
+                  <a:srgbClr val="33413D"/>
+                </a:solidFill>
+                <a:latin typeface="Aptos"/>
+              </a:rPr>
+              <a:t>оценить</a:t>
+            </a:r>
+            <a:r>
+              <a:rPr sz="1150" b="0" i="0" dirty="0">
+                <a:solidFill>
+                  <a:srgbClr val="33413D"/>
+                </a:solidFill>
+                <a:latin typeface="Aptos"/>
+              </a:rPr>
+              <a:t> </a:t>
             </a:r>
             <a:r>
               <a:rPr lang="de-DE" sz="1150" b="0" i="0" dirty="0">
@@ -34519,7 +38317,7 @@
                 </a:solidFill>
                 <a:latin typeface="Aptos"/>
               </a:rPr>
-              <a:t>— </a:t>
+              <a:t>- </a:t>
             </a:r>
             <a:r>
               <a:rPr sz="1150" b="0" i="0" dirty="0">
@@ -34580,7 +38378,7 @@
                 </a:solidFill>
                 <a:latin typeface="Aptos"/>
               </a:rPr>
-              <a:t>Переход </a:t>
+              <a:t>Переход к </a:t>
             </a:r>
             <a:r>
               <a:rPr sz="1150" b="0" i="0" dirty="0" err="1">
@@ -34589,7 +38387,196 @@
                 </a:solidFill>
                 <a:latin typeface="Aptos"/>
               </a:rPr>
-              <a:t>к полноценной эксплуатации в режиме реального времени требует получения ряда четко определенных разрешений </a:t>
+              <a:t>полноценной</a:t>
+            </a:r>
+            <a:r>
+              <a:rPr sz="1150" b="0" i="0" dirty="0">
+                <a:solidFill>
+                  <a:srgbClr val="33413D"/>
+                </a:solidFill>
+                <a:latin typeface="Aptos"/>
+              </a:rPr>
+              <a:t> </a:t>
+            </a:r>
+            <a:r>
+              <a:rPr sz="1150" b="0" i="0" dirty="0" err="1">
+                <a:solidFill>
+                  <a:srgbClr val="33413D"/>
+                </a:solidFill>
+                <a:latin typeface="Aptos"/>
+              </a:rPr>
+              <a:t>эксплуатации</a:t>
+            </a:r>
+            <a:r>
+              <a:rPr sz="1150" b="0" i="0" dirty="0">
+                <a:solidFill>
+                  <a:srgbClr val="33413D"/>
+                </a:solidFill>
+                <a:latin typeface="Aptos"/>
+              </a:rPr>
+              <a:t> в </a:t>
+            </a:r>
+            <a:r>
+              <a:rPr sz="1150" b="0" i="0" dirty="0" err="1">
+                <a:solidFill>
+                  <a:srgbClr val="33413D"/>
+                </a:solidFill>
+                <a:latin typeface="Aptos"/>
+              </a:rPr>
+              <a:t>режиме</a:t>
+            </a:r>
+            <a:r>
+              <a:rPr sz="1150" b="0" i="0" dirty="0">
+                <a:solidFill>
+                  <a:srgbClr val="33413D"/>
+                </a:solidFill>
+                <a:latin typeface="Aptos"/>
+              </a:rPr>
+              <a:t> </a:t>
+            </a:r>
+            <a:r>
+              <a:rPr sz="1150" b="0" i="0" dirty="0" err="1">
+                <a:solidFill>
+                  <a:srgbClr val="33413D"/>
+                </a:solidFill>
+                <a:latin typeface="Aptos"/>
+              </a:rPr>
+              <a:t>реального</a:t>
+            </a:r>
+            <a:r>
+              <a:rPr sz="1150" b="0" i="0" dirty="0">
+                <a:solidFill>
+                  <a:srgbClr val="33413D"/>
+                </a:solidFill>
+                <a:latin typeface="Aptos"/>
+              </a:rPr>
+              <a:t> </a:t>
+            </a:r>
+            <a:r>
+              <a:rPr sz="1150" b="0" i="0" dirty="0" err="1">
+                <a:solidFill>
+                  <a:srgbClr val="33413D"/>
+                </a:solidFill>
+                <a:latin typeface="Aptos"/>
+              </a:rPr>
+              <a:t>времени</a:t>
+            </a:r>
+            <a:r>
+              <a:rPr sz="1150" b="0" i="0" dirty="0">
+                <a:solidFill>
+                  <a:srgbClr val="33413D"/>
+                </a:solidFill>
+                <a:latin typeface="Aptos"/>
+              </a:rPr>
+              <a:t> </a:t>
+            </a:r>
+            <a:r>
+              <a:rPr sz="1150" b="0" i="0" dirty="0" err="1">
+                <a:solidFill>
+                  <a:srgbClr val="33413D"/>
+                </a:solidFill>
+                <a:latin typeface="Aptos"/>
+              </a:rPr>
+              <a:t>требует</a:t>
+            </a:r>
+            <a:r>
+              <a:rPr sz="1150" b="0" i="0" dirty="0">
+                <a:solidFill>
+                  <a:srgbClr val="33413D"/>
+                </a:solidFill>
+                <a:latin typeface="Aptos"/>
+              </a:rPr>
+              <a:t> </a:t>
+            </a:r>
+            <a:r>
+              <a:rPr sz="1150" b="0" i="0" dirty="0" err="1">
+                <a:solidFill>
+                  <a:srgbClr val="33413D"/>
+                </a:solidFill>
+                <a:latin typeface="Aptos"/>
+              </a:rPr>
+              <a:t>получения</a:t>
+            </a:r>
+            <a:r>
+              <a:rPr sz="1150" b="0" i="0" dirty="0">
+                <a:solidFill>
+                  <a:srgbClr val="33413D"/>
+                </a:solidFill>
+                <a:latin typeface="Aptos"/>
+              </a:rPr>
+              <a:t> </a:t>
+            </a:r>
+            <a:r>
+              <a:rPr sz="1150" b="0" i="0" dirty="0" err="1">
+                <a:solidFill>
+                  <a:srgbClr val="33413D"/>
+                </a:solidFill>
+                <a:latin typeface="Aptos"/>
+              </a:rPr>
+              <a:t>ряда</a:t>
+            </a:r>
+            <a:r>
+              <a:rPr sz="1150" b="0" i="0" dirty="0">
+                <a:solidFill>
+                  <a:srgbClr val="33413D"/>
+                </a:solidFill>
+                <a:latin typeface="Aptos"/>
+              </a:rPr>
+              <a:t> </a:t>
+            </a:r>
+            <a:r>
+              <a:rPr sz="1150" b="0" i="0" dirty="0" err="1">
+                <a:solidFill>
+                  <a:srgbClr val="33413D"/>
+                </a:solidFill>
+                <a:latin typeface="Aptos"/>
+              </a:rPr>
+              <a:t>четко</a:t>
+            </a:r>
+            <a:r>
+              <a:rPr sz="1150" b="0" i="0" dirty="0">
+                <a:solidFill>
+                  <a:srgbClr val="33413D"/>
+                </a:solidFill>
+                <a:latin typeface="Aptos"/>
+              </a:rPr>
+              <a:t> </a:t>
+            </a:r>
+            <a:r>
+              <a:rPr sz="1150" b="0" i="0" dirty="0" err="1">
+                <a:solidFill>
+                  <a:srgbClr val="33413D"/>
+                </a:solidFill>
+                <a:latin typeface="Aptos"/>
+              </a:rPr>
+              <a:t>определенных</a:t>
+            </a:r>
+            <a:r>
+              <a:rPr sz="1150" b="0" i="0" dirty="0">
+                <a:solidFill>
+                  <a:srgbClr val="33413D"/>
+                </a:solidFill>
+                <a:latin typeface="Aptos"/>
+              </a:rPr>
+              <a:t> </a:t>
+            </a:r>
+            <a:r>
+              <a:rPr sz="1150" b="0" i="0" dirty="0" err="1">
+                <a:solidFill>
+                  <a:srgbClr val="33413D"/>
+                </a:solidFill>
+                <a:latin typeface="Aptos"/>
+              </a:rPr>
+              <a:t>разрешений</a:t>
+            </a:r>
+            <a:r>
+              <a:rPr sz="1150" b="0" i="0" dirty="0">
+                <a:solidFill>
+                  <a:srgbClr val="33413D"/>
+                </a:solidFill>
+                <a:latin typeface="Aptos"/>
+              </a:rPr>
+              <a:t> </a:t>
             </a:r>
             <a:r>
               <a:rPr lang="de-DE" sz="1150" b="0" i="0" dirty="0">
@@ -34598,7 +38585,7 @@
                 </a:solidFill>
                 <a:latin typeface="Aptos"/>
               </a:rPr>
-              <a:t>— </a:t>
+              <a:t>- </a:t>
             </a:r>
             <a:r>
               <a:rPr sz="1150" b="0" i="0" dirty="0" err="1">
@@ -34839,7 +38826,7 @@
                 </a:solidFill>
                 <a:latin typeface="Aptos"/>
               </a:rPr>
-              <a:t>— </a:t>
+              <a:t>- </a:t>
             </a:r>
             <a:r>
               <a:rPr sz="750" b="0" i="0" dirty="0">
@@ -35255,7 +39242,7 @@
         <p:spPr>
           <a:xfrm>
             <a:off x="640080" y="1554480"/>
-            <a:ext cx="10881360" cy="1110560"/>
+            <a:ext cx="10881360" cy="1279838"/>
           </a:xfrm>
           <a:prstGeom prst="rect">
             <a:avLst/>
@@ -35362,7 +39349,52 @@
                 </a:solidFill>
                 <a:latin typeface="Aptos"/>
               </a:rPr>
-              <a:t>зарубежной недвижимости сокращается </a:t>
+              <a:t>зарубежной</a:t>
+            </a:r>
+            <a:r>
+              <a:rPr sz="1300" b="1" i="0" dirty="0">
+                <a:solidFill>
+                  <a:srgbClr val="066B63"/>
+                </a:solidFill>
+                <a:latin typeface="Aptos"/>
+              </a:rPr>
+              <a:t> </a:t>
+            </a:r>
+            <a:r>
+              <a:rPr sz="1300" b="1" i="0" dirty="0" err="1">
+                <a:solidFill>
+                  <a:srgbClr val="066B63"/>
+                </a:solidFill>
+                <a:latin typeface="Aptos"/>
+              </a:rPr>
+              <a:t>недвижимости</a:t>
+            </a:r>
+            <a:r>
+              <a:rPr sz="1300" b="1" i="0" dirty="0">
+                <a:solidFill>
+                  <a:srgbClr val="066B63"/>
+                </a:solidFill>
+                <a:latin typeface="Aptos"/>
+              </a:rPr>
+              <a:t> </a:t>
+            </a:r>
+            <a:r>
+              <a:rPr sz="1300" b="1" i="0" dirty="0" err="1">
+                <a:solidFill>
+                  <a:srgbClr val="066B63"/>
+                </a:solidFill>
+                <a:latin typeface="Aptos"/>
+              </a:rPr>
+              <a:t>сокращается</a:t>
+            </a:r>
+            <a:r>
+              <a:rPr sz="1300" b="1" i="0" dirty="0">
+                <a:solidFill>
+                  <a:srgbClr val="066B63"/>
+                </a:solidFill>
+                <a:latin typeface="Aptos"/>
+              </a:rPr>
+              <a:t> </a:t>
             </a:r>
             <a:r>
               <a:rPr lang="de-DE" sz="1300" b="1" i="0" dirty="0">
@@ -35371,7 +39403,7 @@
                 </a:solidFill>
                 <a:latin typeface="Aptos"/>
               </a:rPr>
-              <a:t>— </a:t>
+              <a:t>- </a:t>
             </a:r>
             <a:r>
               <a:rPr sz="1300" b="1" i="0" dirty="0" err="1">
@@ -35429,7 +39461,7 @@
                 </a:solidFill>
                 <a:latin typeface="Aptos"/>
               </a:rPr>
-              <a:t>по всей стране </a:t>
+              <a:t>по</a:t>
             </a:r>
             <a:r>
               <a:rPr sz="1100" i="0" dirty="0">
@@ -35438,7 +39470,7 @@
                 </a:solidFill>
                 <a:latin typeface="Aptos"/>
               </a:rPr>
-              <a:t>иностранцам </a:t>
+              <a:t> </a:t>
             </a:r>
             <a:r>
               <a:rPr sz="1100" i="0" dirty="0" err="1">
@@ -35447,7 +39479,7 @@
                 </a:solidFill>
                 <a:latin typeface="Aptos"/>
               </a:rPr>
-              <a:t>было продано всего около</a:t>
+              <a:t>всей</a:t>
             </a:r>
             <a:r>
               <a:rPr sz="1100" i="0" dirty="0">
@@ -35456,6 +39488,96 @@
                 </a:solidFill>
                 <a:latin typeface="Aptos"/>
               </a:rPr>
+              <a:t> </a:t>
+            </a:r>
+            <a:r>
+              <a:rPr sz="1100" i="0" dirty="0" err="1">
+                <a:solidFill>
+                  <a:srgbClr val="33413D"/>
+                </a:solidFill>
+                <a:latin typeface="Aptos"/>
+              </a:rPr>
+              <a:t>стране</a:t>
+            </a:r>
+            <a:r>
+              <a:rPr sz="1100" i="0" dirty="0">
+                <a:solidFill>
+                  <a:srgbClr val="33413D"/>
+                </a:solidFill>
+                <a:latin typeface="Aptos"/>
+              </a:rPr>
+              <a:t> иностранцам </a:t>
+            </a:r>
+            <a:r>
+              <a:rPr sz="1100" i="0" dirty="0" err="1">
+                <a:solidFill>
+                  <a:srgbClr val="33413D"/>
+                </a:solidFill>
+                <a:latin typeface="Aptos"/>
+              </a:rPr>
+              <a:t>было</a:t>
+            </a:r>
+            <a:r>
+              <a:rPr sz="1100" i="0" dirty="0">
+                <a:solidFill>
+                  <a:srgbClr val="33413D"/>
+                </a:solidFill>
+                <a:latin typeface="Aptos"/>
+              </a:rPr>
+              <a:t> </a:t>
+            </a:r>
+            <a:r>
+              <a:rPr sz="1100" i="0" dirty="0" err="1">
+                <a:solidFill>
+                  <a:srgbClr val="33413D"/>
+                </a:solidFill>
+                <a:latin typeface="Aptos"/>
+              </a:rPr>
+              <a:t>продано</a:t>
+            </a:r>
+            <a:r>
+              <a:rPr sz="1100" i="0" dirty="0">
+                <a:solidFill>
+                  <a:srgbClr val="33413D"/>
+                </a:solidFill>
+                <a:latin typeface="Aptos"/>
+              </a:rPr>
+              <a:t> </a:t>
+            </a:r>
+            <a:r>
+              <a:rPr sz="1100" i="0" dirty="0" err="1">
+                <a:solidFill>
+                  <a:srgbClr val="33413D"/>
+                </a:solidFill>
+                <a:latin typeface="Aptos"/>
+              </a:rPr>
+              <a:t>всего</a:t>
+            </a:r>
+            <a:r>
+              <a:rPr sz="1100" i="0" dirty="0">
+                <a:solidFill>
+                  <a:srgbClr val="33413D"/>
+                </a:solidFill>
+                <a:latin typeface="Aptos"/>
+              </a:rPr>
+              <a:t> </a:t>
+            </a:r>
+            <a:r>
+              <a:rPr sz="1100" i="0" dirty="0" err="1">
+                <a:solidFill>
+                  <a:srgbClr val="33413D"/>
+                </a:solidFill>
+                <a:latin typeface="Aptos"/>
+              </a:rPr>
+              <a:t>около</a:t>
+            </a:r>
+            <a:r>
+              <a:rPr sz="1100" i="0" dirty="0">
+                <a:solidFill>
+                  <a:srgbClr val="33413D"/>
+                </a:solidFill>
+                <a:latin typeface="Aptos"/>
+              </a:rPr>
               <a:t> 21 500 </a:t>
             </a:r>
             <a:r>
@@ -35465,7 +39587,16 @@
                 </a:solidFill>
                 <a:latin typeface="Aptos"/>
               </a:rPr>
-              <a:t>квартир </a:t>
+              <a:t>квартир</a:t>
+            </a:r>
+            <a:r>
+              <a:rPr sz="1100" i="0" dirty="0">
+                <a:solidFill>
+                  <a:srgbClr val="33413D"/>
+                </a:solidFill>
+                <a:latin typeface="Aptos"/>
+              </a:rPr>
+              <a:t> </a:t>
             </a:r>
             <a:r>
               <a:rPr lang="de-DE" sz="1100" i="0" dirty="0">
@@ -35474,7 +39605,7 @@
                 </a:solidFill>
                 <a:latin typeface="Aptos"/>
               </a:rPr>
-              <a:t>— </a:t>
+              <a:t>- </a:t>
             </a:r>
             <a:r>
               <a:rPr sz="1100" i="0" dirty="0">
@@ -36410,7 +40541,7 @@
                 </a:solidFill>
                 <a:latin typeface="Aptos"/>
               </a:rPr>
-              <a:t>— </a:t>
+              <a:t>- </a:t>
             </a:r>
             <a:r>
               <a:rPr sz="750" b="0" i="0" dirty="0">
@@ -36875,7 +41006,7 @@
         <p:spPr>
           <a:xfrm>
             <a:off x="868680" y="1837944"/>
-            <a:ext cx="4869180" cy="897682"/>
+            <a:ext cx="4869180" cy="1059264"/>
           </a:xfrm>
           <a:prstGeom prst="rect">
             <a:avLst/>
@@ -36983,7 +41114,124 @@
                 </a:solidFill>
                 <a:latin typeface="Aptos"/>
               </a:rPr>
-              <a:t>Ведущие международные поставщики дооснастили свои системы ИИ-помощниками </a:t>
+              <a:t>Ведущие</a:t>
+            </a:r>
+            <a:r>
+              <a:rPr sz="1050" b="0" i="0" dirty="0">
+                <a:solidFill>
+                  <a:srgbClr val="64716D"/>
+                </a:solidFill>
+                <a:latin typeface="Aptos"/>
+              </a:rPr>
+              <a:t> </a:t>
+            </a:r>
+            <a:r>
+              <a:rPr sz="1050" b="0" i="0" dirty="0" err="1">
+                <a:solidFill>
+                  <a:srgbClr val="64716D"/>
+                </a:solidFill>
+                <a:latin typeface="Aptos"/>
+              </a:rPr>
+              <a:t>международные</a:t>
+            </a:r>
+            <a:r>
+              <a:rPr sz="1050" b="0" i="0" dirty="0">
+                <a:solidFill>
+                  <a:srgbClr val="64716D"/>
+                </a:solidFill>
+                <a:latin typeface="Aptos"/>
+              </a:rPr>
+              <a:t> </a:t>
+            </a:r>
+            <a:r>
+              <a:rPr sz="1050" b="0" i="0" dirty="0" err="1">
+                <a:solidFill>
+                  <a:srgbClr val="64716D"/>
+                </a:solidFill>
+                <a:latin typeface="Aptos"/>
+              </a:rPr>
+              <a:t>поставщики</a:t>
+            </a:r>
+            <a:r>
+              <a:rPr sz="1050" b="0" i="0" dirty="0">
+                <a:solidFill>
+                  <a:srgbClr val="64716D"/>
+                </a:solidFill>
+                <a:latin typeface="Aptos"/>
+              </a:rPr>
+              <a:t> </a:t>
+            </a:r>
+            <a:r>
+              <a:rPr sz="1050" b="0" i="0" dirty="0" err="1">
+                <a:solidFill>
+                  <a:srgbClr val="64716D"/>
+                </a:solidFill>
+                <a:latin typeface="Aptos"/>
+              </a:rPr>
+              <a:t>дооснастили</a:t>
+            </a:r>
+            <a:r>
+              <a:rPr sz="1050" b="0" i="0" dirty="0">
+                <a:solidFill>
+                  <a:srgbClr val="64716D"/>
+                </a:solidFill>
+                <a:latin typeface="Aptos"/>
+              </a:rPr>
+              <a:t> </a:t>
+            </a:r>
+            <a:r>
+              <a:rPr sz="1050" b="0" i="0" dirty="0" err="1">
+                <a:solidFill>
+                  <a:srgbClr val="64716D"/>
+                </a:solidFill>
+                <a:latin typeface="Aptos"/>
+              </a:rPr>
+              <a:t>свои</a:t>
+            </a:r>
+            <a:r>
+              <a:rPr sz="1050" b="0" i="0" dirty="0">
+                <a:solidFill>
+                  <a:srgbClr val="64716D"/>
+                </a:solidFill>
+                <a:latin typeface="Aptos"/>
+              </a:rPr>
+              <a:t> </a:t>
+            </a:r>
+            <a:r>
+              <a:rPr sz="1050" b="0" i="0" dirty="0" err="1">
+                <a:solidFill>
+                  <a:srgbClr val="64716D"/>
+                </a:solidFill>
+                <a:latin typeface="Aptos"/>
+              </a:rPr>
+              <a:t>системы</a:t>
+            </a:r>
+            <a:r>
+              <a:rPr sz="1050" b="0" i="0" dirty="0">
+                <a:solidFill>
+                  <a:srgbClr val="64716D"/>
+                </a:solidFill>
+                <a:latin typeface="Aptos"/>
+              </a:rPr>
+              <a:t> ИИ-</a:t>
+            </a:r>
+            <a:r>
+              <a:rPr sz="1050" b="0" i="0" dirty="0" err="1">
+                <a:solidFill>
+                  <a:srgbClr val="64716D"/>
+                </a:solidFill>
+                <a:latin typeface="Aptos"/>
+              </a:rPr>
+              <a:t>помощниками</a:t>
+            </a:r>
+            <a:r>
+              <a:rPr sz="1050" b="0" i="0" dirty="0">
+                <a:solidFill>
+                  <a:srgbClr val="64716D"/>
+                </a:solidFill>
+                <a:latin typeface="Aptos"/>
+              </a:rPr>
+              <a:t> </a:t>
             </a:r>
             <a:r>
               <a:rPr lang="de-DE" sz="1050" b="0" i="0" dirty="0">
@@ -36992,7 +41240,7 @@
                 </a:solidFill>
                 <a:latin typeface="Aptos"/>
               </a:rPr>
-              <a:t>— при этом </a:t>
+              <a:t>- при этом </a:t>
             </a:r>
             <a:r>
               <a:rPr sz="1050" b="0" i="0" dirty="0" err="1">
@@ -37145,7 +41393,7 @@
         <p:spPr>
           <a:xfrm>
             <a:off x="6423660" y="1837944"/>
-            <a:ext cx="4869180" cy="1645920"/>
+            <a:ext cx="4869180" cy="1059264"/>
           </a:xfrm>
           <a:prstGeom prst="rect">
             <a:avLst/>
@@ -37159,14 +41407,38 @@
           <a:lstStyle/>
           <a:p>
             <a:r>
-              <a:rPr sz="1300" b="1" i="0">
+              <a:rPr sz="1300" b="1" i="0" dirty="0" err="1">
                 <a:solidFill>
                   <a:srgbClr val="044F49"/>
                 </a:solidFill>
                 <a:latin typeface="Aptos"/>
               </a:rPr>
-              <a:t>Цифровая доступность</a:t>
-            </a:r>
+              <a:t>Цифровая</a:t>
+            </a:r>
+            <a:r>
+              <a:rPr sz="1300" b="1" i="0" dirty="0">
+                <a:solidFill>
+                  <a:srgbClr val="044F49"/>
+                </a:solidFill>
+                <a:latin typeface="Aptos"/>
+              </a:rPr>
+              <a:t> </a:t>
+            </a:r>
+            <a:r>
+              <a:rPr sz="1300" b="1" i="0" dirty="0" err="1">
+                <a:solidFill>
+                  <a:srgbClr val="044F49"/>
+                </a:solidFill>
+                <a:latin typeface="Aptos"/>
+              </a:rPr>
+              <a:t>доступность</a:t>
+            </a:r>
+            <a:endParaRPr sz="1300" b="1" i="0" dirty="0">
+              <a:solidFill>
+                <a:srgbClr val="044F49"/>
+              </a:solidFill>
+              <a:latin typeface="Aptos"/>
+            </a:endParaRPr>
           </a:p>
           <a:p>
             <a:pPr>
@@ -37175,13 +41447,544 @@
               </a:spcBef>
             </a:pPr>
             <a:r>
-              <a:rPr sz="1050" b="0" i="0">
-                <a:solidFill>
-                  <a:srgbClr val="64716D"/>
-                </a:solidFill>
-                <a:latin typeface="Aptos"/>
-              </a:rPr>
-              <a:t>Международные владельцы и арендаторы отлично доступны в цифровом пространстве: 88,6 % используют WhatsApp, более 90 % — Интернет в Турции. Это способствует внедрению многоязычного веб-приложения, которое можно установить и запустить на любом устройстве без необходимости загрузки из магазина приложений.</a:t>
+              <a:rPr sz="1050" b="0" i="0" dirty="0" err="1">
+                <a:solidFill>
+                  <a:srgbClr val="64716D"/>
+                </a:solidFill>
+                <a:latin typeface="Aptos"/>
+              </a:rPr>
+              <a:t>Международные</a:t>
+            </a:r>
+            <a:r>
+              <a:rPr sz="1050" b="0" i="0" dirty="0">
+                <a:solidFill>
+                  <a:srgbClr val="64716D"/>
+                </a:solidFill>
+                <a:latin typeface="Aptos"/>
+              </a:rPr>
+              <a:t> </a:t>
+            </a:r>
+            <a:r>
+              <a:rPr sz="1050" b="0" i="0" dirty="0" err="1">
+                <a:solidFill>
+                  <a:srgbClr val="64716D"/>
+                </a:solidFill>
+                <a:latin typeface="Aptos"/>
+              </a:rPr>
+              <a:t>владельцы</a:t>
+            </a:r>
+            <a:r>
+              <a:rPr sz="1050" b="0" i="0" dirty="0">
+                <a:solidFill>
+                  <a:srgbClr val="64716D"/>
+                </a:solidFill>
+                <a:latin typeface="Aptos"/>
+              </a:rPr>
+              <a:t> и </a:t>
+            </a:r>
+            <a:r>
+              <a:rPr sz="1050" b="0" i="0" dirty="0" err="1">
+                <a:solidFill>
+                  <a:srgbClr val="64716D"/>
+                </a:solidFill>
+                <a:latin typeface="Aptos"/>
+              </a:rPr>
+              <a:t>арендаторы</a:t>
+            </a:r>
+            <a:r>
+              <a:rPr sz="1050" b="0" i="0" dirty="0">
+                <a:solidFill>
+                  <a:srgbClr val="64716D"/>
+                </a:solidFill>
+                <a:latin typeface="Aptos"/>
+              </a:rPr>
+              <a:t> </a:t>
+            </a:r>
+            <a:r>
+              <a:rPr sz="1050" b="0" i="0" dirty="0" err="1">
+                <a:solidFill>
+                  <a:srgbClr val="64716D"/>
+                </a:solidFill>
+                <a:latin typeface="Aptos"/>
+              </a:rPr>
+              <a:t>отлично</a:t>
+            </a:r>
+            <a:r>
+              <a:rPr sz="1050" b="0" i="0" dirty="0">
+                <a:solidFill>
+                  <a:srgbClr val="64716D"/>
+                </a:solidFill>
+                <a:latin typeface="Aptos"/>
+              </a:rPr>
+              <a:t> </a:t>
+            </a:r>
+            <a:r>
+              <a:rPr sz="1050" b="0" i="0" dirty="0" err="1">
+                <a:solidFill>
+                  <a:srgbClr val="64716D"/>
+                </a:solidFill>
+                <a:latin typeface="Aptos"/>
+              </a:rPr>
+              <a:t>доступны</a:t>
+            </a:r>
+            <a:r>
+              <a:rPr sz="1050" b="0" i="0" dirty="0">
+                <a:solidFill>
+                  <a:srgbClr val="64716D"/>
+                </a:solidFill>
+                <a:latin typeface="Aptos"/>
+              </a:rPr>
+              <a:t> в </a:t>
+            </a:r>
+            <a:r>
+              <a:rPr sz="1050" b="0" i="0" dirty="0" err="1">
+                <a:solidFill>
+                  <a:srgbClr val="64716D"/>
+                </a:solidFill>
+                <a:latin typeface="Aptos"/>
+              </a:rPr>
+              <a:t>цифровом</a:t>
+            </a:r>
+            <a:r>
+              <a:rPr sz="1050" b="0" i="0" dirty="0">
+                <a:solidFill>
+                  <a:srgbClr val="64716D"/>
+                </a:solidFill>
+                <a:latin typeface="Aptos"/>
+              </a:rPr>
+              <a:t> </a:t>
+            </a:r>
+            <a:r>
+              <a:rPr sz="1050" b="0" i="0" dirty="0" err="1">
+                <a:solidFill>
+                  <a:srgbClr val="64716D"/>
+                </a:solidFill>
+                <a:latin typeface="Aptos"/>
+              </a:rPr>
+              <a:t>пространстве</a:t>
+            </a:r>
+            <a:r>
+              <a:rPr sz="1050" b="0" i="0" dirty="0">
+                <a:solidFill>
+                  <a:srgbClr val="64716D"/>
+                </a:solidFill>
+                <a:latin typeface="Aptos"/>
+              </a:rPr>
+              <a:t>: 88,6 % </a:t>
+            </a:r>
+            <a:r>
+              <a:rPr sz="1050" b="0" i="0" dirty="0" err="1">
+                <a:solidFill>
+                  <a:srgbClr val="64716D"/>
+                </a:solidFill>
+                <a:latin typeface="Aptos"/>
+              </a:rPr>
+              <a:t>используют</a:t>
+            </a:r>
+            <a:r>
+              <a:rPr sz="1050" b="0" i="0" dirty="0">
+                <a:solidFill>
+                  <a:srgbClr val="64716D"/>
+                </a:solidFill>
+                <a:latin typeface="Aptos"/>
+              </a:rPr>
+              <a:t> WhatsApp, </a:t>
+            </a:r>
+            <a:r>
+              <a:rPr sz="1050" b="0" i="0" dirty="0" err="1">
+                <a:solidFill>
+                  <a:srgbClr val="64716D"/>
+                </a:solidFill>
+                <a:latin typeface="Aptos"/>
+              </a:rPr>
+              <a:t>более</a:t>
+            </a:r>
+            <a:r>
+              <a:rPr sz="1050" b="0" i="0" dirty="0">
+                <a:solidFill>
+                  <a:srgbClr val="64716D"/>
+                </a:solidFill>
+                <a:latin typeface="Aptos"/>
+              </a:rPr>
+              <a:t> 90 % </a:t>
+            </a:r>
+            <a:r>
+              <a:rPr lang="de-DE" sz="1050" b="0" i="0" dirty="0">
+                <a:solidFill>
+                  <a:srgbClr val="64716D"/>
+                </a:solidFill>
+                <a:latin typeface="Aptos"/>
+              </a:rPr>
+              <a:t>-</a:t>
+            </a:r>
+            <a:r>
+              <a:rPr sz="1050" b="0" i="0" dirty="0">
+                <a:solidFill>
+                  <a:srgbClr val="64716D"/>
+                </a:solidFill>
+                <a:latin typeface="Aptos"/>
+              </a:rPr>
+              <a:t> </a:t>
+            </a:r>
+            <a:r>
+              <a:rPr sz="1050" b="0" i="0" dirty="0" err="1">
+                <a:solidFill>
+                  <a:srgbClr val="64716D"/>
+                </a:solidFill>
+                <a:latin typeface="Aptos"/>
+              </a:rPr>
+              <a:t>Интернет</a:t>
+            </a:r>
+            <a:r>
+              <a:rPr sz="1050" b="0" i="0" dirty="0">
+                <a:solidFill>
+                  <a:srgbClr val="64716D"/>
+                </a:solidFill>
+                <a:latin typeface="Aptos"/>
+              </a:rPr>
+              <a:t> в </a:t>
+            </a:r>
+            <a:r>
+              <a:rPr sz="1050" b="0" i="0" dirty="0" err="1">
+                <a:solidFill>
+                  <a:srgbClr val="64716D"/>
+                </a:solidFill>
+                <a:latin typeface="Aptos"/>
+              </a:rPr>
+              <a:t>Турции</a:t>
+            </a:r>
+            <a:r>
+              <a:rPr sz="1050" b="0" i="0" dirty="0">
+                <a:solidFill>
+                  <a:srgbClr val="64716D"/>
+                </a:solidFill>
+                <a:latin typeface="Aptos"/>
+              </a:rPr>
+              <a:t>. </a:t>
+            </a:r>
+            <a:r>
+              <a:rPr sz="1050" b="0" i="0" dirty="0" err="1">
+                <a:solidFill>
+                  <a:srgbClr val="64716D"/>
+                </a:solidFill>
+                <a:latin typeface="Aptos"/>
+              </a:rPr>
+              <a:t>Это</a:t>
+            </a:r>
+            <a:r>
+              <a:rPr sz="1050" b="0" i="0" dirty="0">
+                <a:solidFill>
+                  <a:srgbClr val="64716D"/>
+                </a:solidFill>
+                <a:latin typeface="Aptos"/>
+              </a:rPr>
+              <a:t> </a:t>
+            </a:r>
+            <a:r>
+              <a:rPr sz="1050" b="0" i="0" dirty="0" err="1">
+                <a:solidFill>
+                  <a:srgbClr val="64716D"/>
+                </a:solidFill>
+                <a:latin typeface="Aptos"/>
+              </a:rPr>
+              <a:t>способствует</a:t>
+            </a:r>
+            <a:r>
+              <a:rPr sz="1050" b="0" i="0" dirty="0">
+                <a:solidFill>
+                  <a:srgbClr val="64716D"/>
+                </a:solidFill>
+                <a:latin typeface="Aptos"/>
+              </a:rPr>
+              <a:t> </a:t>
+            </a:r>
+            <a:r>
+              <a:rPr sz="1050" b="0" i="0" dirty="0" err="1">
+                <a:solidFill>
+                  <a:srgbClr val="64716D"/>
+                </a:solidFill>
+                <a:latin typeface="Aptos"/>
+              </a:rPr>
+              <a:t>внедрению</a:t>
+            </a:r>
+            <a:r>
+              <a:rPr sz="1050" b="0" i="0" dirty="0">
+                <a:solidFill>
+                  <a:srgbClr val="64716D"/>
+                </a:solidFill>
+                <a:latin typeface="Aptos"/>
+              </a:rPr>
+              <a:t> </a:t>
+            </a:r>
+            <a:r>
+              <a:rPr sz="1050" b="0" i="0" dirty="0" err="1">
+                <a:solidFill>
+                  <a:srgbClr val="64716D"/>
+                </a:solidFill>
+                <a:latin typeface="Aptos"/>
+              </a:rPr>
+              <a:t>многоязычного</a:t>
+            </a:r>
+            <a:r>
+              <a:rPr sz="1050" b="0" i="0" dirty="0">
+                <a:solidFill>
+                  <a:srgbClr val="64716D"/>
+                </a:solidFill>
+                <a:latin typeface="Aptos"/>
+              </a:rPr>
+              <a:t> </a:t>
+            </a:r>
+            <a:r>
+              <a:rPr sz="1050" b="0" i="0" dirty="0" err="1">
+                <a:solidFill>
+                  <a:srgbClr val="64716D"/>
+                </a:solidFill>
+                <a:latin typeface="Aptos"/>
+              </a:rPr>
+              <a:t>веб-приложения</a:t>
+            </a:r>
+            <a:r>
+              <a:rPr sz="1050" b="0" i="0" dirty="0">
+                <a:solidFill>
+                  <a:srgbClr val="64716D"/>
+                </a:solidFill>
+                <a:latin typeface="Aptos"/>
+              </a:rPr>
+              <a:t>, </a:t>
+            </a:r>
+            <a:r>
+              <a:rPr sz="1050" b="0" i="0" dirty="0" err="1">
+                <a:solidFill>
+                  <a:srgbClr val="64716D"/>
+                </a:solidFill>
+                <a:latin typeface="Aptos"/>
+              </a:rPr>
+              <a:t>которое</a:t>
+            </a:r>
+            <a:r>
+              <a:rPr sz="1050" b="0" i="0" dirty="0">
+                <a:solidFill>
+                  <a:srgbClr val="64716D"/>
+                </a:solidFill>
+                <a:latin typeface="Aptos"/>
+              </a:rPr>
+              <a:t> </a:t>
+            </a:r>
+            <a:r>
+              <a:rPr sz="1050" b="0" i="0" dirty="0" err="1">
+                <a:solidFill>
+                  <a:srgbClr val="64716D"/>
+                </a:solidFill>
+                <a:latin typeface="Aptos"/>
+              </a:rPr>
+              <a:t>можно</a:t>
+            </a:r>
+            <a:r>
+              <a:rPr sz="1050" b="0" i="0" dirty="0">
+                <a:solidFill>
+                  <a:srgbClr val="64716D"/>
+                </a:solidFill>
+                <a:latin typeface="Aptos"/>
+              </a:rPr>
+              <a:t> </a:t>
+            </a:r>
+            <a:r>
+              <a:rPr sz="1050" b="0" i="0" dirty="0" err="1">
+                <a:solidFill>
+                  <a:srgbClr val="64716D"/>
+                </a:solidFill>
+                <a:latin typeface="Aptos"/>
+              </a:rPr>
+              <a:t>установить</a:t>
+            </a:r>
+            <a:r>
+              <a:rPr sz="1050" b="0" i="0" dirty="0">
+                <a:solidFill>
+                  <a:srgbClr val="64716D"/>
+                </a:solidFill>
+                <a:latin typeface="Aptos"/>
+              </a:rPr>
+              <a:t> и </a:t>
+            </a:r>
+            <a:r>
+              <a:rPr sz="1050" b="0" i="0" dirty="0" err="1">
+                <a:solidFill>
+                  <a:srgbClr val="64716D"/>
+                </a:solidFill>
+                <a:latin typeface="Aptos"/>
+              </a:rPr>
+              <a:t>запустить</a:t>
+            </a:r>
+            <a:r>
+              <a:rPr sz="1050" b="0" i="0" dirty="0">
+                <a:solidFill>
+                  <a:srgbClr val="64716D"/>
+                </a:solidFill>
+                <a:latin typeface="Aptos"/>
+              </a:rPr>
+              <a:t> </a:t>
+            </a:r>
+            <a:r>
+              <a:rPr sz="1050" b="0" i="0" dirty="0" err="1">
+                <a:solidFill>
+                  <a:srgbClr val="64716D"/>
+                </a:solidFill>
+                <a:latin typeface="Aptos"/>
+              </a:rPr>
+              <a:t>на</a:t>
+            </a:r>
+            <a:r>
+              <a:rPr sz="1050" b="0" i="0" dirty="0">
+                <a:solidFill>
+                  <a:srgbClr val="64716D"/>
+                </a:solidFill>
+                <a:latin typeface="Aptos"/>
+              </a:rPr>
+              <a:t> </a:t>
+            </a:r>
+            <a:r>
+              <a:rPr sz="1050" b="0" i="0" dirty="0" err="1">
+                <a:solidFill>
+                  <a:srgbClr val="64716D"/>
+                </a:solidFill>
+                <a:latin typeface="Aptos"/>
+              </a:rPr>
+              <a:t>любом</a:t>
+            </a:r>
+            <a:r>
+              <a:rPr sz="1050" b="0" i="0" dirty="0">
+                <a:solidFill>
+                  <a:srgbClr val="64716D"/>
+                </a:solidFill>
+                <a:latin typeface="Aptos"/>
+              </a:rPr>
+              <a:t> </a:t>
+            </a:r>
+            <a:r>
+              <a:rPr sz="1050" b="0" i="0" dirty="0" err="1">
+                <a:solidFill>
+                  <a:srgbClr val="64716D"/>
+                </a:solidFill>
+                <a:latin typeface="Aptos"/>
+              </a:rPr>
+              <a:t>устройстве</a:t>
+            </a:r>
+            <a:r>
+              <a:rPr sz="1050" b="0" i="0" dirty="0">
+                <a:solidFill>
+                  <a:srgbClr val="64716D"/>
+                </a:solidFill>
+                <a:latin typeface="Aptos"/>
+              </a:rPr>
+              <a:t> </a:t>
+            </a:r>
+            <a:r>
+              <a:rPr sz="1050" b="0" i="0" dirty="0" err="1">
+                <a:solidFill>
+                  <a:srgbClr val="64716D"/>
+                </a:solidFill>
+                <a:latin typeface="Aptos"/>
+              </a:rPr>
+              <a:t>без</a:t>
+            </a:r>
+            <a:r>
+              <a:rPr sz="1050" b="0" i="0" dirty="0">
+                <a:solidFill>
+                  <a:srgbClr val="64716D"/>
+                </a:solidFill>
+                <a:latin typeface="Aptos"/>
+              </a:rPr>
+              <a:t> </a:t>
+            </a:r>
+            <a:r>
+              <a:rPr sz="1050" b="0" i="0" dirty="0" err="1">
+                <a:solidFill>
+                  <a:srgbClr val="64716D"/>
+                </a:solidFill>
+                <a:latin typeface="Aptos"/>
+              </a:rPr>
+              <a:t>необходимости</a:t>
+            </a:r>
+            <a:r>
+              <a:rPr sz="1050" b="0" i="0" dirty="0">
+                <a:solidFill>
+                  <a:srgbClr val="64716D"/>
+                </a:solidFill>
+                <a:latin typeface="Aptos"/>
+              </a:rPr>
+              <a:t> </a:t>
+            </a:r>
+            <a:r>
+              <a:rPr sz="1050" b="0" i="0" dirty="0" err="1">
+                <a:solidFill>
+                  <a:srgbClr val="64716D"/>
+                </a:solidFill>
+                <a:latin typeface="Aptos"/>
+              </a:rPr>
+              <a:t>загрузки</a:t>
+            </a:r>
+            <a:r>
+              <a:rPr sz="1050" b="0" i="0" dirty="0">
+                <a:solidFill>
+                  <a:srgbClr val="64716D"/>
+                </a:solidFill>
+                <a:latin typeface="Aptos"/>
+              </a:rPr>
+              <a:t> </a:t>
+            </a:r>
+            <a:r>
+              <a:rPr sz="1050" b="0" i="0" dirty="0" err="1">
+                <a:solidFill>
+                  <a:srgbClr val="64716D"/>
+                </a:solidFill>
+                <a:latin typeface="Aptos"/>
+              </a:rPr>
+              <a:t>из</a:t>
+            </a:r>
+            <a:r>
+              <a:rPr sz="1050" b="0" i="0" dirty="0">
+                <a:solidFill>
+                  <a:srgbClr val="64716D"/>
+                </a:solidFill>
+                <a:latin typeface="Aptos"/>
+              </a:rPr>
+              <a:t> </a:t>
+            </a:r>
+            <a:r>
+              <a:rPr sz="1050" b="0" i="0" dirty="0" err="1">
+                <a:solidFill>
+                  <a:srgbClr val="64716D"/>
+                </a:solidFill>
+                <a:latin typeface="Aptos"/>
+              </a:rPr>
+              <a:t>магазина</a:t>
+            </a:r>
+            <a:r>
+              <a:rPr sz="1050" b="0" i="0" dirty="0">
+                <a:solidFill>
+                  <a:srgbClr val="64716D"/>
+                </a:solidFill>
+                <a:latin typeface="Aptos"/>
+              </a:rPr>
+              <a:t> </a:t>
+            </a:r>
+            <a:r>
+              <a:rPr sz="1050" b="0" i="0" dirty="0" err="1">
+                <a:solidFill>
+                  <a:srgbClr val="64716D"/>
+                </a:solidFill>
+                <a:latin typeface="Aptos"/>
+              </a:rPr>
+              <a:t>приложений</a:t>
+            </a:r>
+            <a:r>
+              <a:rPr sz="1050" b="0" i="0" dirty="0">
+                <a:solidFill>
+                  <a:srgbClr val="64716D"/>
+                </a:solidFill>
+                <a:latin typeface="Aptos"/>
+              </a:rPr>
+              <a:t>.</a:t>
             </a:r>
           </a:p>
         </p:txBody>
@@ -37361,7 +42164,7 @@
                 </a:solidFill>
                 <a:latin typeface="Aptos"/>
               </a:rPr>
-              <a:t>— </a:t>
+              <a:t>- </a:t>
             </a:r>
             <a:r>
               <a:rPr sz="750" b="0" i="0" dirty="0">
@@ -37907,7 +42710,7 @@
         </p:nvGraphicFramePr>
         <p:xfrm>
           <a:off x="640080" y="2057400"/>
-          <a:ext cx="10881359" cy="1911096"/>
+          <a:ext cx="10881359" cy="2098548"/>
         </p:xfrm>
         <a:graphic>
           <a:graphicData uri="http://schemas.openxmlformats.org/drawingml/2006/table">
@@ -38156,7 +42959,34 @@
                           </a:solidFill>
                           <a:latin typeface="Aptos"/>
                         </a:rPr>
-                        <a:t>задокументированные функции ИИ </a:t>
+                        <a:t>задокументированные</a:t>
+                      </a:r>
+                      <a:r>
+                        <a:rPr sz="1050" b="0" i="0" dirty="0">
+                          <a:solidFill>
+                            <a:srgbClr val="33413D"/>
+                          </a:solidFill>
+                          <a:latin typeface="Aptos"/>
+                        </a:rPr>
+                        <a:t> </a:t>
+                      </a:r>
+                      <a:r>
+                        <a:rPr sz="1050" b="0" i="0" dirty="0" err="1">
+                          <a:solidFill>
+                            <a:srgbClr val="33413D"/>
+                          </a:solidFill>
+                          <a:latin typeface="Aptos"/>
+                        </a:rPr>
+                        <a:t>функции</a:t>
+                      </a:r>
+                      <a:r>
+                        <a:rPr sz="1050" b="0" i="0" dirty="0">
+                          <a:solidFill>
+                            <a:srgbClr val="33413D"/>
+                          </a:solidFill>
+                          <a:latin typeface="Aptos"/>
+                        </a:rPr>
+                        <a:t> ИИ </a:t>
                       </a:r>
                       <a:r>
                         <a:rPr lang="de-DE" sz="1050" b="0" i="0" dirty="0">
@@ -38165,7 +42995,7 @@
                           </a:solidFill>
                           <a:latin typeface="Aptos"/>
                         </a:rPr>
-                        <a:t>— </a:t>
+                        <a:t>- </a:t>
                       </a:r>
                       <a:r>
                         <a:rPr sz="1050" b="0" i="0" dirty="0">
@@ -38356,7 +43186,52 @@
                           </a:solidFill>
                           <a:latin typeface="Aptos"/>
                         </a:rPr>
-                        <a:t>Сигнал раннего предупреждения </a:t>
+                        <a:t>Сигнал</a:t>
+                      </a:r>
+                      <a:r>
+                        <a:rPr sz="1050" b="0" i="0" dirty="0">
+                          <a:solidFill>
+                            <a:srgbClr val="33413D"/>
+                          </a:solidFill>
+                          <a:latin typeface="Aptos"/>
+                        </a:rPr>
+                        <a:t> </a:t>
+                      </a:r>
+                      <a:r>
+                        <a:rPr sz="1050" b="0" i="0" dirty="0" err="1">
+                          <a:solidFill>
+                            <a:srgbClr val="33413D"/>
+                          </a:solidFill>
+                          <a:latin typeface="Aptos"/>
+                        </a:rPr>
+                        <a:t>раннего</a:t>
+                      </a:r>
+                      <a:r>
+                        <a:rPr sz="1050" b="0" i="0" dirty="0">
+                          <a:solidFill>
+                            <a:srgbClr val="33413D"/>
+                          </a:solidFill>
+                          <a:latin typeface="Aptos"/>
+                        </a:rPr>
+                        <a:t> </a:t>
+                      </a:r>
+                      <a:r>
+                        <a:rPr sz="1050" b="0" i="0" dirty="0" err="1">
+                          <a:solidFill>
+                            <a:srgbClr val="33413D"/>
+                          </a:solidFill>
+                          <a:latin typeface="Aptos"/>
+                        </a:rPr>
+                        <a:t>предупреждения</a:t>
+                      </a:r>
+                      <a:r>
+                        <a:rPr sz="1050" b="0" i="0" dirty="0">
+                          <a:solidFill>
+                            <a:srgbClr val="33413D"/>
+                          </a:solidFill>
+                          <a:latin typeface="Aptos"/>
+                        </a:rPr>
+                        <a:t> </a:t>
                       </a:r>
                       <a:r>
                         <a:rPr lang="de-DE" sz="1050" b="0" i="0" dirty="0">
@@ -38365,7 +43240,7 @@
                           </a:solidFill>
                           <a:latin typeface="Aptos"/>
                         </a:rPr>
-                        <a:t>— </a:t>
+                        <a:t>- </a:t>
                       </a:r>
                       <a:r>
                         <a:rPr sz="1050" b="0" i="0" dirty="0" err="1">
@@ -38459,7 +43334,7 @@
                 </a:solidFill>
                 <a:latin typeface="Aptos"/>
               </a:rPr>
-              <a:t>— </a:t>
+              <a:t>- </a:t>
             </a:r>
             <a:r>
               <a:rPr sz="750" b="0" i="0" dirty="0">
@@ -39418,8 +44293,8 @@
         </p:nvSpPr>
         <p:spPr>
           <a:xfrm>
-            <a:off x="896112" y="5461754"/>
-            <a:ext cx="10469880" cy="369332"/>
+            <a:off x="896112" y="5373269"/>
+            <a:ext cx="10469880" cy="546303"/>
           </a:xfrm>
           <a:prstGeom prst="rect">
             <a:avLst/>
@@ -39610,7 +44485,52 @@
                 </a:solidFill>
                 <a:latin typeface="Aptos"/>
               </a:rPr>
-              <a:t>Именно эта комбинация </a:t>
+              <a:t>Именно</a:t>
+            </a:r>
+            <a:r>
+              <a:rPr sz="1150" b="0" i="0" dirty="0">
+                <a:solidFill>
+                  <a:srgbClr val="33413D"/>
+                </a:solidFill>
+                <a:latin typeface="Aptos"/>
+              </a:rPr>
+              <a:t> </a:t>
+            </a:r>
+            <a:r>
+              <a:rPr sz="1150" b="0" i="0" dirty="0" err="1">
+                <a:solidFill>
+                  <a:srgbClr val="33413D"/>
+                </a:solidFill>
+                <a:latin typeface="Aptos"/>
+              </a:rPr>
+              <a:t>эта</a:t>
+            </a:r>
+            <a:r>
+              <a:rPr sz="1150" b="0" i="0" dirty="0">
+                <a:solidFill>
+                  <a:srgbClr val="33413D"/>
+                </a:solidFill>
+                <a:latin typeface="Aptos"/>
+              </a:rPr>
+              <a:t> </a:t>
+            </a:r>
+            <a:r>
+              <a:rPr sz="1150" b="0" i="0" dirty="0" err="1">
+                <a:solidFill>
+                  <a:srgbClr val="33413D"/>
+                </a:solidFill>
+                <a:latin typeface="Aptos"/>
+              </a:rPr>
+              <a:t>комбинация</a:t>
+            </a:r>
+            <a:r>
+              <a:rPr sz="1150" b="0" i="0" dirty="0">
+                <a:solidFill>
+                  <a:srgbClr val="33413D"/>
+                </a:solidFill>
+                <a:latin typeface="Aptos"/>
+              </a:rPr>
+              <a:t> </a:t>
             </a:r>
             <a:r>
               <a:rPr lang="de-DE" sz="1150" b="0" i="0" dirty="0">
@@ -39619,7 +44539,7 @@
                 </a:solidFill>
                 <a:latin typeface="Aptos"/>
               </a:rPr>
-              <a:t>— </a:t>
+              <a:t>- </a:t>
             </a:r>
             <a:r>
               <a:rPr sz="1150" b="0" i="0" dirty="0">
@@ -39637,7 +44557,7 @@
                 </a:solidFill>
                 <a:latin typeface="Aptos"/>
               </a:rPr>
-              <a:t>какая-то отдельная </a:t>
+              <a:t>какая-то</a:t>
             </a:r>
             <a:r>
               <a:rPr sz="1150" b="0" i="0" dirty="0">
@@ -39646,7 +44566,43 @@
                 </a:solidFill>
                 <a:latin typeface="Aptos"/>
               </a:rPr>
-              <a:t>функция </a:t>
+              <a:t> </a:t>
+            </a:r>
+            <a:r>
+              <a:rPr sz="1150" b="0" i="0" dirty="0" err="1">
+                <a:solidFill>
+                  <a:srgbClr val="33413D"/>
+                </a:solidFill>
+                <a:latin typeface="Aptos"/>
+              </a:rPr>
+              <a:t>отдельная</a:t>
+            </a:r>
+            <a:r>
+              <a:rPr sz="1150" b="0" i="0" dirty="0">
+                <a:solidFill>
+                  <a:srgbClr val="33413D"/>
+                </a:solidFill>
+                <a:latin typeface="Aptos"/>
+              </a:rPr>
+              <a:t> </a:t>
+            </a:r>
+            <a:r>
+              <a:rPr sz="1150" b="0" i="0" dirty="0" err="1">
+                <a:solidFill>
+                  <a:srgbClr val="33413D"/>
+                </a:solidFill>
+                <a:latin typeface="Aptos"/>
+              </a:rPr>
+              <a:t>функция</a:t>
+            </a:r>
+            <a:r>
+              <a:rPr sz="1150" b="0" i="0" dirty="0">
+                <a:solidFill>
+                  <a:srgbClr val="33413D"/>
+                </a:solidFill>
+                <a:latin typeface="Aptos"/>
+              </a:rPr>
+              <a:t> </a:t>
             </a:r>
             <a:r>
               <a:rPr lang="de-DE" sz="1150" b="0" i="0" dirty="0">
@@ -39655,7 +44611,7 @@
                 </a:solidFill>
                 <a:latin typeface="Aptos"/>
               </a:rPr>
-              <a:t>— </a:t>
+              <a:t>- </a:t>
             </a:r>
             <a:r>
               <a:rPr sz="1150" b="0" i="0" dirty="0">
@@ -39725,7 +44681,7 @@
                 </a:solidFill>
                 <a:latin typeface="Aptos"/>
               </a:rPr>
-              <a:t>— </a:t>
+              <a:t>- </a:t>
             </a:r>
             <a:r>
               <a:rPr sz="750" b="0" i="0" dirty="0">
